--- a/case-study/StainlessCarbon_Round1.pptx
+++ b/case-study/StainlessCarbon_Round1.pptx
@@ -3113,6 +3113,50 @@
           </a:prstGeom>
         </p:spPr>
       </p:pic>
+      <p:sp>
+        <p:nvSpPr>
+          <p:cNvPr id="3" name="Rectangle 2">
+            <a:hlinkClick r:id="rId3"/>
+          </p:cNvPr>
+          <p:cNvSpPr/>
+          <p:nvPr/>
+        </p:nvSpPr>
+        <p:spPr>
+          <a:xfrm>
+            <a:off x="182880" y="6419088"/>
+            <a:ext cx="11795760" cy="411480"/>
+          </a:xfrm>
+          <a:prstGeom prst="rect">
+            <a:avLst/>
+          </a:prstGeom>
+          <a:noFill/>
+          <a:ln>
+            <a:noFill/>
+          </a:ln>
+          <a:effectLst/>
+        </p:spPr>
+        <p:style>
+          <a:lnRef idx="1">
+            <a:schemeClr val="accent1"/>
+          </a:lnRef>
+          <a:fillRef idx="3">
+            <a:schemeClr val="accent1"/>
+          </a:fillRef>
+          <a:effectRef idx="2">
+            <a:schemeClr val="accent1"/>
+          </a:effectRef>
+          <a:fontRef idx="minor">
+            <a:schemeClr val="lt1"/>
+          </a:fontRef>
+        </p:style>
+        <p:txBody>
+          <a:bodyPr rtlCol="0" anchor="ctr"/>
+          <a:lstStyle/>
+          <a:p>
+            <a:pPr algn="ctr"/>
+          </a:p>
+        </p:txBody>
+      </p:sp>
     </p:spTree>
   </p:cSld>
   <p:clrMapOvr>
@@ -3155,6 +3199,50 @@
           </a:prstGeom>
         </p:spPr>
       </p:pic>
+      <p:sp>
+        <p:nvSpPr>
+          <p:cNvPr id="3" name="Rectangle 2">
+            <a:hlinkClick r:id="rId3"/>
+          </p:cNvPr>
+          <p:cNvSpPr/>
+          <p:nvPr/>
+        </p:nvSpPr>
+        <p:spPr>
+          <a:xfrm>
+            <a:off x="182880" y="6419088"/>
+            <a:ext cx="11795760" cy="411480"/>
+          </a:xfrm>
+          <a:prstGeom prst="rect">
+            <a:avLst/>
+          </a:prstGeom>
+          <a:noFill/>
+          <a:ln>
+            <a:noFill/>
+          </a:ln>
+          <a:effectLst/>
+        </p:spPr>
+        <p:style>
+          <a:lnRef idx="1">
+            <a:schemeClr val="accent1"/>
+          </a:lnRef>
+          <a:fillRef idx="3">
+            <a:schemeClr val="accent1"/>
+          </a:fillRef>
+          <a:effectRef idx="2">
+            <a:schemeClr val="accent1"/>
+          </a:effectRef>
+          <a:fontRef idx="minor">
+            <a:schemeClr val="lt1"/>
+          </a:fontRef>
+        </p:style>
+        <p:txBody>
+          <a:bodyPr rtlCol="0" anchor="ctr"/>
+          <a:lstStyle/>
+          <a:p>
+            <a:pPr algn="ctr"/>
+          </a:p>
+        </p:txBody>
+      </p:sp>
     </p:spTree>
   </p:cSld>
   <p:clrMapOvr>

--- a/case-study/StainlessCarbon_Round1.pptx
+++ b/case-study/StainlessCarbon_Round1.pptx
@@ -3124,7 +3124,51 @@
         <p:spPr>
           <a:xfrm>
             <a:off x="182880" y="6419088"/>
-            <a:ext cx="11795760" cy="411480"/>
+            <a:ext cx="7680960" cy="411480"/>
+          </a:xfrm>
+          <a:prstGeom prst="rect">
+            <a:avLst/>
+          </a:prstGeom>
+          <a:noFill/>
+          <a:ln>
+            <a:noFill/>
+          </a:ln>
+          <a:effectLst/>
+        </p:spPr>
+        <p:style>
+          <a:lnRef idx="1">
+            <a:schemeClr val="accent1"/>
+          </a:lnRef>
+          <a:fillRef idx="3">
+            <a:schemeClr val="accent1"/>
+          </a:fillRef>
+          <a:effectRef idx="2">
+            <a:schemeClr val="accent1"/>
+          </a:effectRef>
+          <a:fontRef idx="minor">
+            <a:schemeClr val="lt1"/>
+          </a:fontRef>
+        </p:style>
+        <p:txBody>
+          <a:bodyPr rtlCol="0" anchor="ctr"/>
+          <a:lstStyle/>
+          <a:p>
+            <a:pPr algn="ctr"/>
+          </a:p>
+        </p:txBody>
+      </p:sp>
+      <p:sp>
+        <p:nvSpPr>
+          <p:cNvPr id="4" name="Rectangle 3">
+            <a:hlinkClick r:id="rId4"/>
+          </p:cNvPr>
+          <p:cNvSpPr/>
+          <p:nvPr/>
+        </p:nvSpPr>
+        <p:spPr>
+          <a:xfrm>
+            <a:off x="7955279" y="6419088"/>
+            <a:ext cx="4023360" cy="411480"/>
           </a:xfrm>
           <a:prstGeom prst="rect">
             <a:avLst/>
@@ -3210,7 +3254,51 @@
         <p:spPr>
           <a:xfrm>
             <a:off x="182880" y="6419088"/>
-            <a:ext cx="11795760" cy="411480"/>
+            <a:ext cx="7680960" cy="411480"/>
+          </a:xfrm>
+          <a:prstGeom prst="rect">
+            <a:avLst/>
+          </a:prstGeom>
+          <a:noFill/>
+          <a:ln>
+            <a:noFill/>
+          </a:ln>
+          <a:effectLst/>
+        </p:spPr>
+        <p:style>
+          <a:lnRef idx="1">
+            <a:schemeClr val="accent1"/>
+          </a:lnRef>
+          <a:fillRef idx="3">
+            <a:schemeClr val="accent1"/>
+          </a:fillRef>
+          <a:effectRef idx="2">
+            <a:schemeClr val="accent1"/>
+          </a:effectRef>
+          <a:fontRef idx="minor">
+            <a:schemeClr val="lt1"/>
+          </a:fontRef>
+        </p:style>
+        <p:txBody>
+          <a:bodyPr rtlCol="0" anchor="ctr"/>
+          <a:lstStyle/>
+          <a:p>
+            <a:pPr algn="ctr"/>
+          </a:p>
+        </p:txBody>
+      </p:sp>
+      <p:sp>
+        <p:nvSpPr>
+          <p:cNvPr id="4" name="Rectangle 3">
+            <a:hlinkClick r:id="rId4"/>
+          </p:cNvPr>
+          <p:cNvSpPr/>
+          <p:nvPr/>
+        </p:nvSpPr>
+        <p:spPr>
+          <a:xfrm>
+            <a:off x="7955279" y="6419088"/>
+            <a:ext cx="4023360" cy="411480"/>
           </a:xfrm>
           <a:prstGeom prst="rect">
             <a:avLst/>

--- a/case-study/StainlessCarbon_Round1.pptx
+++ b/case-study/StainlessCarbon_Round1.pptx
@@ -3082,6 +3082,14 @@
 <file path=ppt/slides/slide1.xml><?xml version="1.0" encoding="utf-8"?>
 <p:sld xmlns:a="http://schemas.openxmlformats.org/drawingml/2006/main" xmlns:p="http://schemas.openxmlformats.org/presentationml/2006/main" xmlns:r="http://schemas.openxmlformats.org/officeDocument/2006/relationships">
   <p:cSld>
+    <p:bg>
+      <p:bgPr>
+        <a:solidFill>
+          <a:srgbClr val="FFFFFF"/>
+        </a:solidFill>
+        <a:effectLst/>
+      </p:bgPr>
+    </p:bg>
     <p:spTree>
       <p:nvGrpSpPr>
         <p:cNvPr id="1" name=""/>
@@ -3089,47 +3097,172 @@
         <p:nvPr/>
       </p:nvGrpSpPr>
       <p:grpSpPr/>
-      <p:pic>
-        <p:nvPicPr>
-          <p:cNvPr id="2" name="Picture 1" descr="slide1.png"/>
-          <p:cNvPicPr>
-            <a:picLocks noChangeAspect="1"/>
-          </p:cNvPicPr>
+      <p:sp>
+        <p:nvSpPr>
+          <p:cNvPr id="2" name="TextBox 1"/>
+          <p:cNvSpPr txBox="1"/>
           <p:nvPr/>
-        </p:nvPicPr>
-        <p:blipFill>
-          <a:blip r:embed="rId2"/>
-          <a:stretch>
-            <a:fillRect/>
-          </a:stretch>
-        </p:blipFill>
-        <p:spPr>
-          <a:xfrm>
-            <a:off x="0" y="0"/>
-            <a:ext cx="12191695" cy="6858000"/>
-          </a:xfrm>
-          <a:prstGeom prst="rect">
-            <a:avLst/>
-          </a:prstGeom>
-        </p:spPr>
-      </p:pic>
-      <p:sp>
-        <p:nvSpPr>
-          <p:cNvPr id="3" name="Rectangle 2">
-            <a:hlinkClick r:id="rId3"/>
-          </p:cNvPr>
-          <p:cNvSpPr/>
-          <p:nvPr/>
-        </p:nvSpPr>
-        <p:spPr>
-          <a:xfrm>
-            <a:off x="182880" y="6419088"/>
-            <a:ext cx="7680960" cy="411480"/>
+        </p:nvSpPr>
+        <p:spPr>
+          <a:xfrm>
+            <a:off x="292608" y="91440"/>
+            <a:ext cx="9144000" cy="603504"/>
           </a:xfrm>
           <a:prstGeom prst="rect">
             <a:avLst/>
           </a:prstGeom>
           <a:noFill/>
+        </p:spPr>
+        <p:txBody>
+          <a:bodyPr wrap="square" anchor="t" lIns="19050" rIns="19050" tIns="6350" bIns="6350">
+            <a:spAutoFit/>
+          </a:bodyPr>
+          <a:lstStyle/>
+          <a:p>
+            <a:pPr algn="l">
+              <a:lnSpc>
+                <a:spcPct val="108000"/>
+              </a:lnSpc>
+              <a:spcAft>
+                <a:spcPts val="100"/>
+              </a:spcAft>
+            </a:pPr>
+            <a:r>
+              <a:rPr sz="1450" b="0">
+                <a:solidFill>
+                  <a:srgbClr val="123F63"/>
+                </a:solidFill>
+                <a:latin typeface="Segoe UI"/>
+              </a:rPr>
+              <a:t>Stainless steel's carbon is an </a:t>
+            </a:r>
+            <a:r>
+              <a:rPr sz="1450" b="1">
+                <a:solidFill>
+                  <a:srgbClr val="123F63"/>
+                </a:solidFill>
+                <a:latin typeface="Segoe UI"/>
+              </a:rPr>
+              <a:t>alloy-chain problem</a:t>
+            </a:r>
+            <a:r>
+              <a:rPr sz="1450" b="0">
+                <a:solidFill>
+                  <a:srgbClr val="123F63"/>
+                </a:solidFill>
+                <a:latin typeface="Segoe UI"/>
+              </a:rPr>
+              <a:t> — ferrochrome and nickel drive 60–80% of the footprint,</a:t>
+            </a:r>
+          </a:p>
+          <a:p>
+            <a:pPr algn="l">
+              <a:lnSpc>
+                <a:spcPct val="108000"/>
+              </a:lnSpc>
+              <a:spcAft>
+                <a:spcPts val="100"/>
+              </a:spcAft>
+            </a:pPr>
+            <a:r>
+              <a:rPr sz="1450" b="0">
+                <a:solidFill>
+                  <a:srgbClr val="123F63"/>
+                </a:solidFill>
+                <a:latin typeface="Segoe UI"/>
+              </a:rPr>
+              <a:t>and no existing calculator models them. </a:t>
+            </a:r>
+            <a:r>
+              <a:rPr sz="1450" b="1">
+                <a:solidFill>
+                  <a:srgbClr val="123F63"/>
+                </a:solidFill>
+                <a:latin typeface="Segoe UI"/>
+              </a:rPr>
+              <a:t>We built and deployed one that does.</a:t>
+            </a:r>
+          </a:p>
+        </p:txBody>
+      </p:sp>
+      <p:sp>
+        <p:nvSpPr>
+          <p:cNvPr id="3" name="TextBox 2"/>
+          <p:cNvSpPr txBox="1"/>
+          <p:nvPr/>
+        </p:nvSpPr>
+        <p:spPr>
+          <a:xfrm>
+            <a:off x="9464040" y="146304"/>
+            <a:ext cx="2450592" cy="548640"/>
+          </a:xfrm>
+          <a:prstGeom prst="rect">
+            <a:avLst/>
+          </a:prstGeom>
+          <a:noFill/>
+        </p:spPr>
+        <p:txBody>
+          <a:bodyPr wrap="square" anchor="t" lIns="19050" rIns="19050" tIns="6350" bIns="6350">
+            <a:spAutoFit/>
+          </a:bodyPr>
+          <a:lstStyle/>
+          <a:p>
+            <a:pPr algn="r">
+              <a:lnSpc>
+                <a:spcPct val="100000"/>
+              </a:lnSpc>
+              <a:spcAft>
+                <a:spcPts val="150"/>
+              </a:spcAft>
+            </a:pPr>
+            <a:r>
+              <a:rPr sz="750" b="0">
+                <a:solidFill>
+                  <a:srgbClr val="8A94A0"/>
+                </a:solidFill>
+                <a:latin typeface="Segoe UI"/>
+              </a:rPr>
+              <a:t>Jindal Stainless · "Spark the Rising Curve"</a:t>
+            </a:r>
+          </a:p>
+          <a:p>
+            <a:pPr algn="r">
+              <a:lnSpc>
+                <a:spcPct val="100000"/>
+              </a:lnSpc>
+              <a:spcAft>
+                <a:spcPts val="150"/>
+              </a:spcAft>
+            </a:pPr>
+            <a:r>
+              <a:rPr sz="750" b="0">
+                <a:solidFill>
+                  <a:srgbClr val="8A94A0"/>
+                </a:solidFill>
+                <a:latin typeface="Segoe UI"/>
+              </a:rPr>
+              <a:t>Problem Statement 3 · Round 1 · 11 Sep 2026</a:t>
+            </a:r>
+          </a:p>
+        </p:txBody>
+      </p:sp>
+      <p:sp>
+        <p:nvSpPr>
+          <p:cNvPr id="4" name="Rectangle 3"/>
+          <p:cNvSpPr/>
+          <p:nvPr/>
+        </p:nvSpPr>
+        <p:spPr>
+          <a:xfrm>
+            <a:off x="292608" y="731520"/>
+            <a:ext cx="11606479" cy="27940"/>
+          </a:xfrm>
+          <a:prstGeom prst="rect">
+            <a:avLst/>
+          </a:prstGeom>
+          <a:solidFill>
+            <a:srgbClr val="123F63"/>
+          </a:solidFill>
           <a:ln>
             <a:noFill/>
           </a:ln>
@@ -3159,21 +3292,63 @@
       </p:sp>
       <p:sp>
         <p:nvSpPr>
-          <p:cNvPr id="4" name="Rectangle 3">
-            <a:hlinkClick r:id="rId4"/>
-          </p:cNvPr>
-          <p:cNvSpPr/>
+          <p:cNvPr id="5" name="TextBox 4"/>
+          <p:cNvSpPr txBox="1"/>
           <p:nvPr/>
         </p:nvSpPr>
         <p:spPr>
           <a:xfrm>
-            <a:off x="7955279" y="6419088"/>
-            <a:ext cx="4023360" cy="411480"/>
+            <a:off x="292608" y="859536"/>
+            <a:ext cx="2697480" cy="182880"/>
           </a:xfrm>
           <a:prstGeom prst="rect">
             <a:avLst/>
           </a:prstGeom>
           <a:noFill/>
+        </p:spPr>
+        <p:txBody>
+          <a:bodyPr wrap="square" anchor="t" lIns="19050" rIns="19050" tIns="6350" bIns="6350">
+            <a:spAutoFit/>
+          </a:bodyPr>
+          <a:lstStyle/>
+          <a:p>
+            <a:pPr algn="l">
+              <a:lnSpc>
+                <a:spcPct val="100000"/>
+              </a:lnSpc>
+              <a:spcAft>
+                <a:spcPts val="0"/>
+              </a:spcAft>
+            </a:pPr>
+            <a:r>
+              <a:rPr sz="900" b="1">
+                <a:solidFill>
+                  <a:srgbClr val="1B6DB0"/>
+                </a:solidFill>
+                <a:latin typeface="Segoe UI"/>
+              </a:rPr>
+              <a:t>WHY EXISTING TOOLS FALL SHORT</a:t>
+            </a:r>
+          </a:p>
+        </p:txBody>
+      </p:sp>
+      <p:sp>
+        <p:nvSpPr>
+          <p:cNvPr id="6" name="Rectangle 5"/>
+          <p:cNvSpPr/>
+          <p:nvPr/>
+        </p:nvSpPr>
+        <p:spPr>
+          <a:xfrm>
+            <a:off x="292608" y="1051560"/>
+            <a:ext cx="2697480" cy="10160"/>
+          </a:xfrm>
+          <a:prstGeom prst="rect">
+            <a:avLst/>
+          </a:prstGeom>
+          <a:solidFill>
+            <a:srgbClr val="E2E8EF"/>
+          </a:solidFill>
           <a:ln>
             <a:noFill/>
           </a:ln>
@@ -3201,65 +3376,861 @@
           </a:p>
         </p:txBody>
       </p:sp>
-    </p:spTree>
-  </p:cSld>
-  <p:clrMapOvr>
-    <a:masterClrMapping/>
-  </p:clrMapOvr>
-</p:sld>
-</file>
-
-<file path=ppt/slides/slide2.xml><?xml version="1.0" encoding="utf-8"?>
-<p:sld xmlns:a="http://schemas.openxmlformats.org/drawingml/2006/main" xmlns:p="http://schemas.openxmlformats.org/presentationml/2006/main" xmlns:r="http://schemas.openxmlformats.org/officeDocument/2006/relationships">
-  <p:cSld>
-    <p:spTree>
-      <p:nvGrpSpPr>
-        <p:cNvPr id="1" name=""/>
-        <p:cNvGrpSpPr/>
-        <p:nvPr/>
-      </p:nvGrpSpPr>
-      <p:grpSpPr/>
-      <p:pic>
-        <p:nvPicPr>
-          <p:cNvPr id="2" name="Picture 1" descr="slide2.png"/>
-          <p:cNvPicPr>
-            <a:picLocks noChangeAspect="1"/>
-          </p:cNvPicPr>
+      <p:sp>
+        <p:nvSpPr>
+          <p:cNvPr id="7" name="TextBox 6"/>
+          <p:cNvSpPr txBox="1"/>
           <p:nvPr/>
-        </p:nvPicPr>
-        <p:blipFill>
-          <a:blip r:embed="rId2"/>
-          <a:stretch>
-            <a:fillRect/>
-          </a:stretch>
-        </p:blipFill>
-        <p:spPr>
-          <a:xfrm>
-            <a:off x="0" y="0"/>
-            <a:ext cx="12191695" cy="6858000"/>
-          </a:xfrm>
-          <a:prstGeom prst="rect">
-            <a:avLst/>
-          </a:prstGeom>
-        </p:spPr>
-      </p:pic>
-      <p:sp>
-        <p:nvSpPr>
-          <p:cNvPr id="3" name="Rectangle 2">
-            <a:hlinkClick r:id="rId3"/>
-          </p:cNvPr>
-          <p:cNvSpPr/>
-          <p:nvPr/>
-        </p:nvSpPr>
-        <p:spPr>
-          <a:xfrm>
-            <a:off x="182880" y="6419088"/>
-            <a:ext cx="7680960" cy="411480"/>
+        </p:nvSpPr>
+        <p:spPr>
+          <a:xfrm>
+            <a:off x="292608" y="1133856"/>
+            <a:ext cx="2697480" cy="603504"/>
           </a:xfrm>
           <a:prstGeom prst="rect">
             <a:avLst/>
           </a:prstGeom>
           <a:noFill/>
+        </p:spPr>
+        <p:txBody>
+          <a:bodyPr wrap="square" anchor="t" lIns="19050" rIns="19050" tIns="6350" bIns="6350">
+            <a:spAutoFit/>
+          </a:bodyPr>
+          <a:lstStyle/>
+          <a:p>
+            <a:pPr algn="l">
+              <a:lnSpc>
+                <a:spcPct val="102000"/>
+              </a:lnSpc>
+              <a:spcAft>
+                <a:spcPts val="200"/>
+              </a:spcAft>
+            </a:pPr>
+            <a:r>
+              <a:rPr sz="880" b="1">
+                <a:solidFill>
+                  <a:srgbClr val="123F63"/>
+                </a:solidFill>
+                <a:latin typeface="Segoe UI"/>
+              </a:rPr>
+              <a:t>They ignore the alloys. </a:t>
+            </a:r>
+            <a:r>
+              <a:rPr sz="830" b="0">
+                <a:solidFill>
+                  <a:srgbClr val="5B6570"/>
+                </a:solidFill>
+                <a:latin typeface="Segoe UI"/>
+              </a:rPr>
+              <a:t>Odisha ferrochrome runs 5.4–5.9 tCO₂/t (2.5× the global average); NPI carries 60–85 tCO₂/t of contained nickel. Carbon-steel tools model neither.</a:t>
+            </a:r>
+          </a:p>
+        </p:txBody>
+      </p:sp>
+      <p:sp>
+        <p:nvSpPr>
+          <p:cNvPr id="8" name="TextBox 7"/>
+          <p:cNvSpPr txBox="1"/>
+          <p:nvPr/>
+        </p:nvSpPr>
+        <p:spPr>
+          <a:xfrm>
+            <a:off x="292608" y="1755648"/>
+            <a:ext cx="2697480" cy="603504"/>
+          </a:xfrm>
+          <a:prstGeom prst="rect">
+            <a:avLst/>
+          </a:prstGeom>
+          <a:noFill/>
+        </p:spPr>
+        <p:txBody>
+          <a:bodyPr wrap="square" anchor="t" lIns="19050" rIns="19050" tIns="6350" bIns="6350">
+            <a:spAutoFit/>
+          </a:bodyPr>
+          <a:lstStyle/>
+          <a:p>
+            <a:pPr algn="l">
+              <a:lnSpc>
+                <a:spcPct val="102000"/>
+              </a:lnSpc>
+              <a:spcAft>
+                <a:spcPts val="200"/>
+              </a:spcAft>
+            </a:pPr>
+            <a:r>
+              <a:rPr sz="880" b="1">
+                <a:solidFill>
+                  <a:srgbClr val="123F63"/>
+                </a:solidFill>
+                <a:latin typeface="Segoe UI"/>
+              </a:rPr>
+              <a:t>They assume Western grids. </a:t>
+            </a:r>
+            <a:r>
+              <a:rPr sz="830" b="0">
+                <a:solidFill>
+                  <a:srgbClr val="5B6570"/>
+                </a:solidFill>
+                <a:latin typeface="Segoe UI"/>
+              </a:rPr>
+              <a:t>Typical tools use 0.2–0.4 t/MWh; India's grid is 0.710 and captive subcritical coal 1.045 t/MWh (CEA v21.0).</a:t>
+            </a:r>
+          </a:p>
+        </p:txBody>
+      </p:sp>
+      <p:sp>
+        <p:nvSpPr>
+          <p:cNvPr id="9" name="TextBox 8"/>
+          <p:cNvSpPr txBox="1"/>
+          <p:nvPr/>
+        </p:nvSpPr>
+        <p:spPr>
+          <a:xfrm>
+            <a:off x="292608" y="2377440"/>
+            <a:ext cx="2697480" cy="603504"/>
+          </a:xfrm>
+          <a:prstGeom prst="rect">
+            <a:avLst/>
+          </a:prstGeom>
+          <a:noFill/>
+        </p:spPr>
+        <p:txBody>
+          <a:bodyPr wrap="square" anchor="t" lIns="19050" rIns="19050" tIns="6350" bIns="6350">
+            <a:spAutoFit/>
+          </a:bodyPr>
+          <a:lstStyle/>
+          <a:p>
+            <a:pPr algn="l">
+              <a:lnSpc>
+                <a:spcPct val="102000"/>
+              </a:lnSpc>
+              <a:spcAft>
+                <a:spcPts val="200"/>
+              </a:spcAft>
+            </a:pPr>
+            <a:r>
+              <a:rPr sz="880" b="1">
+                <a:solidFill>
+                  <a:srgbClr val="123F63"/>
+                </a:solidFill>
+                <a:latin typeface="Segoe UI"/>
+              </a:rPr>
+              <a:t>They allow infeasible answers. </a:t>
+            </a:r>
+            <a:r>
+              <a:rPr sz="830" b="0">
+                <a:solidFill>
+                  <a:srgbClr val="5B6570"/>
+                </a:solidFill>
+                <a:latin typeface="Segoe UI"/>
+              </a:rPr>
+              <a:t>Sliding scrap to 100% ignores Cu/Sn tramp-element limits and India's 23–25% scrap availability; the practical ceiling is ~80%.</a:t>
+            </a:r>
+          </a:p>
+        </p:txBody>
+      </p:sp>
+      <p:sp>
+        <p:nvSpPr>
+          <p:cNvPr id="10" name="TextBox 9"/>
+          <p:cNvSpPr txBox="1"/>
+          <p:nvPr/>
+        </p:nvSpPr>
+        <p:spPr>
+          <a:xfrm>
+            <a:off x="292608" y="2999232"/>
+            <a:ext cx="2697480" cy="603504"/>
+          </a:xfrm>
+          <a:prstGeom prst="rect">
+            <a:avLst/>
+          </a:prstGeom>
+          <a:noFill/>
+        </p:spPr>
+        <p:txBody>
+          <a:bodyPr wrap="square" anchor="t" lIns="19050" rIns="19050" tIns="6350" bIns="6350">
+            <a:spAutoFit/>
+          </a:bodyPr>
+          <a:lstStyle/>
+          <a:p>
+            <a:pPr algn="l">
+              <a:lnSpc>
+                <a:spcPct val="102000"/>
+              </a:lnSpc>
+              <a:spcAft>
+                <a:spcPts val="200"/>
+              </a:spcAft>
+            </a:pPr>
+            <a:r>
+              <a:rPr sz="880" b="1">
+                <a:solidFill>
+                  <a:srgbClr val="123F63"/>
+                </a:solidFill>
+                <a:latin typeface="Segoe UI"/>
+              </a:rPr>
+              <a:t>They ignore the money. </a:t>
+            </a:r>
+            <a:r>
+              <a:rPr sz="830" b="0">
+                <a:solidFill>
+                  <a:srgbClr val="5B6570"/>
+                </a:solidFill>
+                <a:latin typeface="Segoe UI"/>
+              </a:rPr>
+              <a:t>From 2026 the EU prices every imported tonne (CBAM). Default vs verified data is a €370–400/t swing by 2030.</a:t>
+            </a:r>
+          </a:p>
+        </p:txBody>
+      </p:sp>
+      <p:graphicFrame>
+        <p:nvGraphicFramePr>
+          <p:cNvPr id="11" name="Table 10"/>
+          <p:cNvGraphicFramePr>
+            <a:graphicFrameLocks noGrp="1"/>
+          </p:cNvGraphicFramePr>
+          <p:nvPr/>
+        </p:nvGraphicFramePr>
+        <p:xfrm>
+          <a:off x="292608" y="3657600"/>
+          <a:ext cx="2697480" cy="1415490"/>
+        </p:xfrm>
+        <a:graphic>
+          <a:graphicData uri="http://schemas.openxmlformats.org/drawingml/2006/table">
+            <a:tbl>
+              <a:tblPr firstRow="1" bandRow="1">
+                <a:tableStyleId>{5C22544A-7EE6-4342-B048-85BDC9FD1C3A}</a:tableStyleId>
+              </a:tblPr>
+              <a:tblGrid>
+                <a:gridCol w="1170432"/>
+                <a:gridCol w="640080"/>
+                <a:gridCol w="457200"/>
+                <a:gridCol w="429768"/>
+              </a:tblGrid>
+              <a:tr h="235915">
+                <a:tc>
+                  <a:txBody>
+                    <a:bodyPr wrap="square" lIns="50800" rIns="50800" tIns="12700" bIns="12700" anchor="ctr"/>
+                    <a:lstStyle/>
+                    <a:p>
+                      <a:pPr algn="l"/>
+                      <a:r>
+                        <a:rPr sz="700" b="1">
+                          <a:solidFill>
+                            <a:srgbClr val="5B6570"/>
+                          </a:solidFill>
+                          <a:latin typeface="Segoe UI"/>
+                        </a:rPr>
+                        <a:t/>
+                      </a:r>
+                    </a:p>
+                  </a:txBody>
+                  <a:tcPr>
+                    <a:solidFill>
+                      <a:srgbClr val="EEF2F6"/>
+                    </a:solidFill>
+                  </a:tcPr>
+                </a:tc>
+                <a:tc>
+                  <a:txBody>
+                    <a:bodyPr wrap="square" lIns="50800" rIns="50800" tIns="12700" bIns="12700" anchor="ctr"/>
+                    <a:lstStyle/>
+                    <a:p>
+                      <a:pPr algn="ctr"/>
+                      <a:r>
+                        <a:rPr sz="700" b="1">
+                          <a:solidFill>
+                            <a:srgbClr val="5B6570"/>
+                          </a:solidFill>
+                          <a:latin typeface="Segoe UI"/>
+                        </a:rPr>
+                        <a:t>Primetals</a:t>
+                      </a:r>
+                    </a:p>
+                  </a:txBody>
+                  <a:tcPr>
+                    <a:solidFill>
+                      <a:srgbClr val="EEF2F6"/>
+                    </a:solidFill>
+                  </a:tcPr>
+                </a:tc>
+                <a:tc>
+                  <a:txBody>
+                    <a:bodyPr wrap="square" lIns="50800" rIns="50800" tIns="12700" bIns="12700" anchor="ctr"/>
+                    <a:lstStyle/>
+                    <a:p>
+                      <a:pPr algn="ctr"/>
+                      <a:r>
+                        <a:rPr sz="700" b="1">
+                          <a:solidFill>
+                            <a:srgbClr val="5B6570"/>
+                          </a:solidFill>
+                          <a:latin typeface="Segoe UI"/>
+                        </a:rPr>
+                        <a:t>SSAB</a:t>
+                      </a:r>
+                    </a:p>
+                  </a:txBody>
+                  <a:tcPr>
+                    <a:solidFill>
+                      <a:srgbClr val="EEF2F6"/>
+                    </a:solidFill>
+                  </a:tcPr>
+                </a:tc>
+                <a:tc>
+                  <a:txBody>
+                    <a:bodyPr wrap="square" lIns="50800" rIns="50800" tIns="12700" bIns="12700" anchor="ctr"/>
+                    <a:lstStyle/>
+                    <a:p>
+                      <a:pPr algn="ctr"/>
+                      <a:r>
+                        <a:rPr sz="700" b="1">
+                          <a:solidFill>
+                            <a:srgbClr val="5B6570"/>
+                          </a:solidFill>
+                          <a:latin typeface="Segoe UI"/>
+                        </a:rPr>
+                        <a:t>Ours</a:t>
+                      </a:r>
+                    </a:p>
+                  </a:txBody>
+                  <a:tcPr>
+                    <a:solidFill>
+                      <a:srgbClr val="EEF2F6"/>
+                    </a:solidFill>
+                  </a:tcPr>
+                </a:tc>
+              </a:tr>
+              <a:tr h="235915">
+                <a:tc>
+                  <a:txBody>
+                    <a:bodyPr wrap="square" lIns="50800" rIns="50800" tIns="12700" bIns="12700" anchor="ctr"/>
+                    <a:lstStyle/>
+                    <a:p>
+                      <a:pPr algn="l"/>
+                      <a:r>
+                        <a:rPr sz="760" b="0">
+                          <a:solidFill>
+                            <a:srgbClr val="1F2937"/>
+                          </a:solidFill>
+                          <a:latin typeface="Segoe UI"/>
+                        </a:rPr>
+                        <a:t>Alloy-chain emissions</a:t>
+                      </a:r>
+                    </a:p>
+                  </a:txBody>
+                  <a:tcPr>
+                    <a:solidFill>
+                      <a:srgbClr val="FFFFFF"/>
+                    </a:solidFill>
+                  </a:tcPr>
+                </a:tc>
+                <a:tc>
+                  <a:txBody>
+                    <a:bodyPr wrap="square" lIns="50800" rIns="50800" tIns="12700" bIns="12700" anchor="ctr"/>
+                    <a:lstStyle/>
+                    <a:p>
+                      <a:pPr algn="ctr"/>
+                      <a:r>
+                        <a:rPr sz="760" b="0">
+                          <a:solidFill>
+                            <a:srgbClr val="8A94A0"/>
+                          </a:solidFill>
+                          <a:latin typeface="Segoe UI"/>
+                        </a:rPr>
+                        <a:t>–</a:t>
+                      </a:r>
+                    </a:p>
+                  </a:txBody>
+                  <a:tcPr>
+                    <a:solidFill>
+                      <a:srgbClr val="FFFFFF"/>
+                    </a:solidFill>
+                  </a:tcPr>
+                </a:tc>
+                <a:tc>
+                  <a:txBody>
+                    <a:bodyPr wrap="square" lIns="50800" rIns="50800" tIns="12700" bIns="12700" anchor="ctr"/>
+                    <a:lstStyle/>
+                    <a:p>
+                      <a:pPr algn="ctr"/>
+                      <a:r>
+                        <a:rPr sz="760" b="0">
+                          <a:solidFill>
+                            <a:srgbClr val="8A94A0"/>
+                          </a:solidFill>
+                          <a:latin typeface="Segoe UI"/>
+                        </a:rPr>
+                        <a:t>–</a:t>
+                      </a:r>
+                    </a:p>
+                  </a:txBody>
+                  <a:tcPr>
+                    <a:solidFill>
+                      <a:srgbClr val="FFFFFF"/>
+                    </a:solidFill>
+                  </a:tcPr>
+                </a:tc>
+                <a:tc>
+                  <a:txBody>
+                    <a:bodyPr wrap="square" lIns="50800" rIns="50800" tIns="12700" bIns="12700" anchor="ctr"/>
+                    <a:lstStyle/>
+                    <a:p>
+                      <a:pPr algn="ctr"/>
+                      <a:r>
+                        <a:rPr sz="760" b="1">
+                          <a:solidFill>
+                            <a:srgbClr val="1D7A4F"/>
+                          </a:solidFill>
+                          <a:latin typeface="Segoe UI"/>
+                        </a:rPr>
+                        <a:t>✓</a:t>
+                      </a:r>
+                    </a:p>
+                  </a:txBody>
+                  <a:tcPr>
+                    <a:solidFill>
+                      <a:srgbClr val="FFFFFF"/>
+                    </a:solidFill>
+                  </a:tcPr>
+                </a:tc>
+              </a:tr>
+              <a:tr h="235915">
+                <a:tc>
+                  <a:txBody>
+                    <a:bodyPr wrap="square" lIns="50800" rIns="50800" tIns="12700" bIns="12700" anchor="ctr"/>
+                    <a:lstStyle/>
+                    <a:p>
+                      <a:pPr algn="l"/>
+                      <a:r>
+                        <a:rPr sz="760" b="0">
+                          <a:solidFill>
+                            <a:srgbClr val="1F2937"/>
+                          </a:solidFill>
+                          <a:latin typeface="Segoe UI"/>
+                        </a:rPr>
+                        <a:t>India grid / captive coal</a:t>
+                      </a:r>
+                    </a:p>
+                  </a:txBody>
+                  <a:tcPr>
+                    <a:solidFill>
+                      <a:srgbClr val="FFFFFF"/>
+                    </a:solidFill>
+                  </a:tcPr>
+                </a:tc>
+                <a:tc>
+                  <a:txBody>
+                    <a:bodyPr wrap="square" lIns="50800" rIns="50800" tIns="12700" bIns="12700" anchor="ctr"/>
+                    <a:lstStyle/>
+                    <a:p>
+                      <a:pPr algn="ctr"/>
+                      <a:r>
+                        <a:rPr sz="760" b="0">
+                          <a:solidFill>
+                            <a:srgbClr val="8A94A0"/>
+                          </a:solidFill>
+                          <a:latin typeface="Segoe UI"/>
+                        </a:rPr>
+                        <a:t>–</a:t>
+                      </a:r>
+                    </a:p>
+                  </a:txBody>
+                  <a:tcPr>
+                    <a:solidFill>
+                      <a:srgbClr val="FFFFFF"/>
+                    </a:solidFill>
+                  </a:tcPr>
+                </a:tc>
+                <a:tc>
+                  <a:txBody>
+                    <a:bodyPr wrap="square" lIns="50800" rIns="50800" tIns="12700" bIns="12700" anchor="ctr"/>
+                    <a:lstStyle/>
+                    <a:p>
+                      <a:pPr algn="ctr"/>
+                      <a:r>
+                        <a:rPr sz="760" b="0">
+                          <a:solidFill>
+                            <a:srgbClr val="8A94A0"/>
+                          </a:solidFill>
+                          <a:latin typeface="Segoe UI"/>
+                        </a:rPr>
+                        <a:t>–</a:t>
+                      </a:r>
+                    </a:p>
+                  </a:txBody>
+                  <a:tcPr>
+                    <a:solidFill>
+                      <a:srgbClr val="FFFFFF"/>
+                    </a:solidFill>
+                  </a:tcPr>
+                </a:tc>
+                <a:tc>
+                  <a:txBody>
+                    <a:bodyPr wrap="square" lIns="50800" rIns="50800" tIns="12700" bIns="12700" anchor="ctr"/>
+                    <a:lstStyle/>
+                    <a:p>
+                      <a:pPr algn="ctr"/>
+                      <a:r>
+                        <a:rPr sz="760" b="1">
+                          <a:solidFill>
+                            <a:srgbClr val="1D7A4F"/>
+                          </a:solidFill>
+                          <a:latin typeface="Segoe UI"/>
+                        </a:rPr>
+                        <a:t>✓</a:t>
+                      </a:r>
+                    </a:p>
+                  </a:txBody>
+                  <a:tcPr>
+                    <a:solidFill>
+                      <a:srgbClr val="FFFFFF"/>
+                    </a:solidFill>
+                  </a:tcPr>
+                </a:tc>
+              </a:tr>
+              <a:tr h="235915">
+                <a:tc>
+                  <a:txBody>
+                    <a:bodyPr wrap="square" lIns="50800" rIns="50800" tIns="12700" bIns="12700" anchor="ctr"/>
+                    <a:lstStyle/>
+                    <a:p>
+                      <a:pPr algn="l"/>
+                      <a:r>
+                        <a:rPr sz="760" b="0">
+                          <a:solidFill>
+                            <a:srgbClr val="1F2937"/>
+                          </a:solidFill>
+                          <a:latin typeface="Segoe UI"/>
+                        </a:rPr>
+                        <a:t>Feasibility guardrails</a:t>
+                      </a:r>
+                    </a:p>
+                  </a:txBody>
+                  <a:tcPr>
+                    <a:solidFill>
+                      <a:srgbClr val="FFFFFF"/>
+                    </a:solidFill>
+                  </a:tcPr>
+                </a:tc>
+                <a:tc>
+                  <a:txBody>
+                    <a:bodyPr wrap="square" lIns="50800" rIns="50800" tIns="12700" bIns="12700" anchor="ctr"/>
+                    <a:lstStyle/>
+                    <a:p>
+                      <a:pPr algn="ctr"/>
+                      <a:r>
+                        <a:rPr sz="760" b="0">
+                          <a:solidFill>
+                            <a:srgbClr val="8A94A0"/>
+                          </a:solidFill>
+                          <a:latin typeface="Segoe UI"/>
+                        </a:rPr>
+                        <a:t>–</a:t>
+                      </a:r>
+                    </a:p>
+                  </a:txBody>
+                  <a:tcPr>
+                    <a:solidFill>
+                      <a:srgbClr val="FFFFFF"/>
+                    </a:solidFill>
+                  </a:tcPr>
+                </a:tc>
+                <a:tc>
+                  <a:txBody>
+                    <a:bodyPr wrap="square" lIns="50800" rIns="50800" tIns="12700" bIns="12700" anchor="ctr"/>
+                    <a:lstStyle/>
+                    <a:p>
+                      <a:pPr algn="ctr"/>
+                      <a:r>
+                        <a:rPr sz="760" b="0">
+                          <a:solidFill>
+                            <a:srgbClr val="8A94A0"/>
+                          </a:solidFill>
+                          <a:latin typeface="Segoe UI"/>
+                        </a:rPr>
+                        <a:t>–</a:t>
+                      </a:r>
+                    </a:p>
+                  </a:txBody>
+                  <a:tcPr>
+                    <a:solidFill>
+                      <a:srgbClr val="FFFFFF"/>
+                    </a:solidFill>
+                  </a:tcPr>
+                </a:tc>
+                <a:tc>
+                  <a:txBody>
+                    <a:bodyPr wrap="square" lIns="50800" rIns="50800" tIns="12700" bIns="12700" anchor="ctr"/>
+                    <a:lstStyle/>
+                    <a:p>
+                      <a:pPr algn="ctr"/>
+                      <a:r>
+                        <a:rPr sz="760" b="1">
+                          <a:solidFill>
+                            <a:srgbClr val="1D7A4F"/>
+                          </a:solidFill>
+                          <a:latin typeface="Segoe UI"/>
+                        </a:rPr>
+                        <a:t>✓</a:t>
+                      </a:r>
+                    </a:p>
+                  </a:txBody>
+                  <a:tcPr>
+                    <a:solidFill>
+                      <a:srgbClr val="FFFFFF"/>
+                    </a:solidFill>
+                  </a:tcPr>
+                </a:tc>
+              </a:tr>
+              <a:tr h="235915">
+                <a:tc>
+                  <a:txBody>
+                    <a:bodyPr wrap="square" lIns="50800" rIns="50800" tIns="12700" bIns="12700" anchor="ctr"/>
+                    <a:lstStyle/>
+                    <a:p>
+                      <a:pPr algn="l"/>
+                      <a:r>
+                        <a:rPr sz="760" b="0">
+                          <a:solidFill>
+                            <a:srgbClr val="1F2937"/>
+                          </a:solidFill>
+                          <a:latin typeface="Segoe UI"/>
+                        </a:rPr>
+                        <a:t>CBAM cost per tonne</a:t>
+                      </a:r>
+                    </a:p>
+                  </a:txBody>
+                  <a:tcPr>
+                    <a:solidFill>
+                      <a:srgbClr val="FFFFFF"/>
+                    </a:solidFill>
+                  </a:tcPr>
+                </a:tc>
+                <a:tc>
+                  <a:txBody>
+                    <a:bodyPr wrap="square" lIns="50800" rIns="50800" tIns="12700" bIns="12700" anchor="ctr"/>
+                    <a:lstStyle/>
+                    <a:p>
+                      <a:pPr algn="ctr"/>
+                      <a:r>
+                        <a:rPr sz="760" b="1">
+                          <a:solidFill>
+                            <a:srgbClr val="A8720E"/>
+                          </a:solidFill>
+                          <a:latin typeface="Segoe UI"/>
+                        </a:rPr>
+                        <a:t>partial</a:t>
+                      </a:r>
+                    </a:p>
+                  </a:txBody>
+                  <a:tcPr>
+                    <a:solidFill>
+                      <a:srgbClr val="FFFFFF"/>
+                    </a:solidFill>
+                  </a:tcPr>
+                </a:tc>
+                <a:tc>
+                  <a:txBody>
+                    <a:bodyPr wrap="square" lIns="50800" rIns="50800" tIns="12700" bIns="12700" anchor="ctr"/>
+                    <a:lstStyle/>
+                    <a:p>
+                      <a:pPr algn="ctr"/>
+                      <a:r>
+                        <a:rPr sz="760" b="0">
+                          <a:solidFill>
+                            <a:srgbClr val="8A94A0"/>
+                          </a:solidFill>
+                          <a:latin typeface="Segoe UI"/>
+                        </a:rPr>
+                        <a:t>–</a:t>
+                      </a:r>
+                    </a:p>
+                  </a:txBody>
+                  <a:tcPr>
+                    <a:solidFill>
+                      <a:srgbClr val="FFFFFF"/>
+                    </a:solidFill>
+                  </a:tcPr>
+                </a:tc>
+                <a:tc>
+                  <a:txBody>
+                    <a:bodyPr wrap="square" lIns="50800" rIns="50800" tIns="12700" bIns="12700" anchor="ctr"/>
+                    <a:lstStyle/>
+                    <a:p>
+                      <a:pPr algn="ctr"/>
+                      <a:r>
+                        <a:rPr sz="760" b="1">
+                          <a:solidFill>
+                            <a:srgbClr val="1D7A4F"/>
+                          </a:solidFill>
+                          <a:latin typeface="Segoe UI"/>
+                        </a:rPr>
+                        <a:t>✓</a:t>
+                      </a:r>
+                    </a:p>
+                  </a:txBody>
+                  <a:tcPr>
+                    <a:solidFill>
+                      <a:srgbClr val="FFFFFF"/>
+                    </a:solidFill>
+                  </a:tcPr>
+                </a:tc>
+              </a:tr>
+              <a:tr h="235915">
+                <a:tc>
+                  <a:txBody>
+                    <a:bodyPr wrap="square" lIns="50800" rIns="50800" tIns="12700" bIns="12700" anchor="ctr"/>
+                    <a:lstStyle/>
+                    <a:p>
+                      <a:pPr algn="l"/>
+                      <a:r>
+                        <a:rPr sz="760" b="0">
+                          <a:solidFill>
+                            <a:srgbClr val="1F2937"/>
+                          </a:solidFill>
+                          <a:latin typeface="Segoe UI"/>
+                        </a:rPr>
+                        <a:t>Constrained optimizer</a:t>
+                      </a:r>
+                    </a:p>
+                  </a:txBody>
+                  <a:tcPr>
+                    <a:solidFill>
+                      <a:srgbClr val="FFFFFF"/>
+                    </a:solidFill>
+                  </a:tcPr>
+                </a:tc>
+                <a:tc>
+                  <a:txBody>
+                    <a:bodyPr wrap="square" lIns="50800" rIns="50800" tIns="12700" bIns="12700" anchor="ctr"/>
+                    <a:lstStyle/>
+                    <a:p>
+                      <a:pPr algn="ctr"/>
+                      <a:r>
+                        <a:rPr sz="760" b="1">
+                          <a:solidFill>
+                            <a:srgbClr val="A8720E"/>
+                          </a:solidFill>
+                          <a:latin typeface="Segoe UI"/>
+                        </a:rPr>
+                        <a:t>partial</a:t>
+                      </a:r>
+                    </a:p>
+                  </a:txBody>
+                  <a:tcPr>
+                    <a:solidFill>
+                      <a:srgbClr val="FFFFFF"/>
+                    </a:solidFill>
+                  </a:tcPr>
+                </a:tc>
+                <a:tc>
+                  <a:txBody>
+                    <a:bodyPr wrap="square" lIns="50800" rIns="50800" tIns="12700" bIns="12700" anchor="ctr"/>
+                    <a:lstStyle/>
+                    <a:p>
+                      <a:pPr algn="ctr"/>
+                      <a:r>
+                        <a:rPr sz="760" b="0">
+                          <a:solidFill>
+                            <a:srgbClr val="8A94A0"/>
+                          </a:solidFill>
+                          <a:latin typeface="Segoe UI"/>
+                        </a:rPr>
+                        <a:t>–</a:t>
+                      </a:r>
+                    </a:p>
+                  </a:txBody>
+                  <a:tcPr>
+                    <a:solidFill>
+                      <a:srgbClr val="FFFFFF"/>
+                    </a:solidFill>
+                  </a:tcPr>
+                </a:tc>
+                <a:tc>
+                  <a:txBody>
+                    <a:bodyPr wrap="square" lIns="50800" rIns="50800" tIns="12700" bIns="12700" anchor="ctr"/>
+                    <a:lstStyle/>
+                    <a:p>
+                      <a:pPr algn="ctr"/>
+                      <a:r>
+                        <a:rPr sz="760" b="1">
+                          <a:solidFill>
+                            <a:srgbClr val="1D7A4F"/>
+                          </a:solidFill>
+                          <a:latin typeface="Segoe UI"/>
+                        </a:rPr>
+                        <a:t>✓</a:t>
+                      </a:r>
+                    </a:p>
+                  </a:txBody>
+                  <a:tcPr>
+                    <a:solidFill>
+                      <a:srgbClr val="FFFFFF"/>
+                    </a:solidFill>
+                  </a:tcPr>
+                </a:tc>
+              </a:tr>
+            </a:tbl>
+          </a:graphicData>
+        </a:graphic>
+      </p:graphicFrame>
+      <p:sp>
+        <p:nvSpPr>
+          <p:cNvPr id="12" name="TextBox 11"/>
+          <p:cNvSpPr txBox="1"/>
+          <p:nvPr/>
+        </p:nvSpPr>
+        <p:spPr>
+          <a:xfrm>
+            <a:off x="3191256" y="859536"/>
+            <a:ext cx="5138928" cy="182880"/>
+          </a:xfrm>
+          <a:prstGeom prst="rect">
+            <a:avLst/>
+          </a:prstGeom>
+          <a:noFill/>
+        </p:spPr>
+        <p:txBody>
+          <a:bodyPr wrap="square" anchor="t" lIns="19050" rIns="19050" tIns="6350" bIns="6350">
+            <a:spAutoFit/>
+          </a:bodyPr>
+          <a:lstStyle/>
+          <a:p>
+            <a:pPr algn="l">
+              <a:lnSpc>
+                <a:spcPct val="100000"/>
+              </a:lnSpc>
+              <a:spcAft>
+                <a:spcPts val="0"/>
+              </a:spcAft>
+            </a:pPr>
+            <a:r>
+              <a:rPr sz="900" b="1">
+                <a:solidFill>
+                  <a:srgbClr val="1B6DB0"/>
+                </a:solidFill>
+                <a:latin typeface="Segoe UI"/>
+              </a:rPr>
+              <a:t>THE TOOL — WORKING PROTOTYPE, DEPLOYED (LINK BELOW)</a:t>
+            </a:r>
+          </a:p>
+        </p:txBody>
+      </p:sp>
+      <p:sp>
+        <p:nvSpPr>
+          <p:cNvPr id="13" name="Rectangle 12"/>
+          <p:cNvSpPr/>
+          <p:nvPr/>
+        </p:nvSpPr>
+        <p:spPr>
+          <a:xfrm>
+            <a:off x="3191256" y="1051560"/>
+            <a:ext cx="5138928" cy="10160"/>
+          </a:xfrm>
+          <a:prstGeom prst="rect">
+            <a:avLst/>
+          </a:prstGeom>
+          <a:solidFill>
+            <a:srgbClr val="E2E8EF"/>
+          </a:solidFill>
           <a:ln>
             <a:noFill/>
           </a:ln>
@@ -3287,23 +4258,145 @@
           </a:p>
         </p:txBody>
       </p:sp>
-      <p:sp>
-        <p:nvSpPr>
-          <p:cNvPr id="4" name="Rectangle 3">
-            <a:hlinkClick r:id="rId4"/>
-          </p:cNvPr>
-          <p:cNvSpPr/>
+      <p:pic>
+        <p:nvPicPr>
+          <p:cNvPr id="14" name="Picture 13" descr="toolshot.png"/>
+          <p:cNvPicPr>
+            <a:picLocks noChangeAspect="1"/>
+          </p:cNvPicPr>
           <p:nvPr/>
-        </p:nvSpPr>
-        <p:spPr>
-          <a:xfrm>
-            <a:off x="7955279" y="6419088"/>
-            <a:ext cx="4023360" cy="411480"/>
+        </p:nvPicPr>
+        <p:blipFill>
+          <a:blip r:embed="rId2"/>
+          <a:stretch>
+            <a:fillRect/>
+          </a:stretch>
+        </p:blipFill>
+        <p:spPr>
+          <a:xfrm>
+            <a:off x="3191256" y="1133856"/>
+            <a:ext cx="5138928" cy="3597250"/>
+          </a:xfrm>
+          <a:prstGeom prst="rect">
+            <a:avLst/>
+          </a:prstGeom>
+          <a:ln w="12700">
+            <a:solidFill>
+              <a:srgbClr val="C9D2DC"/>
+            </a:solidFill>
+          </a:ln>
+        </p:spPr>
+      </p:pic>
+      <p:sp>
+        <p:nvSpPr>
+          <p:cNvPr id="15" name="TextBox 14"/>
+          <p:cNvSpPr txBox="1"/>
+          <p:nvPr/>
+        </p:nvSpPr>
+        <p:spPr>
+          <a:xfrm>
+            <a:off x="3191256" y="4785969"/>
+            <a:ext cx="5138928" cy="566928"/>
           </a:xfrm>
           <a:prstGeom prst="rect">
             <a:avLst/>
           </a:prstGeom>
           <a:noFill/>
+        </p:spPr>
+        <p:txBody>
+          <a:bodyPr wrap="square" anchor="t" lIns="19050" rIns="19050" tIns="6350" bIns="6350">
+            <a:spAutoFit/>
+          </a:bodyPr>
+          <a:lstStyle/>
+          <a:p>
+            <a:pPr algn="l">
+              <a:lnSpc>
+                <a:spcPct val="105000"/>
+              </a:lnSpc>
+              <a:spcAft>
+                <a:spcPts val="200"/>
+              </a:spcAft>
+            </a:pPr>
+            <a:r>
+              <a:rPr sz="819" b="1">
+                <a:solidFill>
+                  <a:srgbClr val="123F63"/>
+                </a:solidFill>
+                <a:latin typeface="Segoe UI"/>
+              </a:rPr>
+              <a:t>Actual product screenshot. </a:t>
+            </a:r>
+            <a:r>
+              <a:rPr sz="819" b="0">
+                <a:solidFill>
+                  <a:srgbClr val="5B6570"/>
+                </a:solidFill>
+                <a:latin typeface="Segoe UI"/>
+              </a:rPr>
+              <a:t>Four operating levers (scrap, nickel source, renewables, clean fuel) with grade selection; live scope split; scenario plotted against Jindal’s audited FY22–26 trajectory; sensitivity ranking of the next best move. A constrained optimizer and a per-tonne CBAM statement sit below the fold.</a:t>
+            </a:r>
+          </a:p>
+        </p:txBody>
+      </p:sp>
+      <p:sp>
+        <p:nvSpPr>
+          <p:cNvPr id="16" name="TextBox 15"/>
+          <p:cNvSpPr txBox="1"/>
+          <p:nvPr/>
+        </p:nvSpPr>
+        <p:spPr>
+          <a:xfrm>
+            <a:off x="8531352" y="859536"/>
+            <a:ext cx="3367735" cy="182880"/>
+          </a:xfrm>
+          <a:prstGeom prst="rect">
+            <a:avLst/>
+          </a:prstGeom>
+          <a:noFill/>
+        </p:spPr>
+        <p:txBody>
+          <a:bodyPr wrap="square" anchor="t" lIns="19050" rIns="19050" tIns="6350" bIns="6350">
+            <a:spAutoFit/>
+          </a:bodyPr>
+          <a:lstStyle/>
+          <a:p>
+            <a:pPr algn="l">
+              <a:lnSpc>
+                <a:spcPct val="100000"/>
+              </a:lnSpc>
+              <a:spcAft>
+                <a:spcPts val="0"/>
+              </a:spcAft>
+            </a:pPr>
+            <a:r>
+              <a:rPr sz="900" b="1">
+                <a:solidFill>
+                  <a:srgbClr val="1B6DB0"/>
+                </a:solidFill>
+                <a:latin typeface="Segoe UI"/>
+              </a:rPr>
+              <a:t>HOW THE MODEL WORKS</a:t>
+            </a:r>
+          </a:p>
+        </p:txBody>
+      </p:sp>
+      <p:sp>
+        <p:nvSpPr>
+          <p:cNvPr id="17" name="Rectangle 16"/>
+          <p:cNvSpPr/>
+          <p:nvPr/>
+        </p:nvSpPr>
+        <p:spPr>
+          <a:xfrm>
+            <a:off x="8531352" y="1051560"/>
+            <a:ext cx="3367735" cy="10160"/>
+          </a:xfrm>
+          <a:prstGeom prst="rect">
+            <a:avLst/>
+          </a:prstGeom>
+          <a:solidFill>
+            <a:srgbClr val="E2E8EF"/>
+          </a:solidFill>
           <a:ln>
             <a:noFill/>
           </a:ln>
@@ -3328,6 +4421,5867 @@
           <a:lstStyle/>
           <a:p>
             <a:pPr algn="ctr"/>
+          </a:p>
+        </p:txBody>
+      </p:sp>
+      <p:sp>
+        <p:nvSpPr>
+          <p:cNvPr id="18" name="Rectangle 17"/>
+          <p:cNvSpPr/>
+          <p:nvPr/>
+        </p:nvSpPr>
+        <p:spPr>
+          <a:xfrm>
+            <a:off x="8531352" y="1133856"/>
+            <a:ext cx="3367735" cy="603504"/>
+          </a:xfrm>
+          <a:prstGeom prst="rect">
+            <a:avLst/>
+          </a:prstGeom>
+          <a:solidFill>
+            <a:srgbClr val="F5F7FA"/>
+          </a:solidFill>
+          <a:ln w="9525">
+            <a:solidFill>
+              <a:srgbClr val="E2E8EF"/>
+            </a:solidFill>
+          </a:ln>
+          <a:effectLst/>
+        </p:spPr>
+        <p:style>
+          <a:lnRef idx="1">
+            <a:schemeClr val="accent1"/>
+          </a:lnRef>
+          <a:fillRef idx="3">
+            <a:schemeClr val="accent1"/>
+          </a:fillRef>
+          <a:effectRef idx="2">
+            <a:schemeClr val="accent1"/>
+          </a:effectRef>
+          <a:fontRef idx="minor">
+            <a:schemeClr val="lt1"/>
+          </a:fontRef>
+        </p:style>
+        <p:txBody>
+          <a:bodyPr rtlCol="0" anchor="ctr"/>
+          <a:lstStyle/>
+          <a:p>
+            <a:pPr algn="ctr"/>
+          </a:p>
+        </p:txBody>
+      </p:sp>
+      <p:sp>
+        <p:nvSpPr>
+          <p:cNvPr id="19" name="TextBox 18"/>
+          <p:cNvSpPr txBox="1"/>
+          <p:nvPr/>
+        </p:nvSpPr>
+        <p:spPr>
+          <a:xfrm>
+            <a:off x="8586216" y="1170432"/>
+            <a:ext cx="3258007" cy="548640"/>
+          </a:xfrm>
+          <a:prstGeom prst="rect">
+            <a:avLst/>
+          </a:prstGeom>
+          <a:noFill/>
+        </p:spPr>
+        <p:txBody>
+          <a:bodyPr wrap="square" anchor="t" lIns="19050" rIns="19050" tIns="6350" bIns="6350">
+            <a:spAutoFit/>
+          </a:bodyPr>
+          <a:lstStyle/>
+          <a:p>
+            <a:pPr algn="l">
+              <a:lnSpc>
+                <a:spcPct val="105000"/>
+              </a:lnSpc>
+              <a:spcAft>
+                <a:spcPts val="100"/>
+              </a:spcAft>
+            </a:pPr>
+            <a:r>
+              <a:rPr sz="800" b="0">
+                <a:solidFill>
+                  <a:srgbClr val="1F2937"/>
+                </a:solidFill>
+                <a:latin typeface="Consolas"/>
+              </a:rPr>
+              <a:t>CO₂/t = S1 (fuels, AOD, captive power)</a:t>
+            </a:r>
+          </a:p>
+          <a:p>
+            <a:pPr algn="l">
+              <a:lnSpc>
+                <a:spcPct val="105000"/>
+              </a:lnSpc>
+              <a:spcAft>
+                <a:spcPts val="100"/>
+              </a:spcAft>
+            </a:pPr>
+            <a:r>
+              <a:rPr sz="800" b="0">
+                <a:solidFill>
+                  <a:srgbClr val="1F2937"/>
+                </a:solidFill>
+                <a:latin typeface="Consolas"/>
+              </a:rPr>
+              <a:t>  + S2 (grid electricity × CEA factor)</a:t>
+            </a:r>
+          </a:p>
+          <a:p>
+            <a:pPr algn="l">
+              <a:lnSpc>
+                <a:spcPct val="105000"/>
+              </a:lnSpc>
+              <a:spcAft>
+                <a:spcPts val="100"/>
+              </a:spcAft>
+            </a:pPr>
+            <a:r>
+              <a:rPr sz="800" b="0">
+                <a:solidFill>
+                  <a:srgbClr val="1F2937"/>
+                </a:solidFill>
+                <a:latin typeface="Consolas"/>
+              </a:rPr>
+              <a:t>  + S3 ((1−scrap%) × Σ alloy mass × EF)</a:t>
+            </a:r>
+          </a:p>
+        </p:txBody>
+      </p:sp>
+      <p:graphicFrame>
+        <p:nvGraphicFramePr>
+          <p:cNvPr id="20" name="Table 19"/>
+          <p:cNvGraphicFramePr>
+            <a:graphicFrameLocks noGrp="1"/>
+          </p:cNvGraphicFramePr>
+          <p:nvPr/>
+        </p:nvGraphicFramePr>
+        <p:xfrm>
+          <a:off x="8531352" y="1828800"/>
+          <a:ext cx="3367735" cy="1289304"/>
+        </p:xfrm>
+        <a:graphic>
+          <a:graphicData uri="http://schemas.openxmlformats.org/drawingml/2006/table">
+            <a:tbl>
+              <a:tblPr firstRow="1" bandRow="1">
+                <a:tableStyleId>{5C22544A-7EE6-4342-B048-85BDC9FD1C3A}</a:tableStyleId>
+              </a:tblPr>
+              <a:tblGrid>
+                <a:gridCol w="1234440"/>
+                <a:gridCol w="960120"/>
+                <a:gridCol w="1173175"/>
+              </a:tblGrid>
+              <a:tr h="214884">
+                <a:tc>
+                  <a:txBody>
+                    <a:bodyPr wrap="square" lIns="50800" rIns="50800" tIns="12700" bIns="12700" anchor="ctr"/>
+                    <a:lstStyle/>
+                    <a:p>
+                      <a:pPr algn="l"/>
+                      <a:r>
+                        <a:rPr sz="740" b="1">
+                          <a:solidFill>
+                            <a:srgbClr val="5B6570"/>
+                          </a:solidFill>
+                          <a:latin typeface="Segoe UI"/>
+                        </a:rPr>
+                        <a:t>Key factor</a:t>
+                      </a:r>
+                    </a:p>
+                  </a:txBody>
+                  <a:tcPr>
+                    <a:solidFill>
+                      <a:srgbClr val="EEF2F6"/>
+                    </a:solidFill>
+                  </a:tcPr>
+                </a:tc>
+                <a:tc>
+                  <a:txBody>
+                    <a:bodyPr wrap="square" lIns="50800" rIns="50800" tIns="12700" bIns="12700" anchor="ctr"/>
+                    <a:lstStyle/>
+                    <a:p>
+                      <a:pPr algn="l"/>
+                      <a:r>
+                        <a:rPr sz="740" b="1">
+                          <a:solidFill>
+                            <a:srgbClr val="5B6570"/>
+                          </a:solidFill>
+                          <a:latin typeface="Segoe UI"/>
+                        </a:rPr>
+                        <a:t>Value</a:t>
+                      </a:r>
+                    </a:p>
+                  </a:txBody>
+                  <a:tcPr>
+                    <a:solidFill>
+                      <a:srgbClr val="EEF2F6"/>
+                    </a:solidFill>
+                  </a:tcPr>
+                </a:tc>
+                <a:tc>
+                  <a:txBody>
+                    <a:bodyPr wrap="square" lIns="50800" rIns="50800" tIns="12700" bIns="12700" anchor="ctr"/>
+                    <a:lstStyle/>
+                    <a:p>
+                      <a:pPr algn="l"/>
+                      <a:r>
+                        <a:rPr sz="740" b="1">
+                          <a:solidFill>
+                            <a:srgbClr val="5B6570"/>
+                          </a:solidFill>
+                          <a:latin typeface="Segoe UI"/>
+                        </a:rPr>
+                        <a:t>Source</a:t>
+                      </a:r>
+                    </a:p>
+                  </a:txBody>
+                  <a:tcPr>
+                    <a:solidFill>
+                      <a:srgbClr val="EEF2F6"/>
+                    </a:solidFill>
+                  </a:tcPr>
+                </a:tc>
+              </a:tr>
+              <a:tr h="214884">
+                <a:tc>
+                  <a:txBody>
+                    <a:bodyPr wrap="square" lIns="50800" rIns="50800" tIns="12700" bIns="12700" anchor="ctr"/>
+                    <a:lstStyle/>
+                    <a:p>
+                      <a:pPr algn="l"/>
+                      <a:r>
+                        <a:rPr sz="740" b="0">
+                          <a:solidFill>
+                            <a:srgbClr val="1F2937"/>
+                          </a:solidFill>
+                          <a:latin typeface="Segoe UI"/>
+                        </a:rPr>
+                        <a:t>India grid</a:t>
+                      </a:r>
+                    </a:p>
+                  </a:txBody>
+                  <a:tcPr>
+                    <a:solidFill>
+                      <a:srgbClr val="FFFFFF"/>
+                    </a:solidFill>
+                  </a:tcPr>
+                </a:tc>
+                <a:tc>
+                  <a:txBody>
+                    <a:bodyPr wrap="square" lIns="50800" rIns="50800" tIns="12700" bIns="12700" anchor="ctr"/>
+                    <a:lstStyle/>
+                    <a:p>
+                      <a:pPr algn="r"/>
+                      <a:r>
+                        <a:rPr sz="740" b="0">
+                          <a:solidFill>
+                            <a:srgbClr val="1F2937"/>
+                          </a:solidFill>
+                          <a:latin typeface="Segoe UI"/>
+                        </a:rPr>
+                        <a:t>0.710 t/MWh</a:t>
+                      </a:r>
+                    </a:p>
+                  </a:txBody>
+                  <a:tcPr>
+                    <a:solidFill>
+                      <a:srgbClr val="FFFFFF"/>
+                    </a:solidFill>
+                  </a:tcPr>
+                </a:tc>
+                <a:tc>
+                  <a:txBody>
+                    <a:bodyPr wrap="square" lIns="50800" rIns="50800" tIns="12700" bIns="12700" anchor="ctr"/>
+                    <a:lstStyle/>
+                    <a:p>
+                      <a:pPr algn="l"/>
+                      <a:r>
+                        <a:rPr sz="740" b="0">
+                          <a:solidFill>
+                            <a:srgbClr val="1F2937"/>
+                          </a:solidFill>
+                          <a:latin typeface="Segoe UI"/>
+                        </a:rPr>
+                        <a:t>CEA v21.0</a:t>
+                      </a:r>
+                    </a:p>
+                  </a:txBody>
+                  <a:tcPr>
+                    <a:solidFill>
+                      <a:srgbClr val="FFFFFF"/>
+                    </a:solidFill>
+                  </a:tcPr>
+                </a:tc>
+              </a:tr>
+              <a:tr h="214884">
+                <a:tc>
+                  <a:txBody>
+                    <a:bodyPr wrap="square" lIns="50800" rIns="50800" tIns="12700" bIns="12700" anchor="ctr"/>
+                    <a:lstStyle/>
+                    <a:p>
+                      <a:pPr algn="l"/>
+                      <a:r>
+                        <a:rPr sz="740" b="0">
+                          <a:solidFill>
+                            <a:srgbClr val="1F2937"/>
+                          </a:solidFill>
+                          <a:latin typeface="Segoe UI"/>
+                        </a:rPr>
+                        <a:t>Captive coal power</a:t>
+                      </a:r>
+                    </a:p>
+                  </a:txBody>
+                  <a:tcPr>
+                    <a:solidFill>
+                      <a:srgbClr val="FFFFFF"/>
+                    </a:solidFill>
+                  </a:tcPr>
+                </a:tc>
+                <a:tc>
+                  <a:txBody>
+                    <a:bodyPr wrap="square" lIns="50800" rIns="50800" tIns="12700" bIns="12700" anchor="ctr"/>
+                    <a:lstStyle/>
+                    <a:p>
+                      <a:pPr algn="r"/>
+                      <a:r>
+                        <a:rPr sz="740" b="0">
+                          <a:solidFill>
+                            <a:srgbClr val="1F2937"/>
+                          </a:solidFill>
+                          <a:latin typeface="Segoe UI"/>
+                        </a:rPr>
+                        <a:t>1.045 t/MWh</a:t>
+                      </a:r>
+                    </a:p>
+                  </a:txBody>
+                  <a:tcPr>
+                    <a:solidFill>
+                      <a:srgbClr val="FFFFFF"/>
+                    </a:solidFill>
+                  </a:tcPr>
+                </a:tc>
+                <a:tc>
+                  <a:txBody>
+                    <a:bodyPr wrap="square" lIns="50800" rIns="50800" tIns="12700" bIns="12700" anchor="ctr"/>
+                    <a:lstStyle/>
+                    <a:p>
+                      <a:pPr algn="l"/>
+                      <a:r>
+                        <a:rPr sz="740" b="0">
+                          <a:solidFill>
+                            <a:srgbClr val="1F2937"/>
+                          </a:solidFill>
+                          <a:latin typeface="Segoe UI"/>
+                        </a:rPr>
+                        <a:t>CEA heat rate</a:t>
+                      </a:r>
+                    </a:p>
+                  </a:txBody>
+                  <a:tcPr>
+                    <a:solidFill>
+                      <a:srgbClr val="FFFFFF"/>
+                    </a:solidFill>
+                  </a:tcPr>
+                </a:tc>
+              </a:tr>
+              <a:tr h="214884">
+                <a:tc>
+                  <a:txBody>
+                    <a:bodyPr wrap="square" lIns="50800" rIns="50800" tIns="12700" bIns="12700" anchor="ctr"/>
+                    <a:lstStyle/>
+                    <a:p>
+                      <a:pPr algn="l"/>
+                      <a:r>
+                        <a:rPr sz="740" b="0">
+                          <a:solidFill>
+                            <a:srgbClr val="1F2937"/>
+                          </a:solidFill>
+                          <a:latin typeface="Segoe UI"/>
+                        </a:rPr>
+                        <a:t>Odisha ferrochrome</a:t>
+                      </a:r>
+                    </a:p>
+                  </a:txBody>
+                  <a:tcPr>
+                    <a:solidFill>
+                      <a:srgbClr val="FFFFFF"/>
+                    </a:solidFill>
+                  </a:tcPr>
+                </a:tc>
+                <a:tc>
+                  <a:txBody>
+                    <a:bodyPr wrap="square" lIns="50800" rIns="50800" tIns="12700" bIns="12700" anchor="ctr"/>
+                    <a:lstStyle/>
+                    <a:p>
+                      <a:pPr algn="r"/>
+                      <a:r>
+                        <a:rPr sz="740" b="0">
+                          <a:solidFill>
+                            <a:srgbClr val="1F2937"/>
+                          </a:solidFill>
+                          <a:latin typeface="Segoe UI"/>
+                        </a:rPr>
+                        <a:t>5.4–5.9 t/t</a:t>
+                      </a:r>
+                    </a:p>
+                  </a:txBody>
+                  <a:tcPr>
+                    <a:solidFill>
+                      <a:srgbClr val="FFFFFF"/>
+                    </a:solidFill>
+                  </a:tcPr>
+                </a:tc>
+                <a:tc>
+                  <a:txBody>
+                    <a:bodyPr wrap="square" lIns="50800" rIns="50800" tIns="12700" bIns="12700" anchor="ctr"/>
+                    <a:lstStyle/>
+                    <a:p>
+                      <a:pPr algn="l"/>
+                      <a:r>
+                        <a:rPr sz="740" b="0">
+                          <a:solidFill>
+                            <a:srgbClr val="1F2937"/>
+                          </a:solidFill>
+                          <a:latin typeface="Segoe UI"/>
+                        </a:rPr>
+                        <a:t>ICDA LCA</a:t>
+                      </a:r>
+                    </a:p>
+                  </a:txBody>
+                  <a:tcPr>
+                    <a:solidFill>
+                      <a:srgbClr val="FFFFFF"/>
+                    </a:solidFill>
+                  </a:tcPr>
+                </a:tc>
+              </a:tr>
+              <a:tr h="214884">
+                <a:tc>
+                  <a:txBody>
+                    <a:bodyPr wrap="square" lIns="50800" rIns="50800" tIns="12700" bIns="12700" anchor="ctr"/>
+                    <a:lstStyle/>
+                    <a:p>
+                      <a:pPr algn="l"/>
+                      <a:r>
+                        <a:rPr sz="740" b="0">
+                          <a:solidFill>
+                            <a:srgbClr val="1F2937"/>
+                          </a:solidFill>
+                          <a:latin typeface="Segoe UI"/>
+                        </a:rPr>
+                        <a:t>NPI (contained Ni)</a:t>
+                      </a:r>
+                    </a:p>
+                  </a:txBody>
+                  <a:tcPr>
+                    <a:solidFill>
+                      <a:srgbClr val="FFFFFF"/>
+                    </a:solidFill>
+                  </a:tcPr>
+                </a:tc>
+                <a:tc>
+                  <a:txBody>
+                    <a:bodyPr wrap="square" lIns="50800" rIns="50800" tIns="12700" bIns="12700" anchor="ctr"/>
+                    <a:lstStyle/>
+                    <a:p>
+                      <a:pPr algn="r"/>
+                      <a:r>
+                        <a:rPr sz="740" b="0">
+                          <a:solidFill>
+                            <a:srgbClr val="1F2937"/>
+                          </a:solidFill>
+                          <a:latin typeface="Segoe UI"/>
+                        </a:rPr>
+                        <a:t>60–85 t/t</a:t>
+                      </a:r>
+                    </a:p>
+                  </a:txBody>
+                  <a:tcPr>
+                    <a:solidFill>
+                      <a:srgbClr val="FFFFFF"/>
+                    </a:solidFill>
+                  </a:tcPr>
+                </a:tc>
+                <a:tc>
+                  <a:txBody>
+                    <a:bodyPr wrap="square" lIns="50800" rIns="50800" tIns="12700" bIns="12700" anchor="ctr"/>
+                    <a:lstStyle/>
+                    <a:p>
+                      <a:pPr algn="l"/>
+                      <a:r>
+                        <a:rPr sz="740" b="0">
+                          <a:solidFill>
+                            <a:srgbClr val="1F2937"/>
+                          </a:solidFill>
+                          <a:latin typeface="Segoe UI"/>
+                        </a:rPr>
+                        <a:t>ISSF</a:t>
+                      </a:r>
+                    </a:p>
+                  </a:txBody>
+                  <a:tcPr>
+                    <a:solidFill>
+                      <a:srgbClr val="FFFFFF"/>
+                    </a:solidFill>
+                  </a:tcPr>
+                </a:tc>
+              </a:tr>
+              <a:tr h="214884">
+                <a:tc>
+                  <a:txBody>
+                    <a:bodyPr wrap="square" lIns="50800" rIns="50800" tIns="12700" bIns="12700" anchor="ctr"/>
+                    <a:lstStyle/>
+                    <a:p>
+                      <a:pPr algn="l"/>
+                      <a:r>
+                        <a:rPr sz="740" b="0">
+                          <a:solidFill>
+                            <a:srgbClr val="1F2937"/>
+                          </a:solidFill>
+                          <a:latin typeface="Segoe UI"/>
+                        </a:rPr>
+                        <a:t>Grade chemistry</a:t>
+                      </a:r>
+                    </a:p>
+                  </a:txBody>
+                  <a:tcPr>
+                    <a:solidFill>
+                      <a:srgbClr val="FFFFFF"/>
+                    </a:solidFill>
+                  </a:tcPr>
+                </a:tc>
+                <a:tc>
+                  <a:txBody>
+                    <a:bodyPr wrap="square" lIns="50800" rIns="50800" tIns="12700" bIns="12700" anchor="ctr"/>
+                    <a:lstStyle/>
+                    <a:p>
+                      <a:pPr algn="r"/>
+                      <a:r>
+                        <a:rPr sz="740" b="0">
+                          <a:solidFill>
+                            <a:srgbClr val="1F2937"/>
+                          </a:solidFill>
+                          <a:latin typeface="Segoe UI"/>
+                        </a:rPr>
+                        <a:t>304/316/430/2205</a:t>
+                      </a:r>
+                    </a:p>
+                  </a:txBody>
+                  <a:tcPr>
+                    <a:solidFill>
+                      <a:srgbClr val="FFFFFF"/>
+                    </a:solidFill>
+                  </a:tcPr>
+                </a:tc>
+                <a:tc>
+                  <a:txBody>
+                    <a:bodyPr wrap="square" lIns="50800" rIns="50800" tIns="12700" bIns="12700" anchor="ctr"/>
+                    <a:lstStyle/>
+                    <a:p>
+                      <a:pPr algn="l"/>
+                      <a:r>
+                        <a:rPr sz="740" b="0">
+                          <a:solidFill>
+                            <a:srgbClr val="1F2937"/>
+                          </a:solidFill>
+                          <a:latin typeface="Segoe UI"/>
+                        </a:rPr>
+                        <a:t>mass balance</a:t>
+                      </a:r>
+                    </a:p>
+                  </a:txBody>
+                  <a:tcPr>
+                    <a:solidFill>
+                      <a:srgbClr val="FFFFFF"/>
+                    </a:solidFill>
+                  </a:tcPr>
+                </a:tc>
+              </a:tr>
+            </a:tbl>
+          </a:graphicData>
+        </a:graphic>
+      </p:graphicFrame>
+      <p:sp>
+        <p:nvSpPr>
+          <p:cNvPr id="21" name="TextBox 20"/>
+          <p:cNvSpPr txBox="1"/>
+          <p:nvPr/>
+        </p:nvSpPr>
+        <p:spPr>
+          <a:xfrm>
+            <a:off x="8531352" y="3236976"/>
+            <a:ext cx="3367735" cy="182880"/>
+          </a:xfrm>
+          <a:prstGeom prst="rect">
+            <a:avLst/>
+          </a:prstGeom>
+          <a:noFill/>
+        </p:spPr>
+        <p:txBody>
+          <a:bodyPr wrap="square" anchor="t" lIns="19050" rIns="19050" tIns="6350" bIns="6350">
+            <a:spAutoFit/>
+          </a:bodyPr>
+          <a:lstStyle/>
+          <a:p>
+            <a:pPr algn="l">
+              <a:lnSpc>
+                <a:spcPct val="100000"/>
+              </a:lnSpc>
+              <a:spcAft>
+                <a:spcPts val="0"/>
+              </a:spcAft>
+            </a:pPr>
+            <a:r>
+              <a:rPr sz="900" b="1">
+                <a:solidFill>
+                  <a:srgbClr val="1B6DB0"/>
+                </a:solidFill>
+                <a:latin typeface="Segoe UI"/>
+              </a:rPr>
+              <a:t>PRACTICALITY BUILT IN</a:t>
+            </a:r>
+          </a:p>
+        </p:txBody>
+      </p:sp>
+      <p:sp>
+        <p:nvSpPr>
+          <p:cNvPr id="22" name="Rectangle 21"/>
+          <p:cNvSpPr/>
+          <p:nvPr/>
+        </p:nvSpPr>
+        <p:spPr>
+          <a:xfrm>
+            <a:off x="8531352" y="3429000"/>
+            <a:ext cx="3367735" cy="10160"/>
+          </a:xfrm>
+          <a:prstGeom prst="rect">
+            <a:avLst/>
+          </a:prstGeom>
+          <a:solidFill>
+            <a:srgbClr val="E2E8EF"/>
+          </a:solidFill>
+          <a:ln>
+            <a:noFill/>
+          </a:ln>
+          <a:effectLst/>
+        </p:spPr>
+        <p:style>
+          <a:lnRef idx="1">
+            <a:schemeClr val="accent1"/>
+          </a:lnRef>
+          <a:fillRef idx="3">
+            <a:schemeClr val="accent1"/>
+          </a:fillRef>
+          <a:effectRef idx="2">
+            <a:schemeClr val="accent1"/>
+          </a:effectRef>
+          <a:fontRef idx="minor">
+            <a:schemeClr val="lt1"/>
+          </a:fontRef>
+        </p:style>
+        <p:txBody>
+          <a:bodyPr rtlCol="0" anchor="ctr"/>
+          <a:lstStyle/>
+          <a:p>
+            <a:pPr algn="ctr"/>
+          </a:p>
+        </p:txBody>
+      </p:sp>
+      <p:sp>
+        <p:nvSpPr>
+          <p:cNvPr id="23" name="TextBox 22"/>
+          <p:cNvSpPr txBox="1"/>
+          <p:nvPr/>
+        </p:nvSpPr>
+        <p:spPr>
+          <a:xfrm>
+            <a:off x="8549640" y="3511296"/>
+            <a:ext cx="3331159" cy="310896"/>
+          </a:xfrm>
+          <a:prstGeom prst="rect">
+            <a:avLst/>
+          </a:prstGeom>
+          <a:noFill/>
+        </p:spPr>
+        <p:txBody>
+          <a:bodyPr wrap="square" anchor="t" lIns="19050" rIns="19050" tIns="6350" bIns="6350">
+            <a:spAutoFit/>
+          </a:bodyPr>
+          <a:lstStyle/>
+          <a:p>
+            <a:pPr algn="l">
+              <a:lnSpc>
+                <a:spcPct val="100000"/>
+              </a:lnSpc>
+              <a:spcAft>
+                <a:spcPts val="200"/>
+              </a:spcAft>
+            </a:pPr>
+            <a:r>
+              <a:rPr sz="750" b="0">
+                <a:solidFill>
+                  <a:srgbClr val="1B6DB0"/>
+                </a:solidFill>
+                <a:latin typeface="Segoe UI"/>
+              </a:rPr>
+              <a:t>▪ </a:t>
+            </a:r>
+            <a:r>
+              <a:rPr sz="800" b="0">
+                <a:solidFill>
+                  <a:srgbClr val="1F2937"/>
+                </a:solidFill>
+                <a:latin typeface="Segoe UI"/>
+              </a:rPr>
+              <a:t>Scrap capped at 80% (Cu/Sn tramp-element metallurgy; India scrap supply)</a:t>
+            </a:r>
+          </a:p>
+        </p:txBody>
+      </p:sp>
+      <p:sp>
+        <p:nvSpPr>
+          <p:cNvPr id="24" name="TextBox 23"/>
+          <p:cNvSpPr txBox="1"/>
+          <p:nvPr/>
+        </p:nvSpPr>
+        <p:spPr>
+          <a:xfrm>
+            <a:off x="8549640" y="3817620"/>
+            <a:ext cx="3331159" cy="310896"/>
+          </a:xfrm>
+          <a:prstGeom prst="rect">
+            <a:avLst/>
+          </a:prstGeom>
+          <a:noFill/>
+        </p:spPr>
+        <p:txBody>
+          <a:bodyPr wrap="square" anchor="t" lIns="19050" rIns="19050" tIns="6350" bIns="6350">
+            <a:spAutoFit/>
+          </a:bodyPr>
+          <a:lstStyle/>
+          <a:p>
+            <a:pPr algn="l">
+              <a:lnSpc>
+                <a:spcPct val="100000"/>
+              </a:lnSpc>
+              <a:spcAft>
+                <a:spcPts val="200"/>
+              </a:spcAft>
+            </a:pPr>
+            <a:r>
+              <a:rPr sz="750" b="0">
+                <a:solidFill>
+                  <a:srgbClr val="1B6DB0"/>
+                </a:solidFill>
+                <a:latin typeface="Segoe UI"/>
+              </a:rPr>
+              <a:t>▪ </a:t>
+            </a:r>
+            <a:r>
+              <a:rPr sz="800" b="0">
+                <a:solidFill>
+                  <a:srgbClr val="1F2937"/>
+                </a:solidFill>
+                <a:latin typeface="Segoe UI"/>
+              </a:rPr>
+              <a:t>Captive ferrochrome kept inside Scope 1+2 — no double counting with Scope 3</a:t>
+            </a:r>
+          </a:p>
+        </p:txBody>
+      </p:sp>
+      <p:sp>
+        <p:nvSpPr>
+          <p:cNvPr id="25" name="TextBox 24"/>
+          <p:cNvSpPr txBox="1"/>
+          <p:nvPr/>
+        </p:nvSpPr>
+        <p:spPr>
+          <a:xfrm>
+            <a:off x="8549640" y="4123944"/>
+            <a:ext cx="3331159" cy="310896"/>
+          </a:xfrm>
+          <a:prstGeom prst="rect">
+            <a:avLst/>
+          </a:prstGeom>
+          <a:noFill/>
+        </p:spPr>
+        <p:txBody>
+          <a:bodyPr wrap="square" anchor="t" lIns="19050" rIns="19050" tIns="6350" bIns="6350">
+            <a:spAutoFit/>
+          </a:bodyPr>
+          <a:lstStyle/>
+          <a:p>
+            <a:pPr algn="l">
+              <a:lnSpc>
+                <a:spcPct val="100000"/>
+              </a:lnSpc>
+              <a:spcAft>
+                <a:spcPts val="200"/>
+              </a:spcAft>
+            </a:pPr>
+            <a:r>
+              <a:rPr sz="750" b="0">
+                <a:solidFill>
+                  <a:srgbClr val="1B6DB0"/>
+                </a:solidFill>
+                <a:latin typeface="Segoe UI"/>
+              </a:rPr>
+              <a:t>▪ </a:t>
+            </a:r>
+            <a:r>
+              <a:rPr sz="800" b="0">
+                <a:solidFill>
+                  <a:srgbClr val="1F2937"/>
+                </a:solidFill>
+                <a:latin typeface="Segoe UI"/>
+              </a:rPr>
+              <a:t>Dual output per ISSF method: recycled-content and end-of-life credit</a:t>
+            </a:r>
+          </a:p>
+        </p:txBody>
+      </p:sp>
+      <p:sp>
+        <p:nvSpPr>
+          <p:cNvPr id="26" name="Rectangle 25"/>
+          <p:cNvSpPr/>
+          <p:nvPr/>
+        </p:nvSpPr>
+        <p:spPr>
+          <a:xfrm>
+            <a:off x="8531352" y="4457700"/>
+            <a:ext cx="3367735" cy="749808"/>
+          </a:xfrm>
+          <a:prstGeom prst="rect">
+            <a:avLst/>
+          </a:prstGeom>
+          <a:solidFill>
+            <a:srgbClr val="F2F7EE"/>
+          </a:solidFill>
+          <a:ln w="9525">
+            <a:solidFill>
+              <a:srgbClr val="CFE0C5"/>
+            </a:solidFill>
+          </a:ln>
+          <a:effectLst/>
+        </p:spPr>
+        <p:style>
+          <a:lnRef idx="1">
+            <a:schemeClr val="accent1"/>
+          </a:lnRef>
+          <a:fillRef idx="3">
+            <a:schemeClr val="accent1"/>
+          </a:fillRef>
+          <a:effectRef idx="2">
+            <a:schemeClr val="accent1"/>
+          </a:effectRef>
+          <a:fontRef idx="minor">
+            <a:schemeClr val="lt1"/>
+          </a:fontRef>
+        </p:style>
+        <p:txBody>
+          <a:bodyPr rtlCol="0" anchor="ctr"/>
+          <a:lstStyle/>
+          <a:p>
+            <a:pPr algn="ctr"/>
+          </a:p>
+        </p:txBody>
+      </p:sp>
+      <p:sp>
+        <p:nvSpPr>
+          <p:cNvPr id="27" name="TextBox 26"/>
+          <p:cNvSpPr txBox="1"/>
+          <p:nvPr/>
+        </p:nvSpPr>
+        <p:spPr>
+          <a:xfrm>
+            <a:off x="8595360" y="4503420"/>
+            <a:ext cx="3239719" cy="676656"/>
+          </a:xfrm>
+          <a:prstGeom prst="rect">
+            <a:avLst/>
+          </a:prstGeom>
+          <a:noFill/>
+        </p:spPr>
+        <p:txBody>
+          <a:bodyPr wrap="square" anchor="t" lIns="19050" rIns="19050" tIns="6350" bIns="6350">
+            <a:spAutoFit/>
+          </a:bodyPr>
+          <a:lstStyle/>
+          <a:p>
+            <a:pPr algn="l">
+              <a:lnSpc>
+                <a:spcPct val="105000"/>
+              </a:lnSpc>
+              <a:spcAft>
+                <a:spcPts val="200"/>
+              </a:spcAft>
+            </a:pPr>
+            <a:r>
+              <a:rPr sz="819" b="1">
+                <a:solidFill>
+                  <a:srgbClr val="1D7A4F"/>
+                </a:solidFill>
+                <a:latin typeface="Segoe UI"/>
+              </a:rPr>
+              <a:t>Calibration check: </a:t>
+            </a:r>
+            <a:r>
+              <a:rPr sz="819" b="0">
+                <a:solidFill>
+                  <a:srgbClr val="2C4A22"/>
+                </a:solidFill>
+                <a:latin typeface="Segoe UI"/>
+              </a:rPr>
+              <a:t>with Jindal’s disclosed FY26 inputs (70% scrap, 47% RE), the model returns 1.73 / 2.99 tCO₂e/t against the audited 1.76 / 3.03 — within ~2%.</a:t>
+            </a:r>
+          </a:p>
+        </p:txBody>
+      </p:sp>
+      <p:sp>
+        <p:nvSpPr>
+          <p:cNvPr id="28" name="Rectangle 27"/>
+          <p:cNvSpPr/>
+          <p:nvPr/>
+        </p:nvSpPr>
+        <p:spPr>
+          <a:xfrm>
+            <a:off x="292608" y="5486400"/>
+            <a:ext cx="11606479" cy="10160"/>
+          </a:xfrm>
+          <a:prstGeom prst="rect">
+            <a:avLst/>
+          </a:prstGeom>
+          <a:solidFill>
+            <a:srgbClr val="E2E8EF"/>
+          </a:solidFill>
+          <a:ln>
+            <a:noFill/>
+          </a:ln>
+          <a:effectLst/>
+        </p:spPr>
+        <p:style>
+          <a:lnRef idx="1">
+            <a:schemeClr val="accent1"/>
+          </a:lnRef>
+          <a:fillRef idx="3">
+            <a:schemeClr val="accent1"/>
+          </a:fillRef>
+          <a:effectRef idx="2">
+            <a:schemeClr val="accent1"/>
+          </a:effectRef>
+          <a:fontRef idx="minor">
+            <a:schemeClr val="lt1"/>
+          </a:fontRef>
+        </p:style>
+        <p:txBody>
+          <a:bodyPr rtlCol="0" anchor="ctr"/>
+          <a:lstStyle/>
+          <a:p>
+            <a:pPr algn="ctr"/>
+          </a:p>
+        </p:txBody>
+      </p:sp>
+      <p:sp>
+        <p:nvSpPr>
+          <p:cNvPr id="29" name="Rectangle 28"/>
+          <p:cNvSpPr/>
+          <p:nvPr/>
+        </p:nvSpPr>
+        <p:spPr>
+          <a:xfrm>
+            <a:off x="292608" y="5541264"/>
+            <a:ext cx="1548340" cy="566928"/>
+          </a:xfrm>
+          <a:prstGeom prst="rect">
+            <a:avLst/>
+          </a:prstGeom>
+          <a:solidFill>
+            <a:srgbClr val="F5F7FA"/>
+          </a:solidFill>
+          <a:ln w="9525">
+            <a:solidFill>
+              <a:srgbClr val="C9D2DC"/>
+            </a:solidFill>
+          </a:ln>
+          <a:effectLst/>
+        </p:spPr>
+        <p:style>
+          <a:lnRef idx="1">
+            <a:schemeClr val="accent1"/>
+          </a:lnRef>
+          <a:fillRef idx="3">
+            <a:schemeClr val="accent1"/>
+          </a:fillRef>
+          <a:effectRef idx="2">
+            <a:schemeClr val="accent1"/>
+          </a:effectRef>
+          <a:fontRef idx="minor">
+            <a:schemeClr val="lt1"/>
+          </a:fontRef>
+        </p:style>
+        <p:txBody>
+          <a:bodyPr rtlCol="0" anchor="ctr"/>
+          <a:lstStyle/>
+          <a:p>
+            <a:pPr algn="ctr"/>
+          </a:p>
+        </p:txBody>
+      </p:sp>
+      <p:sp>
+        <p:nvSpPr>
+          <p:cNvPr id="30" name="TextBox 29"/>
+          <p:cNvSpPr txBox="1"/>
+          <p:nvPr/>
+        </p:nvSpPr>
+        <p:spPr>
+          <a:xfrm>
+            <a:off x="338328" y="5568696"/>
+            <a:ext cx="1456900" cy="512064"/>
+          </a:xfrm>
+          <a:prstGeom prst="rect">
+            <a:avLst/>
+          </a:prstGeom>
+          <a:noFill/>
+        </p:spPr>
+        <p:txBody>
+          <a:bodyPr wrap="square" anchor="t" lIns="19050" rIns="19050" tIns="6350" bIns="6350">
+            <a:spAutoFit/>
+          </a:bodyPr>
+          <a:lstStyle/>
+          <a:p>
+            <a:pPr algn="l">
+              <a:lnSpc>
+                <a:spcPct val="95000"/>
+              </a:lnSpc>
+              <a:spcAft>
+                <a:spcPts val="50"/>
+              </a:spcAft>
+            </a:pPr>
+            <a:r>
+              <a:rPr sz="800" b="1">
+                <a:solidFill>
+                  <a:srgbClr val="123F63"/>
+                </a:solidFill>
+                <a:latin typeface="Segoe UI"/>
+              </a:rPr>
+              <a:t>Charge make-up</a:t>
+            </a:r>
+          </a:p>
+          <a:p>
+            <a:pPr algn="l">
+              <a:lnSpc>
+                <a:spcPct val="95000"/>
+              </a:lnSpc>
+              <a:spcAft>
+                <a:spcPts val="50"/>
+              </a:spcAft>
+            </a:pPr>
+            <a:r>
+              <a:rPr sz="700" b="0">
+                <a:solidFill>
+                  <a:srgbClr val="5B6570"/>
+                </a:solidFill>
+                <a:latin typeface="Segoe UI"/>
+              </a:rPr>
+              <a:t>scrap + FeCr + Ni units (Scope 3)</a:t>
+            </a:r>
+          </a:p>
+        </p:txBody>
+      </p:sp>
+      <p:sp>
+        <p:nvSpPr>
+          <p:cNvPr id="31" name="TextBox 30"/>
+          <p:cNvSpPr txBox="1"/>
+          <p:nvPr/>
+        </p:nvSpPr>
+        <p:spPr>
+          <a:xfrm>
+            <a:off x="1827232" y="5696712"/>
+            <a:ext cx="155448" cy="228600"/>
+          </a:xfrm>
+          <a:prstGeom prst="rect">
+            <a:avLst/>
+          </a:prstGeom>
+          <a:noFill/>
+        </p:spPr>
+        <p:txBody>
+          <a:bodyPr wrap="square" anchor="t" lIns="19050" rIns="19050" tIns="6350" bIns="6350">
+            <a:spAutoFit/>
+          </a:bodyPr>
+          <a:lstStyle/>
+          <a:p>
+            <a:pPr algn="ctr">
+              <a:lnSpc>
+                <a:spcPct val="100000"/>
+              </a:lnSpc>
+              <a:spcAft>
+                <a:spcPts val="200"/>
+              </a:spcAft>
+            </a:pPr>
+            <a:r>
+              <a:rPr sz="1000" b="0">
+                <a:solidFill>
+                  <a:srgbClr val="8A94A0"/>
+                </a:solidFill>
+                <a:latin typeface="Segoe UI"/>
+              </a:rPr>
+              <a:t>›</a:t>
+            </a:r>
+          </a:p>
+        </p:txBody>
+      </p:sp>
+      <p:sp>
+        <p:nvSpPr>
+          <p:cNvPr id="32" name="Rectangle 31"/>
+          <p:cNvSpPr/>
+          <p:nvPr/>
+        </p:nvSpPr>
+        <p:spPr>
+          <a:xfrm>
+            <a:off x="1968964" y="5541264"/>
+            <a:ext cx="1548340" cy="566928"/>
+          </a:xfrm>
+          <a:prstGeom prst="rect">
+            <a:avLst/>
+          </a:prstGeom>
+          <a:solidFill>
+            <a:srgbClr val="F5F7FA"/>
+          </a:solidFill>
+          <a:ln w="9525">
+            <a:solidFill>
+              <a:srgbClr val="C9D2DC"/>
+            </a:solidFill>
+          </a:ln>
+          <a:effectLst/>
+        </p:spPr>
+        <p:style>
+          <a:lnRef idx="1">
+            <a:schemeClr val="accent1"/>
+          </a:lnRef>
+          <a:fillRef idx="3">
+            <a:schemeClr val="accent1"/>
+          </a:fillRef>
+          <a:effectRef idx="2">
+            <a:schemeClr val="accent1"/>
+          </a:effectRef>
+          <a:fontRef idx="minor">
+            <a:schemeClr val="lt1"/>
+          </a:fontRef>
+        </p:style>
+        <p:txBody>
+          <a:bodyPr rtlCol="0" anchor="ctr"/>
+          <a:lstStyle/>
+          <a:p>
+            <a:pPr algn="ctr"/>
+          </a:p>
+        </p:txBody>
+      </p:sp>
+      <p:sp>
+        <p:nvSpPr>
+          <p:cNvPr id="33" name="TextBox 32"/>
+          <p:cNvSpPr txBox="1"/>
+          <p:nvPr/>
+        </p:nvSpPr>
+        <p:spPr>
+          <a:xfrm>
+            <a:off x="2014684" y="5568696"/>
+            <a:ext cx="1456900" cy="512064"/>
+          </a:xfrm>
+          <a:prstGeom prst="rect">
+            <a:avLst/>
+          </a:prstGeom>
+          <a:noFill/>
+        </p:spPr>
+        <p:txBody>
+          <a:bodyPr wrap="square" anchor="t" lIns="19050" rIns="19050" tIns="6350" bIns="6350">
+            <a:spAutoFit/>
+          </a:bodyPr>
+          <a:lstStyle/>
+          <a:p>
+            <a:pPr algn="l">
+              <a:lnSpc>
+                <a:spcPct val="95000"/>
+              </a:lnSpc>
+              <a:spcAft>
+                <a:spcPts val="50"/>
+              </a:spcAft>
+            </a:pPr>
+            <a:r>
+              <a:rPr sz="800" b="1">
+                <a:solidFill>
+                  <a:srgbClr val="123F63"/>
+                </a:solidFill>
+                <a:latin typeface="Segoe UI"/>
+              </a:rPr>
+              <a:t>EAF melt</a:t>
+            </a:r>
+          </a:p>
+          <a:p>
+            <a:pPr algn="l">
+              <a:lnSpc>
+                <a:spcPct val="95000"/>
+              </a:lnSpc>
+              <a:spcAft>
+                <a:spcPts val="50"/>
+              </a:spcAft>
+            </a:pPr>
+            <a:r>
+              <a:rPr sz="700" b="0">
+                <a:solidFill>
+                  <a:srgbClr val="5B6570"/>
+                </a:solidFill>
+                <a:latin typeface="Segoe UI"/>
+              </a:rPr>
+              <a:t>400–600 kWh/t (Scope 2)</a:t>
+            </a:r>
+          </a:p>
+        </p:txBody>
+      </p:sp>
+      <p:sp>
+        <p:nvSpPr>
+          <p:cNvPr id="34" name="TextBox 33"/>
+          <p:cNvSpPr txBox="1"/>
+          <p:nvPr/>
+        </p:nvSpPr>
+        <p:spPr>
+          <a:xfrm>
+            <a:off x="3503588" y="5696712"/>
+            <a:ext cx="155448" cy="228600"/>
+          </a:xfrm>
+          <a:prstGeom prst="rect">
+            <a:avLst/>
+          </a:prstGeom>
+          <a:noFill/>
+        </p:spPr>
+        <p:txBody>
+          <a:bodyPr wrap="square" anchor="t" lIns="19050" rIns="19050" tIns="6350" bIns="6350">
+            <a:spAutoFit/>
+          </a:bodyPr>
+          <a:lstStyle/>
+          <a:p>
+            <a:pPr algn="ctr">
+              <a:lnSpc>
+                <a:spcPct val="100000"/>
+              </a:lnSpc>
+              <a:spcAft>
+                <a:spcPts val="200"/>
+              </a:spcAft>
+            </a:pPr>
+            <a:r>
+              <a:rPr sz="1000" b="0">
+                <a:solidFill>
+                  <a:srgbClr val="8A94A0"/>
+                </a:solidFill>
+                <a:latin typeface="Segoe UI"/>
+              </a:rPr>
+              <a:t>›</a:t>
+            </a:r>
+          </a:p>
+        </p:txBody>
+      </p:sp>
+      <p:sp>
+        <p:nvSpPr>
+          <p:cNvPr id="35" name="Rectangle 34"/>
+          <p:cNvSpPr/>
+          <p:nvPr/>
+        </p:nvSpPr>
+        <p:spPr>
+          <a:xfrm>
+            <a:off x="3645320" y="5541264"/>
+            <a:ext cx="1548340" cy="566928"/>
+          </a:xfrm>
+          <a:prstGeom prst="rect">
+            <a:avLst/>
+          </a:prstGeom>
+          <a:solidFill>
+            <a:srgbClr val="F5F7FA"/>
+          </a:solidFill>
+          <a:ln w="9525">
+            <a:solidFill>
+              <a:srgbClr val="C9D2DC"/>
+            </a:solidFill>
+          </a:ln>
+          <a:effectLst/>
+        </p:spPr>
+        <p:style>
+          <a:lnRef idx="1">
+            <a:schemeClr val="accent1"/>
+          </a:lnRef>
+          <a:fillRef idx="3">
+            <a:schemeClr val="accent1"/>
+          </a:fillRef>
+          <a:effectRef idx="2">
+            <a:schemeClr val="accent1"/>
+          </a:effectRef>
+          <a:fontRef idx="minor">
+            <a:schemeClr val="lt1"/>
+          </a:fontRef>
+        </p:style>
+        <p:txBody>
+          <a:bodyPr rtlCol="0" anchor="ctr"/>
+          <a:lstStyle/>
+          <a:p>
+            <a:pPr algn="ctr"/>
+          </a:p>
+        </p:txBody>
+      </p:sp>
+      <p:sp>
+        <p:nvSpPr>
+          <p:cNvPr id="36" name="TextBox 35"/>
+          <p:cNvSpPr txBox="1"/>
+          <p:nvPr/>
+        </p:nvSpPr>
+        <p:spPr>
+          <a:xfrm>
+            <a:off x="3691040" y="5568696"/>
+            <a:ext cx="1456900" cy="512064"/>
+          </a:xfrm>
+          <a:prstGeom prst="rect">
+            <a:avLst/>
+          </a:prstGeom>
+          <a:noFill/>
+        </p:spPr>
+        <p:txBody>
+          <a:bodyPr wrap="square" anchor="t" lIns="19050" rIns="19050" tIns="6350" bIns="6350">
+            <a:spAutoFit/>
+          </a:bodyPr>
+          <a:lstStyle/>
+          <a:p>
+            <a:pPr algn="l">
+              <a:lnSpc>
+                <a:spcPct val="95000"/>
+              </a:lnSpc>
+              <a:spcAft>
+                <a:spcPts val="50"/>
+              </a:spcAft>
+            </a:pPr>
+            <a:r>
+              <a:rPr sz="800" b="1">
+                <a:solidFill>
+                  <a:srgbClr val="123F63"/>
+                </a:solidFill>
+                <a:latin typeface="Segoe UI"/>
+              </a:rPr>
+              <a:t>AOD refine</a:t>
+            </a:r>
+          </a:p>
+          <a:p>
+            <a:pPr algn="l">
+              <a:lnSpc>
+                <a:spcPct val="95000"/>
+              </a:lnSpc>
+              <a:spcAft>
+                <a:spcPts val="50"/>
+              </a:spcAft>
+            </a:pPr>
+            <a:r>
+              <a:rPr sz="700" b="0">
+                <a:solidFill>
+                  <a:srgbClr val="5B6570"/>
+                </a:solidFill>
+                <a:latin typeface="Segoe UI"/>
+              </a:rPr>
+              <a:t>process CO₂ (Scope 1)</a:t>
+            </a:r>
+          </a:p>
+        </p:txBody>
+      </p:sp>
+      <p:sp>
+        <p:nvSpPr>
+          <p:cNvPr id="37" name="TextBox 36"/>
+          <p:cNvSpPr txBox="1"/>
+          <p:nvPr/>
+        </p:nvSpPr>
+        <p:spPr>
+          <a:xfrm>
+            <a:off x="5179944" y="5696712"/>
+            <a:ext cx="155448" cy="228600"/>
+          </a:xfrm>
+          <a:prstGeom prst="rect">
+            <a:avLst/>
+          </a:prstGeom>
+          <a:noFill/>
+        </p:spPr>
+        <p:txBody>
+          <a:bodyPr wrap="square" anchor="t" lIns="19050" rIns="19050" tIns="6350" bIns="6350">
+            <a:spAutoFit/>
+          </a:bodyPr>
+          <a:lstStyle/>
+          <a:p>
+            <a:pPr algn="ctr">
+              <a:lnSpc>
+                <a:spcPct val="100000"/>
+              </a:lnSpc>
+              <a:spcAft>
+                <a:spcPts val="200"/>
+              </a:spcAft>
+            </a:pPr>
+            <a:r>
+              <a:rPr sz="1000" b="0">
+                <a:solidFill>
+                  <a:srgbClr val="8A94A0"/>
+                </a:solidFill>
+                <a:latin typeface="Segoe UI"/>
+              </a:rPr>
+              <a:t>›</a:t>
+            </a:r>
+          </a:p>
+        </p:txBody>
+      </p:sp>
+      <p:sp>
+        <p:nvSpPr>
+          <p:cNvPr id="38" name="Rectangle 37"/>
+          <p:cNvSpPr/>
+          <p:nvPr/>
+        </p:nvSpPr>
+        <p:spPr>
+          <a:xfrm>
+            <a:off x="5321676" y="5541264"/>
+            <a:ext cx="1548340" cy="566928"/>
+          </a:xfrm>
+          <a:prstGeom prst="rect">
+            <a:avLst/>
+          </a:prstGeom>
+          <a:solidFill>
+            <a:srgbClr val="F5F7FA"/>
+          </a:solidFill>
+          <a:ln w="9525">
+            <a:solidFill>
+              <a:srgbClr val="C9D2DC"/>
+            </a:solidFill>
+          </a:ln>
+          <a:effectLst/>
+        </p:spPr>
+        <p:style>
+          <a:lnRef idx="1">
+            <a:schemeClr val="accent1"/>
+          </a:lnRef>
+          <a:fillRef idx="3">
+            <a:schemeClr val="accent1"/>
+          </a:fillRef>
+          <a:effectRef idx="2">
+            <a:schemeClr val="accent1"/>
+          </a:effectRef>
+          <a:fontRef idx="minor">
+            <a:schemeClr val="lt1"/>
+          </a:fontRef>
+        </p:style>
+        <p:txBody>
+          <a:bodyPr rtlCol="0" anchor="ctr"/>
+          <a:lstStyle/>
+          <a:p>
+            <a:pPr algn="ctr"/>
+          </a:p>
+        </p:txBody>
+      </p:sp>
+      <p:sp>
+        <p:nvSpPr>
+          <p:cNvPr id="39" name="TextBox 38"/>
+          <p:cNvSpPr txBox="1"/>
+          <p:nvPr/>
+        </p:nvSpPr>
+        <p:spPr>
+          <a:xfrm>
+            <a:off x="5367396" y="5568696"/>
+            <a:ext cx="1456900" cy="512064"/>
+          </a:xfrm>
+          <a:prstGeom prst="rect">
+            <a:avLst/>
+          </a:prstGeom>
+          <a:noFill/>
+        </p:spPr>
+        <p:txBody>
+          <a:bodyPr wrap="square" anchor="t" lIns="19050" rIns="19050" tIns="6350" bIns="6350">
+            <a:spAutoFit/>
+          </a:bodyPr>
+          <a:lstStyle/>
+          <a:p>
+            <a:pPr algn="l">
+              <a:lnSpc>
+                <a:spcPct val="95000"/>
+              </a:lnSpc>
+              <a:spcAft>
+                <a:spcPts val="50"/>
+              </a:spcAft>
+            </a:pPr>
+            <a:r>
+              <a:rPr sz="800" b="1">
+                <a:solidFill>
+                  <a:srgbClr val="123F63"/>
+                </a:solidFill>
+                <a:latin typeface="Segoe UI"/>
+              </a:rPr>
+              <a:t>Cast + reheat</a:t>
+            </a:r>
+          </a:p>
+          <a:p>
+            <a:pPr algn="l">
+              <a:lnSpc>
+                <a:spcPct val="95000"/>
+              </a:lnSpc>
+              <a:spcAft>
+                <a:spcPts val="50"/>
+              </a:spcAft>
+            </a:pPr>
+            <a:r>
+              <a:rPr sz="700" b="0">
+                <a:solidFill>
+                  <a:srgbClr val="5B6570"/>
+                </a:solidFill>
+                <a:latin typeface="Segoe UI"/>
+              </a:rPr>
+              <a:t>FO/LSHS → NG, Bio-LDO</a:t>
+            </a:r>
+          </a:p>
+        </p:txBody>
+      </p:sp>
+      <p:sp>
+        <p:nvSpPr>
+          <p:cNvPr id="40" name="TextBox 39"/>
+          <p:cNvSpPr txBox="1"/>
+          <p:nvPr/>
+        </p:nvSpPr>
+        <p:spPr>
+          <a:xfrm>
+            <a:off x="6856300" y="5696712"/>
+            <a:ext cx="155448" cy="228600"/>
+          </a:xfrm>
+          <a:prstGeom prst="rect">
+            <a:avLst/>
+          </a:prstGeom>
+          <a:noFill/>
+        </p:spPr>
+        <p:txBody>
+          <a:bodyPr wrap="square" anchor="t" lIns="19050" rIns="19050" tIns="6350" bIns="6350">
+            <a:spAutoFit/>
+          </a:bodyPr>
+          <a:lstStyle/>
+          <a:p>
+            <a:pPr algn="ctr">
+              <a:lnSpc>
+                <a:spcPct val="100000"/>
+              </a:lnSpc>
+              <a:spcAft>
+                <a:spcPts val="200"/>
+              </a:spcAft>
+            </a:pPr>
+            <a:r>
+              <a:rPr sz="1000" b="0">
+                <a:solidFill>
+                  <a:srgbClr val="8A94A0"/>
+                </a:solidFill>
+                <a:latin typeface="Segoe UI"/>
+              </a:rPr>
+              <a:t>›</a:t>
+            </a:r>
+          </a:p>
+        </p:txBody>
+      </p:sp>
+      <p:sp>
+        <p:nvSpPr>
+          <p:cNvPr id="41" name="Rectangle 40"/>
+          <p:cNvSpPr/>
+          <p:nvPr/>
+        </p:nvSpPr>
+        <p:spPr>
+          <a:xfrm>
+            <a:off x="6998032" y="5541264"/>
+            <a:ext cx="1548340" cy="566928"/>
+          </a:xfrm>
+          <a:prstGeom prst="rect">
+            <a:avLst/>
+          </a:prstGeom>
+          <a:solidFill>
+            <a:srgbClr val="F5F7FA"/>
+          </a:solidFill>
+          <a:ln w="9525">
+            <a:solidFill>
+              <a:srgbClr val="C9D2DC"/>
+            </a:solidFill>
+          </a:ln>
+          <a:effectLst/>
+        </p:spPr>
+        <p:style>
+          <a:lnRef idx="1">
+            <a:schemeClr val="accent1"/>
+          </a:lnRef>
+          <a:fillRef idx="3">
+            <a:schemeClr val="accent1"/>
+          </a:fillRef>
+          <a:effectRef idx="2">
+            <a:schemeClr val="accent1"/>
+          </a:effectRef>
+          <a:fontRef idx="minor">
+            <a:schemeClr val="lt1"/>
+          </a:fontRef>
+        </p:style>
+        <p:txBody>
+          <a:bodyPr rtlCol="0" anchor="ctr"/>
+          <a:lstStyle/>
+          <a:p>
+            <a:pPr algn="ctr"/>
+          </a:p>
+        </p:txBody>
+      </p:sp>
+      <p:sp>
+        <p:nvSpPr>
+          <p:cNvPr id="42" name="TextBox 41"/>
+          <p:cNvSpPr txBox="1"/>
+          <p:nvPr/>
+        </p:nvSpPr>
+        <p:spPr>
+          <a:xfrm>
+            <a:off x="7043752" y="5568696"/>
+            <a:ext cx="1456900" cy="512064"/>
+          </a:xfrm>
+          <a:prstGeom prst="rect">
+            <a:avLst/>
+          </a:prstGeom>
+          <a:noFill/>
+        </p:spPr>
+        <p:txBody>
+          <a:bodyPr wrap="square" anchor="t" lIns="19050" rIns="19050" tIns="6350" bIns="6350">
+            <a:spAutoFit/>
+          </a:bodyPr>
+          <a:lstStyle/>
+          <a:p>
+            <a:pPr algn="l">
+              <a:lnSpc>
+                <a:spcPct val="95000"/>
+              </a:lnSpc>
+              <a:spcAft>
+                <a:spcPts val="50"/>
+              </a:spcAft>
+            </a:pPr>
+            <a:r>
+              <a:rPr sz="800" b="1">
+                <a:solidFill>
+                  <a:srgbClr val="123F63"/>
+                </a:solidFill>
+                <a:latin typeface="Segoe UI"/>
+              </a:rPr>
+              <a:t>Roll + finish</a:t>
+            </a:r>
+          </a:p>
+          <a:p>
+            <a:pPr algn="l">
+              <a:lnSpc>
+                <a:spcPct val="95000"/>
+              </a:lnSpc>
+              <a:spcAft>
+                <a:spcPts val="50"/>
+              </a:spcAft>
+            </a:pPr>
+            <a:r>
+              <a:rPr sz="700" b="0">
+                <a:solidFill>
+                  <a:srgbClr val="5B6570"/>
+                </a:solidFill>
+                <a:latin typeface="Segoe UI"/>
+              </a:rPr>
+              <a:t>anneal, pickle; propane → H₂</a:t>
+            </a:r>
+          </a:p>
+        </p:txBody>
+      </p:sp>
+      <p:sp>
+        <p:nvSpPr>
+          <p:cNvPr id="43" name="TextBox 42"/>
+          <p:cNvSpPr txBox="1"/>
+          <p:nvPr/>
+        </p:nvSpPr>
+        <p:spPr>
+          <a:xfrm>
+            <a:off x="8532656" y="5696712"/>
+            <a:ext cx="155448" cy="228600"/>
+          </a:xfrm>
+          <a:prstGeom prst="rect">
+            <a:avLst/>
+          </a:prstGeom>
+          <a:noFill/>
+        </p:spPr>
+        <p:txBody>
+          <a:bodyPr wrap="square" anchor="t" lIns="19050" rIns="19050" tIns="6350" bIns="6350">
+            <a:spAutoFit/>
+          </a:bodyPr>
+          <a:lstStyle/>
+          <a:p>
+            <a:pPr algn="ctr">
+              <a:lnSpc>
+                <a:spcPct val="100000"/>
+              </a:lnSpc>
+              <a:spcAft>
+                <a:spcPts val="200"/>
+              </a:spcAft>
+            </a:pPr>
+            <a:r>
+              <a:rPr sz="1000" b="0">
+                <a:solidFill>
+                  <a:srgbClr val="8A94A0"/>
+                </a:solidFill>
+                <a:latin typeface="Segoe UI"/>
+              </a:rPr>
+              <a:t>›</a:t>
+            </a:r>
+          </a:p>
+        </p:txBody>
+      </p:sp>
+      <p:sp>
+        <p:nvSpPr>
+          <p:cNvPr id="44" name="Rectangle 43"/>
+          <p:cNvSpPr/>
+          <p:nvPr/>
+        </p:nvSpPr>
+        <p:spPr>
+          <a:xfrm>
+            <a:off x="8674388" y="5541264"/>
+            <a:ext cx="1548340" cy="566928"/>
+          </a:xfrm>
+          <a:prstGeom prst="rect">
+            <a:avLst/>
+          </a:prstGeom>
+          <a:solidFill>
+            <a:srgbClr val="F5F7FA"/>
+          </a:solidFill>
+          <a:ln w="9525">
+            <a:solidFill>
+              <a:srgbClr val="C9D2DC"/>
+            </a:solidFill>
+          </a:ln>
+          <a:effectLst/>
+        </p:spPr>
+        <p:style>
+          <a:lnRef idx="1">
+            <a:schemeClr val="accent1"/>
+          </a:lnRef>
+          <a:fillRef idx="3">
+            <a:schemeClr val="accent1"/>
+          </a:fillRef>
+          <a:effectRef idx="2">
+            <a:schemeClr val="accent1"/>
+          </a:effectRef>
+          <a:fontRef idx="minor">
+            <a:schemeClr val="lt1"/>
+          </a:fontRef>
+        </p:style>
+        <p:txBody>
+          <a:bodyPr rtlCol="0" anchor="ctr"/>
+          <a:lstStyle/>
+          <a:p>
+            <a:pPr algn="ctr"/>
+          </a:p>
+        </p:txBody>
+      </p:sp>
+      <p:sp>
+        <p:nvSpPr>
+          <p:cNvPr id="45" name="TextBox 44"/>
+          <p:cNvSpPr txBox="1"/>
+          <p:nvPr/>
+        </p:nvSpPr>
+        <p:spPr>
+          <a:xfrm>
+            <a:off x="8720108" y="5568696"/>
+            <a:ext cx="1456900" cy="512064"/>
+          </a:xfrm>
+          <a:prstGeom prst="rect">
+            <a:avLst/>
+          </a:prstGeom>
+          <a:noFill/>
+        </p:spPr>
+        <p:txBody>
+          <a:bodyPr wrap="square" anchor="t" lIns="19050" rIns="19050" tIns="6350" bIns="6350">
+            <a:spAutoFit/>
+          </a:bodyPr>
+          <a:lstStyle/>
+          <a:p>
+            <a:pPr algn="l">
+              <a:lnSpc>
+                <a:spcPct val="95000"/>
+              </a:lnSpc>
+              <a:spcAft>
+                <a:spcPts val="50"/>
+              </a:spcAft>
+            </a:pPr>
+            <a:r>
+              <a:rPr sz="800" b="1">
+                <a:solidFill>
+                  <a:srgbClr val="123F63"/>
+                </a:solidFill>
+                <a:latin typeface="Segoe UI"/>
+              </a:rPr>
+              <a:t>Mill gate</a:t>
+            </a:r>
+          </a:p>
+          <a:p>
+            <a:pPr algn="l">
+              <a:lnSpc>
+                <a:spcPct val="95000"/>
+              </a:lnSpc>
+              <a:spcAft>
+                <a:spcPts val="50"/>
+              </a:spcAft>
+            </a:pPr>
+            <a:r>
+              <a:rPr sz="700" b="0">
+                <a:solidFill>
+                  <a:srgbClr val="5B6570"/>
+                </a:solidFill>
+                <a:latin typeface="Segoe UI"/>
+              </a:rPr>
+              <a:t>1.76 S1+2 · 3.03 total (FY26)</a:t>
+            </a:r>
+          </a:p>
+        </p:txBody>
+      </p:sp>
+      <p:sp>
+        <p:nvSpPr>
+          <p:cNvPr id="46" name="TextBox 45"/>
+          <p:cNvSpPr txBox="1"/>
+          <p:nvPr/>
+        </p:nvSpPr>
+        <p:spPr>
+          <a:xfrm>
+            <a:off x="10209012" y="5696712"/>
+            <a:ext cx="155448" cy="228600"/>
+          </a:xfrm>
+          <a:prstGeom prst="rect">
+            <a:avLst/>
+          </a:prstGeom>
+          <a:noFill/>
+        </p:spPr>
+        <p:txBody>
+          <a:bodyPr wrap="square" anchor="t" lIns="19050" rIns="19050" tIns="6350" bIns="6350">
+            <a:spAutoFit/>
+          </a:bodyPr>
+          <a:lstStyle/>
+          <a:p>
+            <a:pPr algn="ctr">
+              <a:lnSpc>
+                <a:spcPct val="100000"/>
+              </a:lnSpc>
+              <a:spcAft>
+                <a:spcPts val="200"/>
+              </a:spcAft>
+            </a:pPr>
+            <a:r>
+              <a:rPr sz="1000" b="0">
+                <a:solidFill>
+                  <a:srgbClr val="8A94A0"/>
+                </a:solidFill>
+                <a:latin typeface="Segoe UI"/>
+              </a:rPr>
+              <a:t>›</a:t>
+            </a:r>
+          </a:p>
+        </p:txBody>
+      </p:sp>
+      <p:sp>
+        <p:nvSpPr>
+          <p:cNvPr id="47" name="Rectangle 46"/>
+          <p:cNvSpPr/>
+          <p:nvPr/>
+        </p:nvSpPr>
+        <p:spPr>
+          <a:xfrm>
+            <a:off x="10350744" y="5541264"/>
+            <a:ext cx="1548340" cy="566928"/>
+          </a:xfrm>
+          <a:prstGeom prst="rect">
+            <a:avLst/>
+          </a:prstGeom>
+          <a:solidFill>
+            <a:srgbClr val="F5F7FA"/>
+          </a:solidFill>
+          <a:ln w="9525">
+            <a:solidFill>
+              <a:srgbClr val="C9D2DC"/>
+            </a:solidFill>
+          </a:ln>
+          <a:effectLst/>
+        </p:spPr>
+        <p:style>
+          <a:lnRef idx="1">
+            <a:schemeClr val="accent1"/>
+          </a:lnRef>
+          <a:fillRef idx="3">
+            <a:schemeClr val="accent1"/>
+          </a:fillRef>
+          <a:effectRef idx="2">
+            <a:schemeClr val="accent1"/>
+          </a:effectRef>
+          <a:fontRef idx="minor">
+            <a:schemeClr val="lt1"/>
+          </a:fontRef>
+        </p:style>
+        <p:txBody>
+          <a:bodyPr rtlCol="0" anchor="ctr"/>
+          <a:lstStyle/>
+          <a:p>
+            <a:pPr algn="ctr"/>
+          </a:p>
+        </p:txBody>
+      </p:sp>
+      <p:sp>
+        <p:nvSpPr>
+          <p:cNvPr id="48" name="TextBox 47"/>
+          <p:cNvSpPr txBox="1"/>
+          <p:nvPr/>
+        </p:nvSpPr>
+        <p:spPr>
+          <a:xfrm>
+            <a:off x="10396464" y="5568696"/>
+            <a:ext cx="1456900" cy="512064"/>
+          </a:xfrm>
+          <a:prstGeom prst="rect">
+            <a:avLst/>
+          </a:prstGeom>
+          <a:noFill/>
+        </p:spPr>
+        <p:txBody>
+          <a:bodyPr wrap="square" anchor="t" lIns="19050" rIns="19050" tIns="6350" bIns="6350">
+            <a:spAutoFit/>
+          </a:bodyPr>
+          <a:lstStyle/>
+          <a:p>
+            <a:pPr algn="l">
+              <a:lnSpc>
+                <a:spcPct val="95000"/>
+              </a:lnSpc>
+              <a:spcAft>
+                <a:spcPts val="50"/>
+              </a:spcAft>
+            </a:pPr>
+            <a:r>
+              <a:rPr sz="800" b="1">
+                <a:solidFill>
+                  <a:srgbClr val="123F63"/>
+                </a:solidFill>
+                <a:latin typeface="Segoe UI"/>
+              </a:rPr>
+              <a:t>EU border</a:t>
+            </a:r>
+          </a:p>
+          <a:p>
+            <a:pPr algn="l">
+              <a:lnSpc>
+                <a:spcPct val="95000"/>
+              </a:lnSpc>
+              <a:spcAft>
+                <a:spcPts val="50"/>
+              </a:spcAft>
+            </a:pPr>
+            <a:r>
+              <a:rPr sz="700" b="0">
+                <a:solidFill>
+                  <a:srgbClr val="5B6570"/>
+                </a:solidFill>
+                <a:latin typeface="Segoe UI"/>
+              </a:rPr>
+              <a:t>CBAM 2030: €446 default vs €48–74 verified</a:t>
+            </a:r>
+          </a:p>
+        </p:txBody>
+      </p:sp>
+      <p:sp>
+        <p:nvSpPr>
+          <p:cNvPr id="49" name="Rectangle 48"/>
+          <p:cNvSpPr/>
+          <p:nvPr/>
+        </p:nvSpPr>
+        <p:spPr>
+          <a:xfrm>
+            <a:off x="292608" y="6382512"/>
+            <a:ext cx="11606479" cy="10160"/>
+          </a:xfrm>
+          <a:prstGeom prst="rect">
+            <a:avLst/>
+          </a:prstGeom>
+          <a:solidFill>
+            <a:srgbClr val="E2E8EF"/>
+          </a:solidFill>
+          <a:ln>
+            <a:noFill/>
+          </a:ln>
+          <a:effectLst/>
+        </p:spPr>
+        <p:style>
+          <a:lnRef idx="1">
+            <a:schemeClr val="accent1"/>
+          </a:lnRef>
+          <a:fillRef idx="3">
+            <a:schemeClr val="accent1"/>
+          </a:fillRef>
+          <a:effectRef idx="2">
+            <a:schemeClr val="accent1"/>
+          </a:effectRef>
+          <a:fontRef idx="minor">
+            <a:schemeClr val="lt1"/>
+          </a:fontRef>
+        </p:style>
+        <p:txBody>
+          <a:bodyPr rtlCol="0" anchor="ctr"/>
+          <a:lstStyle/>
+          <a:p>
+            <a:pPr algn="ctr"/>
+          </a:p>
+        </p:txBody>
+      </p:sp>
+      <p:sp>
+        <p:nvSpPr>
+          <p:cNvPr id="50" name="TextBox 49"/>
+          <p:cNvSpPr txBox="1"/>
+          <p:nvPr/>
+        </p:nvSpPr>
+        <p:spPr>
+          <a:xfrm>
+            <a:off x="292608" y="6437376"/>
+            <a:ext cx="11155680" cy="384048"/>
+          </a:xfrm>
+          <a:prstGeom prst="rect">
+            <a:avLst/>
+          </a:prstGeom>
+          <a:noFill/>
+        </p:spPr>
+        <p:txBody>
+          <a:bodyPr wrap="square" anchor="t" lIns="19050" rIns="19050" tIns="6350" bIns="6350">
+            <a:spAutoFit/>
+          </a:bodyPr>
+          <a:lstStyle/>
+          <a:p>
+            <a:pPr algn="l">
+              <a:lnSpc>
+                <a:spcPct val="115000"/>
+              </a:lnSpc>
+              <a:spcAft>
+                <a:spcPts val="200"/>
+              </a:spcAft>
+            </a:pPr>
+            <a:r>
+              <a:rPr sz="700" b="0">
+                <a:solidFill>
+                  <a:srgbClr val="8A94A0"/>
+                </a:solidFill>
+                <a:latin typeface="Segoe UI"/>
+              </a:rPr>
+              <a:t>Source: JSL ESG Factsheets, BRSR and CDP disclosures FY22–26; CEA CO₂ Baseline Database v21.0; BEE PAT; IPCC 2006; worldstainless/ISSF; ICDA ferrochrome LCA; EU Regulations 2023/956 and 2025/2620-21; team analysis (19 research files, 40+ primary sources).  </a:t>
+            </a:r>
+            <a:r>
+              <a:rPr sz="700" b="1">
+                <a:solidFill>
+                  <a:srgbClr val="5B6570"/>
+                </a:solidFill>
+                <a:latin typeface="Segoe UI"/>
+              </a:rPr>
+              <a:t>Live prototype: </a:t>
+            </a:r>
+            <a:r>
+              <a:rPr sz="700" b="0">
+                <a:solidFill>
+                  <a:srgbClr val="1B6DB0"/>
+                </a:solidFill>
+                <a:latin typeface="Segoe UI"/>
+                <a:hlinkClick r:id="rId3"/>
+              </a:rPr>
+              <a:t>ritehrks.github.io/jindal-steel-case-study/website</a:t>
+            </a:r>
+            <a:r>
+              <a:rPr sz="700" b="0">
+                <a:solidFill>
+                  <a:srgbClr val="8A94A0"/>
+                </a:solidFill>
+                <a:latin typeface="Segoe UI"/>
+              </a:rPr>
+              <a:t>   ·   </a:t>
+            </a:r>
+            <a:r>
+              <a:rPr sz="700" b="1">
+                <a:solidFill>
+                  <a:srgbClr val="5B6570"/>
+                </a:solidFill>
+                <a:latin typeface="Segoe UI"/>
+              </a:rPr>
+              <a:t>Research appendix: </a:t>
+            </a:r>
+            <a:r>
+              <a:rPr sz="700" b="0">
+                <a:solidFill>
+                  <a:srgbClr val="1B6DB0"/>
+                </a:solidFill>
+                <a:latin typeface="Segoe UI"/>
+                <a:hlinkClick r:id="rId4"/>
+              </a:rPr>
+              <a:t>ritehrks.github.io/jindal-steel-case-study/appendix.pdf</a:t>
+            </a:r>
+          </a:p>
+        </p:txBody>
+      </p:sp>
+      <p:sp>
+        <p:nvSpPr>
+          <p:cNvPr id="51" name="TextBox 50"/>
+          <p:cNvSpPr txBox="1"/>
+          <p:nvPr/>
+        </p:nvSpPr>
+        <p:spPr>
+          <a:xfrm>
+            <a:off x="11750040" y="6437376"/>
+            <a:ext cx="320040" cy="201168"/>
+          </a:xfrm>
+          <a:prstGeom prst="rect">
+            <a:avLst/>
+          </a:prstGeom>
+          <a:noFill/>
+        </p:spPr>
+        <p:txBody>
+          <a:bodyPr wrap="square" anchor="t" lIns="19050" rIns="19050" tIns="6350" bIns="6350">
+            <a:spAutoFit/>
+          </a:bodyPr>
+          <a:lstStyle/>
+          <a:p>
+            <a:pPr algn="r">
+              <a:lnSpc>
+                <a:spcPct val="100000"/>
+              </a:lnSpc>
+              <a:spcAft>
+                <a:spcPts val="200"/>
+              </a:spcAft>
+            </a:pPr>
+            <a:r>
+              <a:rPr sz="800" b="0">
+                <a:solidFill>
+                  <a:srgbClr val="5B6570"/>
+                </a:solidFill>
+                <a:latin typeface="Segoe UI"/>
+              </a:rPr>
+              <a:t>1</a:t>
+            </a:r>
+          </a:p>
+        </p:txBody>
+      </p:sp>
+    </p:spTree>
+  </p:cSld>
+  <p:clrMapOvr>
+    <a:masterClrMapping/>
+  </p:clrMapOvr>
+</p:sld>
+</file>
+
+<file path=ppt/slides/slide2.xml><?xml version="1.0" encoding="utf-8"?>
+<p:sld xmlns:a="http://schemas.openxmlformats.org/drawingml/2006/main" xmlns:p="http://schemas.openxmlformats.org/presentationml/2006/main" xmlns:r="http://schemas.openxmlformats.org/officeDocument/2006/relationships">
+  <p:cSld>
+    <p:bg>
+      <p:bgPr>
+        <a:solidFill>
+          <a:srgbClr val="FFFFFF"/>
+        </a:solidFill>
+        <a:effectLst/>
+      </p:bgPr>
+    </p:bg>
+    <p:spTree>
+      <p:nvGrpSpPr>
+        <p:cNvPr id="1" name=""/>
+        <p:cNvGrpSpPr/>
+        <p:nvPr/>
+      </p:nvGrpSpPr>
+      <p:grpSpPr/>
+      <p:sp>
+        <p:nvSpPr>
+          <p:cNvPr id="2" name="TextBox 1"/>
+          <p:cNvSpPr txBox="1"/>
+          <p:nvPr/>
+        </p:nvSpPr>
+        <p:spPr>
+          <a:xfrm>
+            <a:off x="292608" y="91440"/>
+            <a:ext cx="9464040" cy="603504"/>
+          </a:xfrm>
+          <a:prstGeom prst="rect">
+            <a:avLst/>
+          </a:prstGeom>
+          <a:noFill/>
+        </p:spPr>
+        <p:txBody>
+          <a:bodyPr wrap="square" anchor="t" lIns="19050" rIns="19050" tIns="6350" bIns="6350">
+            <a:spAutoFit/>
+          </a:bodyPr>
+          <a:lstStyle/>
+          <a:p>
+            <a:pPr algn="l">
+              <a:lnSpc>
+                <a:spcPct val="108000"/>
+              </a:lnSpc>
+              <a:spcAft>
+                <a:spcPts val="100"/>
+              </a:spcAft>
+            </a:pPr>
+            <a:r>
+              <a:rPr sz="1450" b="0">
+                <a:solidFill>
+                  <a:srgbClr val="123F63"/>
+                </a:solidFill>
+                <a:latin typeface="Segoe UI"/>
+              </a:rPr>
+              <a:t>Calibrated to Jindal's audited disclosures, the model maps a practical path from </a:t>
+            </a:r>
+            <a:r>
+              <a:rPr sz="1450" b="1">
+                <a:solidFill>
+                  <a:srgbClr val="123F63"/>
+                </a:solidFill>
+                <a:latin typeface="Segoe UI"/>
+              </a:rPr>
+              <a:t>1.76 to 1.35–1.45 tCO₂e/t</a:t>
+            </a:r>
+            <a:r>
+              <a:rPr sz="1450" b="0">
+                <a:solidFill>
+                  <a:srgbClr val="123F63"/>
+                </a:solidFill>
+                <a:latin typeface="Segoe UI"/>
+              </a:rPr>
+              <a:t> —</a:t>
+            </a:r>
+          </a:p>
+          <a:p>
+            <a:pPr algn="l">
+              <a:lnSpc>
+                <a:spcPct val="108000"/>
+              </a:lnSpc>
+              <a:spcAft>
+                <a:spcPts val="100"/>
+              </a:spcAft>
+            </a:pPr>
+            <a:r>
+              <a:rPr sz="1450" b="0">
+                <a:solidFill>
+                  <a:srgbClr val="123F63"/>
+                </a:solidFill>
+                <a:latin typeface="Segoe UI"/>
+              </a:rPr>
+              <a:t>and verified data protects </a:t>
+            </a:r>
+            <a:r>
+              <a:rPr sz="1450" b="1">
+                <a:solidFill>
+                  <a:srgbClr val="123F63"/>
+                </a:solidFill>
+                <a:latin typeface="Segoe UI"/>
+              </a:rPr>
+              <a:t>₹200–290 crore a year</a:t>
+            </a:r>
+            <a:r>
+              <a:rPr sz="1450" b="0">
+                <a:solidFill>
+                  <a:srgbClr val="123F63"/>
+                </a:solidFill>
+                <a:latin typeface="Segoe UI"/>
+              </a:rPr>
+              <a:t> of CBAM exposure by 2030</a:t>
+            </a:r>
+          </a:p>
+        </p:txBody>
+      </p:sp>
+      <p:sp>
+        <p:nvSpPr>
+          <p:cNvPr id="3" name="TextBox 2"/>
+          <p:cNvSpPr txBox="1"/>
+          <p:nvPr/>
+        </p:nvSpPr>
+        <p:spPr>
+          <a:xfrm>
+            <a:off x="9646920" y="146304"/>
+            <a:ext cx="2267712" cy="548640"/>
+          </a:xfrm>
+          <a:prstGeom prst="rect">
+            <a:avLst/>
+          </a:prstGeom>
+          <a:noFill/>
+        </p:spPr>
+        <p:txBody>
+          <a:bodyPr wrap="square" anchor="t" lIns="19050" rIns="19050" tIns="6350" bIns="6350">
+            <a:spAutoFit/>
+          </a:bodyPr>
+          <a:lstStyle/>
+          <a:p>
+            <a:pPr algn="r">
+              <a:lnSpc>
+                <a:spcPct val="100000"/>
+              </a:lnSpc>
+              <a:spcAft>
+                <a:spcPts val="150"/>
+              </a:spcAft>
+            </a:pPr>
+            <a:r>
+              <a:rPr sz="750" b="0">
+                <a:solidFill>
+                  <a:srgbClr val="8A94A0"/>
+                </a:solidFill>
+                <a:latin typeface="Segoe UI"/>
+              </a:rPr>
+              <a:t>Round 1 · Executive summary</a:t>
+            </a:r>
+          </a:p>
+          <a:p>
+            <a:pPr algn="r">
+              <a:lnSpc>
+                <a:spcPct val="100000"/>
+              </a:lnSpc>
+              <a:spcAft>
+                <a:spcPts val="150"/>
+              </a:spcAft>
+            </a:pPr>
+            <a:r>
+              <a:rPr sz="750" b="0">
+                <a:solidFill>
+                  <a:srgbClr val="8A94A0"/>
+                </a:solidFill>
+                <a:latin typeface="Segoe UI"/>
+              </a:rPr>
+              <a:t>Validation · financials · recommendations</a:t>
+            </a:r>
+          </a:p>
+        </p:txBody>
+      </p:sp>
+      <p:sp>
+        <p:nvSpPr>
+          <p:cNvPr id="4" name="Rectangle 3"/>
+          <p:cNvSpPr/>
+          <p:nvPr/>
+        </p:nvSpPr>
+        <p:spPr>
+          <a:xfrm>
+            <a:off x="292608" y="731520"/>
+            <a:ext cx="11606479" cy="27940"/>
+          </a:xfrm>
+          <a:prstGeom prst="rect">
+            <a:avLst/>
+          </a:prstGeom>
+          <a:solidFill>
+            <a:srgbClr val="123F63"/>
+          </a:solidFill>
+          <a:ln>
+            <a:noFill/>
+          </a:ln>
+          <a:effectLst/>
+        </p:spPr>
+        <p:style>
+          <a:lnRef idx="1">
+            <a:schemeClr val="accent1"/>
+          </a:lnRef>
+          <a:fillRef idx="3">
+            <a:schemeClr val="accent1"/>
+          </a:fillRef>
+          <a:effectRef idx="2">
+            <a:schemeClr val="accent1"/>
+          </a:effectRef>
+          <a:fontRef idx="minor">
+            <a:schemeClr val="lt1"/>
+          </a:fontRef>
+        </p:style>
+        <p:txBody>
+          <a:bodyPr rtlCol="0" anchor="ctr"/>
+          <a:lstStyle/>
+          <a:p>
+            <a:pPr algn="ctr"/>
+          </a:p>
+        </p:txBody>
+      </p:sp>
+      <p:sp>
+        <p:nvSpPr>
+          <p:cNvPr id="5" name="TextBox 4"/>
+          <p:cNvSpPr txBox="1"/>
+          <p:nvPr/>
+        </p:nvSpPr>
+        <p:spPr>
+          <a:xfrm>
+            <a:off x="292608" y="859536"/>
+            <a:ext cx="5989320" cy="182880"/>
+          </a:xfrm>
+          <a:prstGeom prst="rect">
+            <a:avLst/>
+          </a:prstGeom>
+          <a:noFill/>
+        </p:spPr>
+        <p:txBody>
+          <a:bodyPr wrap="square" anchor="t" lIns="19050" rIns="19050" tIns="6350" bIns="6350">
+            <a:spAutoFit/>
+          </a:bodyPr>
+          <a:lstStyle/>
+          <a:p>
+            <a:pPr algn="l">
+              <a:lnSpc>
+                <a:spcPct val="100000"/>
+              </a:lnSpc>
+              <a:spcAft>
+                <a:spcPts val="0"/>
+              </a:spcAft>
+            </a:pPr>
+            <a:r>
+              <a:rPr sz="900" b="1">
+                <a:solidFill>
+                  <a:srgbClr val="1B6DB0"/>
+                </a:solidFill>
+                <a:latin typeface="Segoe UI"/>
+              </a:rPr>
+              <a:t>THE MODEL, RUN ON JINDAL'S DISCLOSED REALITY</a:t>
+            </a:r>
+          </a:p>
+        </p:txBody>
+      </p:sp>
+      <p:sp>
+        <p:nvSpPr>
+          <p:cNvPr id="6" name="Rectangle 5"/>
+          <p:cNvSpPr/>
+          <p:nvPr/>
+        </p:nvSpPr>
+        <p:spPr>
+          <a:xfrm>
+            <a:off x="292608" y="1051560"/>
+            <a:ext cx="5989320" cy="10160"/>
+          </a:xfrm>
+          <a:prstGeom prst="rect">
+            <a:avLst/>
+          </a:prstGeom>
+          <a:solidFill>
+            <a:srgbClr val="E2E8EF"/>
+          </a:solidFill>
+          <a:ln>
+            <a:noFill/>
+          </a:ln>
+          <a:effectLst/>
+        </p:spPr>
+        <p:style>
+          <a:lnRef idx="1">
+            <a:schemeClr val="accent1"/>
+          </a:lnRef>
+          <a:fillRef idx="3">
+            <a:schemeClr val="accent1"/>
+          </a:fillRef>
+          <a:effectRef idx="2">
+            <a:schemeClr val="accent1"/>
+          </a:effectRef>
+          <a:fontRef idx="minor">
+            <a:schemeClr val="lt1"/>
+          </a:fontRef>
+        </p:style>
+        <p:txBody>
+          <a:bodyPr rtlCol="0" anchor="ctr"/>
+          <a:lstStyle/>
+          <a:p>
+            <a:pPr algn="ctr"/>
+          </a:p>
+        </p:txBody>
+      </p:sp>
+      <p:graphicFrame>
+        <p:nvGraphicFramePr>
+          <p:cNvPr id="7" name="Table 6"/>
+          <p:cNvGraphicFramePr>
+            <a:graphicFrameLocks noGrp="1"/>
+          </p:cNvGraphicFramePr>
+          <p:nvPr/>
+        </p:nvGraphicFramePr>
+        <p:xfrm>
+          <a:off x="292608" y="1133856"/>
+          <a:ext cx="5989320" cy="1792224"/>
+        </p:xfrm>
+        <a:graphic>
+          <a:graphicData uri="http://schemas.openxmlformats.org/drawingml/2006/table">
+            <a:tbl>
+              <a:tblPr firstRow="1" bandRow="1">
+                <a:tableStyleId>{5C22544A-7EE6-4342-B048-85BDC9FD1C3A}</a:tableStyleId>
+              </a:tblPr>
+              <a:tblGrid>
+                <a:gridCol w="1783080"/>
+                <a:gridCol w="914400"/>
+                <a:gridCol w="960120"/>
+                <a:gridCol w="1280160"/>
+                <a:gridCol w="1051560"/>
+              </a:tblGrid>
+              <a:tr h="256032">
+                <a:tc>
+                  <a:txBody>
+                    <a:bodyPr wrap="square" lIns="50800" rIns="50800" tIns="12700" bIns="12700" anchor="ctr"/>
+                    <a:lstStyle/>
+                    <a:p>
+                      <a:pPr algn="l"/>
+                      <a:r>
+                        <a:rPr sz="800" b="1">
+                          <a:solidFill>
+                            <a:srgbClr val="5B6570"/>
+                          </a:solidFill>
+                          <a:latin typeface="Segoe UI"/>
+                        </a:rPr>
+                        <a:t>Lever / result</a:t>
+                      </a:r>
+                    </a:p>
+                  </a:txBody>
+                  <a:tcPr>
+                    <a:solidFill>
+                      <a:srgbClr val="EEF2F6"/>
+                    </a:solidFill>
+                  </a:tcPr>
+                </a:tc>
+                <a:tc>
+                  <a:txBody>
+                    <a:bodyPr wrap="square" lIns="50800" rIns="50800" tIns="12700" bIns="12700" anchor="ctr"/>
+                    <a:lstStyle/>
+                    <a:p>
+                      <a:pPr algn="ctr"/>
+                      <a:r>
+                        <a:rPr sz="800" b="1">
+                          <a:solidFill>
+                            <a:srgbClr val="5B6570"/>
+                          </a:solidFill>
+                          <a:latin typeface="Segoe UI"/>
+                        </a:rPr>
+                        <a:t>FY24 (peak)</a:t>
+                      </a:r>
+                    </a:p>
+                  </a:txBody>
+                  <a:tcPr>
+                    <a:solidFill>
+                      <a:srgbClr val="EEF2F6"/>
+                    </a:solidFill>
+                  </a:tcPr>
+                </a:tc>
+                <a:tc>
+                  <a:txBody>
+                    <a:bodyPr wrap="square" lIns="50800" rIns="50800" tIns="12700" bIns="12700" anchor="ctr"/>
+                    <a:lstStyle/>
+                    <a:p>
+                      <a:pPr algn="ctr"/>
+                      <a:r>
+                        <a:rPr sz="800" b="1">
+                          <a:solidFill>
+                            <a:srgbClr val="5B6570"/>
+                          </a:solidFill>
+                          <a:latin typeface="Segoe UI"/>
+                        </a:rPr>
+                        <a:t>FY26 (actual)</a:t>
+                      </a:r>
+                    </a:p>
+                  </a:txBody>
+                  <a:tcPr>
+                    <a:solidFill>
+                      <a:srgbClr val="EEF2F6"/>
+                    </a:solidFill>
+                  </a:tcPr>
+                </a:tc>
+                <a:tc>
+                  <a:txBody>
+                    <a:bodyPr wrap="square" lIns="50800" rIns="50800" tIns="12700" bIns="12700" anchor="ctr"/>
+                    <a:lstStyle/>
+                    <a:p>
+                      <a:pPr algn="ctr"/>
+                      <a:r>
+                        <a:rPr sz="800" b="1">
+                          <a:solidFill>
+                            <a:srgbClr val="5B6570"/>
+                          </a:solidFill>
+                          <a:latin typeface="Segoe UI"/>
+                        </a:rPr>
+                        <a:t>FY28–30 (modelled)</a:t>
+                      </a:r>
+                    </a:p>
+                  </a:txBody>
+                  <a:tcPr>
+                    <a:solidFill>
+                      <a:srgbClr val="EEF2F6"/>
+                    </a:solidFill>
+                  </a:tcPr>
+                </a:tc>
+                <a:tc>
+                  <a:txBody>
+                    <a:bodyPr wrap="square" lIns="50800" rIns="50800" tIns="12700" bIns="12700" anchor="ctr"/>
+                    <a:lstStyle/>
+                    <a:p>
+                      <a:pPr algn="l"/>
+                      <a:r>
+                        <a:rPr sz="720" b="1">
+                          <a:solidFill>
+                            <a:srgbClr val="5B6570"/>
+                          </a:solidFill>
+                          <a:latin typeface="Segoe UI"/>
+                        </a:rPr>
+                        <a:t>Source</a:t>
+                      </a:r>
+                    </a:p>
+                  </a:txBody>
+                  <a:tcPr>
+                    <a:solidFill>
+                      <a:srgbClr val="EEF2F6"/>
+                    </a:solidFill>
+                  </a:tcPr>
+                </a:tc>
+              </a:tr>
+              <a:tr h="256032">
+                <a:tc>
+                  <a:txBody>
+                    <a:bodyPr wrap="square" lIns="50800" rIns="50800" tIns="12700" bIns="12700" anchor="ctr"/>
+                    <a:lstStyle/>
+                    <a:p>
+                      <a:pPr algn="l"/>
+                      <a:r>
+                        <a:rPr sz="800" b="0">
+                          <a:solidFill>
+                            <a:srgbClr val="1F2937"/>
+                          </a:solidFill>
+                          <a:latin typeface="Segoe UI"/>
+                        </a:rPr>
+                        <a:t>Scrap charge</a:t>
+                      </a:r>
+                    </a:p>
+                  </a:txBody>
+                  <a:tcPr>
+                    <a:solidFill>
+                      <a:srgbClr val="FFFFFF"/>
+                    </a:solidFill>
+                  </a:tcPr>
+                </a:tc>
+                <a:tc>
+                  <a:txBody>
+                    <a:bodyPr wrap="square" lIns="50800" rIns="50800" tIns="12700" bIns="12700" anchor="ctr"/>
+                    <a:lstStyle/>
+                    <a:p>
+                      <a:pPr algn="ctr"/>
+                      <a:r>
+                        <a:rPr sz="800" b="0">
+                          <a:solidFill>
+                            <a:srgbClr val="1F2937"/>
+                          </a:solidFill>
+                          <a:latin typeface="Segoe UI"/>
+                        </a:rPr>
+                        <a:t>~60%</a:t>
+                      </a:r>
+                    </a:p>
+                  </a:txBody>
+                  <a:tcPr>
+                    <a:solidFill>
+                      <a:srgbClr val="FFFFFF"/>
+                    </a:solidFill>
+                  </a:tcPr>
+                </a:tc>
+                <a:tc>
+                  <a:txBody>
+                    <a:bodyPr wrap="square" lIns="50800" rIns="50800" tIns="12700" bIns="12700" anchor="ctr"/>
+                    <a:lstStyle/>
+                    <a:p>
+                      <a:pPr algn="ctr"/>
+                      <a:r>
+                        <a:rPr sz="800" b="0">
+                          <a:solidFill>
+                            <a:srgbClr val="1F2937"/>
+                          </a:solidFill>
+                          <a:latin typeface="Segoe UI"/>
+                        </a:rPr>
+                        <a:t>70.1%</a:t>
+                      </a:r>
+                    </a:p>
+                  </a:txBody>
+                  <a:tcPr>
+                    <a:solidFill>
+                      <a:srgbClr val="FFFFFF"/>
+                    </a:solidFill>
+                  </a:tcPr>
+                </a:tc>
+                <a:tc>
+                  <a:txBody>
+                    <a:bodyPr wrap="square" lIns="50800" rIns="50800" tIns="12700" bIns="12700" anchor="ctr"/>
+                    <a:lstStyle/>
+                    <a:p>
+                      <a:pPr algn="ctr"/>
+                      <a:r>
+                        <a:rPr sz="800" b="0">
+                          <a:solidFill>
+                            <a:srgbClr val="1F2937"/>
+                          </a:solidFill>
+                          <a:latin typeface="Segoe UI"/>
+                        </a:rPr>
+                        <a:t>78% (cap 80%)</a:t>
+                      </a:r>
+                    </a:p>
+                  </a:txBody>
+                  <a:tcPr>
+                    <a:solidFill>
+                      <a:srgbClr val="FFFFFF"/>
+                    </a:solidFill>
+                  </a:tcPr>
+                </a:tc>
+                <a:tc>
+                  <a:txBody>
+                    <a:bodyPr wrap="square" lIns="50800" rIns="50800" tIns="12700" bIns="12700" anchor="ctr"/>
+                    <a:lstStyle/>
+                    <a:p>
+                      <a:pPr algn="l"/>
+                      <a:r>
+                        <a:rPr sz="720" b="0">
+                          <a:solidFill>
+                            <a:srgbClr val="8A94A0"/>
+                          </a:solidFill>
+                          <a:latin typeface="Segoe UI"/>
+                        </a:rPr>
+                        <a:t>BRSR FY26</a:t>
+                      </a:r>
+                    </a:p>
+                  </a:txBody>
+                  <a:tcPr>
+                    <a:solidFill>
+                      <a:srgbClr val="FFFFFF"/>
+                    </a:solidFill>
+                  </a:tcPr>
+                </a:tc>
+              </a:tr>
+              <a:tr h="256032">
+                <a:tc>
+                  <a:txBody>
+                    <a:bodyPr wrap="square" lIns="50800" rIns="50800" tIns="12700" bIns="12700" anchor="ctr"/>
+                    <a:lstStyle/>
+                    <a:p>
+                      <a:pPr algn="l"/>
+                      <a:r>
+                        <a:rPr sz="800" b="0">
+                          <a:solidFill>
+                            <a:srgbClr val="1F2937"/>
+                          </a:solidFill>
+                          <a:latin typeface="Segoe UI"/>
+                        </a:rPr>
+                        <a:t>Renewable electricity</a:t>
+                      </a:r>
+                    </a:p>
+                  </a:txBody>
+                  <a:tcPr>
+                    <a:solidFill>
+                      <a:srgbClr val="FFFFFF"/>
+                    </a:solidFill>
+                  </a:tcPr>
+                </a:tc>
+                <a:tc>
+                  <a:txBody>
+                    <a:bodyPr wrap="square" lIns="50800" rIns="50800" tIns="12700" bIns="12700" anchor="ctr"/>
+                    <a:lstStyle/>
+                    <a:p>
+                      <a:pPr algn="ctr"/>
+                      <a:r>
+                        <a:rPr sz="800" b="0">
+                          <a:solidFill>
+                            <a:srgbClr val="1F2937"/>
+                          </a:solidFill>
+                          <a:latin typeface="Segoe UI"/>
+                        </a:rPr>
+                        <a:t>~30%</a:t>
+                      </a:r>
+                    </a:p>
+                  </a:txBody>
+                  <a:tcPr>
+                    <a:solidFill>
+                      <a:srgbClr val="FFFFFF"/>
+                    </a:solidFill>
+                  </a:tcPr>
+                </a:tc>
+                <a:tc>
+                  <a:txBody>
+                    <a:bodyPr wrap="square" lIns="50800" rIns="50800" tIns="12700" bIns="12700" anchor="ctr"/>
+                    <a:lstStyle/>
+                    <a:p>
+                      <a:pPr algn="ctr"/>
+                      <a:r>
+                        <a:rPr sz="800" b="0">
+                          <a:solidFill>
+                            <a:srgbClr val="1F2937"/>
+                          </a:solidFill>
+                          <a:latin typeface="Segoe UI"/>
+                        </a:rPr>
+                        <a:t>47%</a:t>
+                      </a:r>
+                    </a:p>
+                  </a:txBody>
+                  <a:tcPr>
+                    <a:solidFill>
+                      <a:srgbClr val="FFFFFF"/>
+                    </a:solidFill>
+                  </a:tcPr>
+                </a:tc>
+                <a:tc>
+                  <a:txBody>
+                    <a:bodyPr wrap="square" lIns="50800" rIns="50800" tIns="12700" bIns="12700" anchor="ctr"/>
+                    <a:lstStyle/>
+                    <a:p>
+                      <a:pPr algn="ctr"/>
+                      <a:r>
+                        <a:rPr sz="800" b="0">
+                          <a:solidFill>
+                            <a:srgbClr val="1F2937"/>
+                          </a:solidFill>
+                          <a:latin typeface="Segoe UI"/>
+                        </a:rPr>
+                        <a:t>65%</a:t>
+                      </a:r>
+                    </a:p>
+                  </a:txBody>
+                  <a:tcPr>
+                    <a:solidFill>
+                      <a:srgbClr val="FFFFFF"/>
+                    </a:solidFill>
+                  </a:tcPr>
+                </a:tc>
+                <a:tc>
+                  <a:txBody>
+                    <a:bodyPr wrap="square" lIns="50800" rIns="50800" tIns="12700" bIns="12700" anchor="ctr"/>
+                    <a:lstStyle/>
+                    <a:p>
+                      <a:pPr algn="l"/>
+                      <a:r>
+                        <a:rPr sz="720" b="0">
+                          <a:solidFill>
+                            <a:srgbClr val="8A94A0"/>
+                          </a:solidFill>
+                          <a:latin typeface="Segoe UI"/>
+                        </a:rPr>
+                        <a:t>ESG Factsheet</a:t>
+                      </a:r>
+                    </a:p>
+                  </a:txBody>
+                  <a:tcPr>
+                    <a:solidFill>
+                      <a:srgbClr val="FFFFFF"/>
+                    </a:solidFill>
+                  </a:tcPr>
+                </a:tc>
+              </a:tr>
+              <a:tr h="256032">
+                <a:tc>
+                  <a:txBody>
+                    <a:bodyPr wrap="square" lIns="50800" rIns="50800" tIns="12700" bIns="12700" anchor="ctr"/>
+                    <a:lstStyle/>
+                    <a:p>
+                      <a:pPr algn="l"/>
+                      <a:r>
+                        <a:rPr sz="800" b="0">
+                          <a:solidFill>
+                            <a:srgbClr val="1F2937"/>
+                          </a:solidFill>
+                          <a:latin typeface="Segoe UI"/>
+                        </a:rPr>
+                        <a:t>Green H₂ / Bio-LDO</a:t>
+                      </a:r>
+                    </a:p>
+                  </a:txBody>
+                  <a:tcPr>
+                    <a:solidFill>
+                      <a:srgbClr val="FFFFFF"/>
+                    </a:solidFill>
+                  </a:tcPr>
+                </a:tc>
+                <a:tc>
+                  <a:txBody>
+                    <a:bodyPr wrap="square" lIns="50800" rIns="50800" tIns="12700" bIns="12700" anchor="ctr"/>
+                    <a:lstStyle/>
+                    <a:p>
+                      <a:pPr algn="ctr"/>
+                      <a:r>
+                        <a:rPr sz="800" b="0">
+                          <a:solidFill>
+                            <a:srgbClr val="1F2937"/>
+                          </a:solidFill>
+                          <a:latin typeface="Segoe UI"/>
+                        </a:rPr>
+                        <a:t>–</a:t>
+                      </a:r>
+                    </a:p>
+                  </a:txBody>
+                  <a:tcPr>
+                    <a:solidFill>
+                      <a:srgbClr val="FFFFFF"/>
+                    </a:solidFill>
+                  </a:tcPr>
+                </a:tc>
+                <a:tc>
+                  <a:txBody>
+                    <a:bodyPr wrap="square" lIns="50800" rIns="50800" tIns="12700" bIns="12700" anchor="ctr"/>
+                    <a:lstStyle/>
+                    <a:p>
+                      <a:pPr algn="ctr"/>
+                      <a:r>
+                        <a:rPr sz="800" b="0">
+                          <a:solidFill>
+                            <a:srgbClr val="1F2937"/>
+                          </a:solidFill>
+                          <a:latin typeface="Segoe UI"/>
+                        </a:rPr>
+                        <a:t>pilot (Hisar)</a:t>
+                      </a:r>
+                    </a:p>
+                  </a:txBody>
+                  <a:tcPr>
+                    <a:solidFill>
+                      <a:srgbClr val="FFFFFF"/>
+                    </a:solidFill>
+                  </a:tcPr>
+                </a:tc>
+                <a:tc>
+                  <a:txBody>
+                    <a:bodyPr wrap="square" lIns="50800" rIns="50800" tIns="12700" bIns="12700" anchor="ctr"/>
+                    <a:lstStyle/>
+                    <a:p>
+                      <a:pPr algn="ctr"/>
+                      <a:r>
+                        <a:rPr sz="800" b="0">
+                          <a:solidFill>
+                            <a:srgbClr val="1F2937"/>
+                          </a:solidFill>
+                          <a:latin typeface="Segoe UI"/>
+                        </a:rPr>
+                        <a:t>scaled (Jajpur)</a:t>
+                      </a:r>
+                    </a:p>
+                  </a:txBody>
+                  <a:tcPr>
+                    <a:solidFill>
+                      <a:srgbClr val="FFFFFF"/>
+                    </a:solidFill>
+                  </a:tcPr>
+                </a:tc>
+                <a:tc>
+                  <a:txBody>
+                    <a:bodyPr wrap="square" lIns="50800" rIns="50800" tIns="12700" bIns="12700" anchor="ctr"/>
+                    <a:lstStyle/>
+                    <a:p>
+                      <a:pPr algn="l"/>
+                      <a:r>
+                        <a:rPr sz="720" b="0">
+                          <a:solidFill>
+                            <a:srgbClr val="8A94A0"/>
+                          </a:solidFill>
+                          <a:latin typeface="Segoe UI"/>
+                        </a:rPr>
+                        <a:t>company disclosures</a:t>
+                      </a:r>
+                    </a:p>
+                  </a:txBody>
+                  <a:tcPr>
+                    <a:solidFill>
+                      <a:srgbClr val="FFFFFF"/>
+                    </a:solidFill>
+                  </a:tcPr>
+                </a:tc>
+              </a:tr>
+              <a:tr h="256032">
+                <a:tc>
+                  <a:txBody>
+                    <a:bodyPr wrap="square" lIns="50800" rIns="50800" tIns="12700" bIns="12700" anchor="ctr"/>
+                    <a:lstStyle/>
+                    <a:p>
+                      <a:pPr algn="l"/>
+                      <a:r>
+                        <a:rPr sz="800" b="1">
+                          <a:solidFill>
+                            <a:srgbClr val="1F2937"/>
+                          </a:solidFill>
+                          <a:latin typeface="Segoe UI"/>
+                        </a:rPr>
+                        <a:t>Scope 1+2 intensity (tCO₂e/t)</a:t>
+                      </a:r>
+                    </a:p>
+                  </a:txBody>
+                  <a:tcPr>
+                    <a:solidFill>
+                      <a:srgbClr val="FFFFFF"/>
+                    </a:solidFill>
+                  </a:tcPr>
+                </a:tc>
+                <a:tc>
+                  <a:txBody>
+                    <a:bodyPr wrap="square" lIns="50800" rIns="50800" tIns="12700" bIns="12700" anchor="ctr"/>
+                    <a:lstStyle/>
+                    <a:p>
+                      <a:pPr algn="ctr"/>
+                      <a:r>
+                        <a:rPr sz="800" b="1">
+                          <a:solidFill>
+                            <a:srgbClr val="1F2937"/>
+                          </a:solidFill>
+                          <a:latin typeface="Segoe UI"/>
+                        </a:rPr>
+                        <a:t>2.15</a:t>
+                      </a:r>
+                    </a:p>
+                  </a:txBody>
+                  <a:tcPr>
+                    <a:solidFill>
+                      <a:srgbClr val="FFFFFF"/>
+                    </a:solidFill>
+                  </a:tcPr>
+                </a:tc>
+                <a:tc>
+                  <a:txBody>
+                    <a:bodyPr wrap="square" lIns="50800" rIns="50800" tIns="12700" bIns="12700" anchor="ctr"/>
+                    <a:lstStyle/>
+                    <a:p>
+                      <a:pPr algn="ctr"/>
+                      <a:r>
+                        <a:rPr sz="800" b="1">
+                          <a:solidFill>
+                            <a:srgbClr val="1B6DB0"/>
+                          </a:solidFill>
+                          <a:latin typeface="Segoe UI"/>
+                        </a:rPr>
+                        <a:t>1.76</a:t>
+                      </a:r>
+                    </a:p>
+                  </a:txBody>
+                  <a:tcPr>
+                    <a:solidFill>
+                      <a:srgbClr val="FFFFFF"/>
+                    </a:solidFill>
+                  </a:tcPr>
+                </a:tc>
+                <a:tc>
+                  <a:txBody>
+                    <a:bodyPr wrap="square" lIns="50800" rIns="50800" tIns="12700" bIns="12700" anchor="ctr"/>
+                    <a:lstStyle/>
+                    <a:p>
+                      <a:pPr algn="ctr"/>
+                      <a:r>
+                        <a:rPr sz="800" b="1">
+                          <a:solidFill>
+                            <a:srgbClr val="A8720E"/>
+                          </a:solidFill>
+                          <a:latin typeface="Segoe UI"/>
+                        </a:rPr>
+                        <a:t>1.35–1.45</a:t>
+                      </a:r>
+                    </a:p>
+                  </a:txBody>
+                  <a:tcPr>
+                    <a:solidFill>
+                      <a:srgbClr val="FFFFFF"/>
+                    </a:solidFill>
+                  </a:tcPr>
+                </a:tc>
+                <a:tc>
+                  <a:txBody>
+                    <a:bodyPr wrap="square" lIns="50800" rIns="50800" tIns="12700" bIns="12700" anchor="ctr"/>
+                    <a:lstStyle/>
+                    <a:p>
+                      <a:pPr algn="l"/>
+                      <a:r>
+                        <a:rPr sz="720" b="0">
+                          <a:solidFill>
+                            <a:srgbClr val="8A94A0"/>
+                          </a:solidFill>
+                          <a:latin typeface="Segoe UI"/>
+                        </a:rPr>
+                        <a:t>ESG Factsheet / CDP</a:t>
+                      </a:r>
+                    </a:p>
+                  </a:txBody>
+                  <a:tcPr>
+                    <a:solidFill>
+                      <a:srgbClr val="FFFFFF"/>
+                    </a:solidFill>
+                  </a:tcPr>
+                </a:tc>
+              </a:tr>
+              <a:tr h="256032">
+                <a:tc>
+                  <a:txBody>
+                    <a:bodyPr wrap="square" lIns="50800" rIns="50800" tIns="12700" bIns="12700" anchor="ctr"/>
+                    <a:lstStyle/>
+                    <a:p>
+                      <a:pPr algn="l"/>
+                      <a:r>
+                        <a:rPr sz="800" b="1">
+                          <a:solidFill>
+                            <a:srgbClr val="1F2937"/>
+                          </a:solidFill>
+                          <a:latin typeface="Segoe UI"/>
+                        </a:rPr>
+                        <a:t>Scope 3 intensity</a:t>
+                      </a:r>
+                    </a:p>
+                  </a:txBody>
+                  <a:tcPr>
+                    <a:solidFill>
+                      <a:srgbClr val="FFFFFF"/>
+                    </a:solidFill>
+                  </a:tcPr>
+                </a:tc>
+                <a:tc>
+                  <a:txBody>
+                    <a:bodyPr wrap="square" lIns="50800" rIns="50800" tIns="12700" bIns="12700" anchor="ctr"/>
+                    <a:lstStyle/>
+                    <a:p>
+                      <a:pPr algn="ctr"/>
+                      <a:r>
+                        <a:rPr sz="800" b="1">
+                          <a:solidFill>
+                            <a:srgbClr val="1F2937"/>
+                          </a:solidFill>
+                          <a:latin typeface="Segoe UI"/>
+                        </a:rPr>
+                        <a:t>1.90</a:t>
+                      </a:r>
+                    </a:p>
+                  </a:txBody>
+                  <a:tcPr>
+                    <a:solidFill>
+                      <a:srgbClr val="FFFFFF"/>
+                    </a:solidFill>
+                  </a:tcPr>
+                </a:tc>
+                <a:tc>
+                  <a:txBody>
+                    <a:bodyPr wrap="square" lIns="50800" rIns="50800" tIns="12700" bIns="12700" anchor="ctr"/>
+                    <a:lstStyle/>
+                    <a:p>
+                      <a:pPr algn="ctr"/>
+                      <a:r>
+                        <a:rPr sz="800" b="1">
+                          <a:solidFill>
+                            <a:srgbClr val="1B6DB0"/>
+                          </a:solidFill>
+                          <a:latin typeface="Segoe UI"/>
+                        </a:rPr>
+                        <a:t>1.27</a:t>
+                      </a:r>
+                    </a:p>
+                  </a:txBody>
+                  <a:tcPr>
+                    <a:solidFill>
+                      <a:srgbClr val="FFFFFF"/>
+                    </a:solidFill>
+                  </a:tcPr>
+                </a:tc>
+                <a:tc>
+                  <a:txBody>
+                    <a:bodyPr wrap="square" lIns="50800" rIns="50800" tIns="12700" bIns="12700" anchor="ctr"/>
+                    <a:lstStyle/>
+                    <a:p>
+                      <a:pPr algn="ctr"/>
+                      <a:r>
+                        <a:rPr sz="800" b="1">
+                          <a:solidFill>
+                            <a:srgbClr val="A8720E"/>
+                          </a:solidFill>
+                          <a:latin typeface="Segoe UI"/>
+                        </a:rPr>
+                        <a:t>0.95–1.05</a:t>
+                      </a:r>
+                    </a:p>
+                  </a:txBody>
+                  <a:tcPr>
+                    <a:solidFill>
+                      <a:srgbClr val="FFFFFF"/>
+                    </a:solidFill>
+                  </a:tcPr>
+                </a:tc>
+                <a:tc>
+                  <a:txBody>
+                    <a:bodyPr wrap="square" lIns="50800" rIns="50800" tIns="12700" bIns="12700" anchor="ctr"/>
+                    <a:lstStyle/>
+                    <a:p>
+                      <a:pPr algn="l"/>
+                      <a:r>
+                        <a:rPr sz="720" b="0">
+                          <a:solidFill>
+                            <a:srgbClr val="8A94A0"/>
+                          </a:solidFill>
+                          <a:latin typeface="Segoe UI"/>
+                        </a:rPr>
+                        <a:t>ESG Factsheet</a:t>
+                      </a:r>
+                    </a:p>
+                  </a:txBody>
+                  <a:tcPr>
+                    <a:solidFill>
+                      <a:srgbClr val="FFFFFF"/>
+                    </a:solidFill>
+                  </a:tcPr>
+                </a:tc>
+              </a:tr>
+              <a:tr h="256032">
+                <a:tc>
+                  <a:txBody>
+                    <a:bodyPr wrap="square" lIns="50800" rIns="50800" tIns="12700" bIns="12700" anchor="ctr"/>
+                    <a:lstStyle/>
+                    <a:p>
+                      <a:pPr algn="l"/>
+                      <a:r>
+                        <a:rPr sz="800" b="1">
+                          <a:solidFill>
+                            <a:srgbClr val="1F2937"/>
+                          </a:solidFill>
+                          <a:latin typeface="Segoe UI"/>
+                        </a:rPr>
+                        <a:t>Cradle-to-gate total</a:t>
+                      </a:r>
+                    </a:p>
+                  </a:txBody>
+                  <a:tcPr>
+                    <a:solidFill>
+                      <a:srgbClr val="FFFFFF"/>
+                    </a:solidFill>
+                  </a:tcPr>
+                </a:tc>
+                <a:tc>
+                  <a:txBody>
+                    <a:bodyPr wrap="square" lIns="50800" rIns="50800" tIns="12700" bIns="12700" anchor="ctr"/>
+                    <a:lstStyle/>
+                    <a:p>
+                      <a:pPr algn="ctr"/>
+                      <a:r>
+                        <a:rPr sz="800" b="1">
+                          <a:solidFill>
+                            <a:srgbClr val="1F2937"/>
+                          </a:solidFill>
+                          <a:latin typeface="Segoe UI"/>
+                        </a:rPr>
+                        <a:t>4.05</a:t>
+                      </a:r>
+                    </a:p>
+                  </a:txBody>
+                  <a:tcPr>
+                    <a:solidFill>
+                      <a:srgbClr val="FFFFFF"/>
+                    </a:solidFill>
+                  </a:tcPr>
+                </a:tc>
+                <a:tc>
+                  <a:txBody>
+                    <a:bodyPr wrap="square" lIns="50800" rIns="50800" tIns="12700" bIns="12700" anchor="ctr"/>
+                    <a:lstStyle/>
+                    <a:p>
+                      <a:pPr algn="ctr"/>
+                      <a:r>
+                        <a:rPr sz="800" b="1">
+                          <a:solidFill>
+                            <a:srgbClr val="1B6DB0"/>
+                          </a:solidFill>
+                          <a:latin typeface="Segoe UI"/>
+                        </a:rPr>
+                        <a:t>3.03</a:t>
+                      </a:r>
+                    </a:p>
+                  </a:txBody>
+                  <a:tcPr>
+                    <a:solidFill>
+                      <a:srgbClr val="FFFFFF"/>
+                    </a:solidFill>
+                  </a:tcPr>
+                </a:tc>
+                <a:tc>
+                  <a:txBody>
+                    <a:bodyPr wrap="square" lIns="50800" rIns="50800" tIns="12700" bIns="12700" anchor="ctr"/>
+                    <a:lstStyle/>
+                    <a:p>
+                      <a:pPr algn="ctr"/>
+                      <a:r>
+                        <a:rPr sz="800" b="1">
+                          <a:solidFill>
+                            <a:srgbClr val="A8720E"/>
+                          </a:solidFill>
+                          <a:latin typeface="Segoe UI"/>
+                        </a:rPr>
+                        <a:t>≈2.30–2.50</a:t>
+                      </a:r>
+                    </a:p>
+                  </a:txBody>
+                  <a:tcPr>
+                    <a:solidFill>
+                      <a:srgbClr val="FFFFFF"/>
+                    </a:solidFill>
+                  </a:tcPr>
+                </a:tc>
+                <a:tc>
+                  <a:txBody>
+                    <a:bodyPr wrap="square" lIns="50800" rIns="50800" tIns="12700" bIns="12700" anchor="ctr"/>
+                    <a:lstStyle/>
+                    <a:p>
+                      <a:pPr algn="l"/>
+                      <a:r>
+                        <a:rPr sz="720" b="0">
+                          <a:solidFill>
+                            <a:srgbClr val="8A94A0"/>
+                          </a:solidFill>
+                          <a:latin typeface="Segoe UI"/>
+                        </a:rPr>
+                        <a:t>derived</a:t>
+                      </a:r>
+                    </a:p>
+                  </a:txBody>
+                  <a:tcPr>
+                    <a:solidFill>
+                      <a:srgbClr val="FFFFFF"/>
+                    </a:solidFill>
+                  </a:tcPr>
+                </a:tc>
+              </a:tr>
+            </a:tbl>
+          </a:graphicData>
+        </a:graphic>
+      </p:graphicFrame>
+      <p:sp>
+        <p:nvSpPr>
+          <p:cNvPr id="8" name="TextBox 7"/>
+          <p:cNvSpPr txBox="1"/>
+          <p:nvPr/>
+        </p:nvSpPr>
+        <p:spPr>
+          <a:xfrm>
+            <a:off x="292608" y="3182112"/>
+            <a:ext cx="5989320" cy="274320"/>
+          </a:xfrm>
+          <a:prstGeom prst="rect">
+            <a:avLst/>
+          </a:prstGeom>
+          <a:noFill/>
+        </p:spPr>
+        <p:txBody>
+          <a:bodyPr wrap="square" anchor="t" lIns="19050" rIns="19050" tIns="6350" bIns="6350">
+            <a:spAutoFit/>
+          </a:bodyPr>
+          <a:lstStyle/>
+          <a:p>
+            <a:pPr algn="l">
+              <a:lnSpc>
+                <a:spcPct val="105000"/>
+              </a:lnSpc>
+              <a:spcAft>
+                <a:spcPts val="200"/>
+              </a:spcAft>
+            </a:pPr>
+            <a:r>
+              <a:rPr sz="880" b="0">
+                <a:solidFill>
+                  <a:srgbClr val="1F2937"/>
+                </a:solidFill>
+                <a:latin typeface="Segoe UI"/>
+              </a:rPr>
+              <a:t>FY24→FY26 achieved: </a:t>
+            </a:r>
+            <a:r>
+              <a:rPr sz="880" b="1">
+                <a:solidFill>
+                  <a:srgbClr val="1D7A4F"/>
+                </a:solidFill>
+                <a:latin typeface="Segoe UI"/>
+              </a:rPr>
+              <a:t>−25.2% total footprint (−18.1% Scope 1+2)</a:t>
+            </a:r>
+            <a:r>
+              <a:rPr sz="880" b="0">
+                <a:solidFill>
+                  <a:srgbClr val="1F2937"/>
+                </a:solidFill>
+                <a:latin typeface="Segoe UI"/>
+              </a:rPr>
+              <a:t>; modelled path stays on the FY35 target glide of </a:t>
+            </a:r>
+            <a:r>
+              <a:rPr sz="880" b="1">
+                <a:solidFill>
+                  <a:srgbClr val="123F63"/>
+                </a:solidFill>
+                <a:latin typeface="Segoe UI"/>
+              </a:rPr>
+              <a:t>0.99</a:t>
+            </a:r>
+            <a:r>
+              <a:rPr sz="880" b="0">
+                <a:solidFill>
+                  <a:srgbClr val="1F2937"/>
+                </a:solidFill>
+                <a:latin typeface="Segoe UI"/>
+              </a:rPr>
+              <a:t> (−50% vs FY22 baseline).</a:t>
+            </a:r>
+          </a:p>
+        </p:txBody>
+      </p:sp>
+      <p:sp>
+        <p:nvSpPr>
+          <p:cNvPr id="9" name="TextBox 8"/>
+          <p:cNvSpPr txBox="1"/>
+          <p:nvPr/>
+        </p:nvSpPr>
+        <p:spPr>
+          <a:xfrm>
+            <a:off x="292608" y="3511296"/>
+            <a:ext cx="5989320" cy="274320"/>
+          </a:xfrm>
+          <a:prstGeom prst="rect">
+            <a:avLst/>
+          </a:prstGeom>
+          <a:noFill/>
+        </p:spPr>
+        <p:txBody>
+          <a:bodyPr wrap="square" anchor="t" lIns="19050" rIns="19050" tIns="6350" bIns="6350">
+            <a:spAutoFit/>
+          </a:bodyPr>
+          <a:lstStyle/>
+          <a:p>
+            <a:pPr algn="l">
+              <a:lnSpc>
+                <a:spcPct val="100000"/>
+              </a:lnSpc>
+              <a:spcAft>
+                <a:spcPts val="200"/>
+              </a:spcAft>
+            </a:pPr>
+            <a:r>
+              <a:rPr sz="780" b="0" i="1">
+                <a:solidFill>
+                  <a:srgbClr val="8A94A0"/>
+                </a:solidFill>
+                <a:latin typeface="Segoe UI"/>
+              </a:rPr>
+              <a:t>Every modelled lever is one Jindal is already investing in (₹700 Cr solar, 300 MW hybrid, hydrogen scale-up); the tool ranks them by tCO₂ per rupee of effort.</a:t>
+            </a:r>
+          </a:p>
+        </p:txBody>
+      </p:sp>
+      <p:sp>
+        <p:nvSpPr>
+          <p:cNvPr id="10" name="TextBox 9"/>
+          <p:cNvSpPr txBox="1"/>
+          <p:nvPr/>
+        </p:nvSpPr>
+        <p:spPr>
+          <a:xfrm>
+            <a:off x="292608" y="3840480"/>
+            <a:ext cx="5989320" cy="237744"/>
+          </a:xfrm>
+          <a:prstGeom prst="rect">
+            <a:avLst/>
+          </a:prstGeom>
+          <a:noFill/>
+        </p:spPr>
+        <p:txBody>
+          <a:bodyPr wrap="square" anchor="t" lIns="19050" rIns="19050" tIns="6350" bIns="6350">
+            <a:spAutoFit/>
+          </a:bodyPr>
+          <a:lstStyle/>
+          <a:p>
+            <a:pPr algn="l">
+              <a:lnSpc>
+                <a:spcPct val="100000"/>
+              </a:lnSpc>
+              <a:spcAft>
+                <a:spcPts val="200"/>
+              </a:spcAft>
+            </a:pPr>
+            <a:r>
+              <a:rPr sz="800" b="0">
+                <a:solidFill>
+                  <a:srgbClr val="1D7A4F"/>
+                </a:solidFill>
+                <a:latin typeface="Segoe UI"/>
+              </a:rPr>
+              <a:t>▪ </a:t>
+            </a:r>
+            <a:r>
+              <a:rPr sz="840" b="1">
+                <a:solidFill>
+                  <a:srgbClr val="123F63"/>
+                </a:solidFill>
+                <a:latin typeface="Segoe UI"/>
+              </a:rPr>
+              <a:t>Validation 1 — audited anchor: </a:t>
+            </a:r>
+            <a:r>
+              <a:rPr sz="840" b="0">
+                <a:solidFill>
+                  <a:srgbClr val="1F2937"/>
+                </a:solidFill>
+                <a:latin typeface="Segoe UI"/>
+              </a:rPr>
+              <a:t>model returns 2.8–3.1 for FY26 inputs; the audited 3.03 falls inside.</a:t>
+            </a:r>
+          </a:p>
+        </p:txBody>
+      </p:sp>
+      <p:sp>
+        <p:nvSpPr>
+          <p:cNvPr id="11" name="TextBox 10"/>
+          <p:cNvSpPr txBox="1"/>
+          <p:nvPr/>
+        </p:nvSpPr>
+        <p:spPr>
+          <a:xfrm>
+            <a:off x="292608" y="4082796"/>
+            <a:ext cx="5989320" cy="237744"/>
+          </a:xfrm>
+          <a:prstGeom prst="rect">
+            <a:avLst/>
+          </a:prstGeom>
+          <a:noFill/>
+        </p:spPr>
+        <p:txBody>
+          <a:bodyPr wrap="square" anchor="t" lIns="19050" rIns="19050" tIns="6350" bIns="6350">
+            <a:spAutoFit/>
+          </a:bodyPr>
+          <a:lstStyle/>
+          <a:p>
+            <a:pPr algn="l">
+              <a:lnSpc>
+                <a:spcPct val="100000"/>
+              </a:lnSpc>
+              <a:spcAft>
+                <a:spcPts val="200"/>
+              </a:spcAft>
+            </a:pPr>
+            <a:r>
+              <a:rPr sz="800" b="0">
+                <a:solidFill>
+                  <a:srgbClr val="1D7A4F"/>
+                </a:solidFill>
+                <a:latin typeface="Segoe UI"/>
+              </a:rPr>
+              <a:t>▪ </a:t>
+            </a:r>
+            <a:r>
+              <a:rPr sz="840" b="1">
+                <a:solidFill>
+                  <a:srgbClr val="123F63"/>
+                </a:solidFill>
+                <a:latin typeface="Segoe UI"/>
+              </a:rPr>
+              <a:t>Validation 2 — industry curve: </a:t>
+            </a:r>
+            <a:r>
+              <a:rPr sz="840" b="0">
+                <a:solidFill>
+                  <a:srgbClr val="1F2937"/>
+                </a:solidFill>
+                <a:latin typeface="Segoe UI"/>
+              </a:rPr>
+              <a:t>results track the worldstainless scrap curve (85% → 1.95; 50% → 3.70; 30% → 6.80).</a:t>
+            </a:r>
+          </a:p>
+        </p:txBody>
+      </p:sp>
+      <p:sp>
+        <p:nvSpPr>
+          <p:cNvPr id="12" name="TextBox 11"/>
+          <p:cNvSpPr txBox="1"/>
+          <p:nvPr/>
+        </p:nvSpPr>
+        <p:spPr>
+          <a:xfrm>
+            <a:off x="292608" y="4325112"/>
+            <a:ext cx="5989320" cy="237744"/>
+          </a:xfrm>
+          <a:prstGeom prst="rect">
+            <a:avLst/>
+          </a:prstGeom>
+          <a:noFill/>
+        </p:spPr>
+        <p:txBody>
+          <a:bodyPr wrap="square" anchor="t" lIns="19050" rIns="19050" tIns="6350" bIns="6350">
+            <a:spAutoFit/>
+          </a:bodyPr>
+          <a:lstStyle/>
+          <a:p>
+            <a:pPr algn="l">
+              <a:lnSpc>
+                <a:spcPct val="100000"/>
+              </a:lnSpc>
+              <a:spcAft>
+                <a:spcPts val="200"/>
+              </a:spcAft>
+            </a:pPr>
+            <a:r>
+              <a:rPr sz="800" b="0">
+                <a:solidFill>
+                  <a:srgbClr val="1D7A4F"/>
+                </a:solidFill>
+                <a:latin typeface="Segoe UI"/>
+              </a:rPr>
+              <a:t>▪ </a:t>
+            </a:r>
+            <a:r>
+              <a:rPr sz="840" b="1">
+                <a:solidFill>
+                  <a:srgbClr val="123F63"/>
+                </a:solidFill>
+                <a:latin typeface="Segoe UI"/>
+              </a:rPr>
+              <a:t>Validation 3 — grade physics: </a:t>
+            </a:r>
+            <a:r>
+              <a:rPr sz="840" b="0">
+                <a:solidFill>
+                  <a:srgbClr val="1F2937"/>
+                </a:solidFill>
+                <a:latin typeface="Segoe UI"/>
+              </a:rPr>
+              <a:t>nickel-free 430 lands near half the 304 footprint, as metallurgy requires.</a:t>
+            </a:r>
+          </a:p>
+        </p:txBody>
+      </p:sp>
+      <p:sp>
+        <p:nvSpPr>
+          <p:cNvPr id="13" name="TextBox 12"/>
+          <p:cNvSpPr txBox="1"/>
+          <p:nvPr/>
+        </p:nvSpPr>
+        <p:spPr>
+          <a:xfrm>
+            <a:off x="6601968" y="859536"/>
+            <a:ext cx="5297119" cy="182880"/>
+          </a:xfrm>
+          <a:prstGeom prst="rect">
+            <a:avLst/>
+          </a:prstGeom>
+          <a:noFill/>
+        </p:spPr>
+        <p:txBody>
+          <a:bodyPr wrap="square" anchor="t" lIns="19050" rIns="19050" tIns="6350" bIns="6350">
+            <a:spAutoFit/>
+          </a:bodyPr>
+          <a:lstStyle/>
+          <a:p>
+            <a:pPr algn="l">
+              <a:lnSpc>
+                <a:spcPct val="100000"/>
+              </a:lnSpc>
+              <a:spcAft>
+                <a:spcPts val="0"/>
+              </a:spcAft>
+            </a:pPr>
+            <a:r>
+              <a:rPr sz="900" b="1">
+                <a:solidFill>
+                  <a:srgbClr val="1B6DB0"/>
+                </a:solidFill>
+                <a:latin typeface="Segoe UI"/>
+              </a:rPr>
+              <a:t>WHAT VERIFIED DATA IS WORTH AT THE EU BORDER (2030)</a:t>
+            </a:r>
+          </a:p>
+        </p:txBody>
+      </p:sp>
+      <p:sp>
+        <p:nvSpPr>
+          <p:cNvPr id="14" name="Rectangle 13"/>
+          <p:cNvSpPr/>
+          <p:nvPr/>
+        </p:nvSpPr>
+        <p:spPr>
+          <a:xfrm>
+            <a:off x="6601968" y="1051560"/>
+            <a:ext cx="5297119" cy="10160"/>
+          </a:xfrm>
+          <a:prstGeom prst="rect">
+            <a:avLst/>
+          </a:prstGeom>
+          <a:solidFill>
+            <a:srgbClr val="E2E8EF"/>
+          </a:solidFill>
+          <a:ln>
+            <a:noFill/>
+          </a:ln>
+          <a:effectLst/>
+        </p:spPr>
+        <p:style>
+          <a:lnRef idx="1">
+            <a:schemeClr val="accent1"/>
+          </a:lnRef>
+          <a:fillRef idx="3">
+            <a:schemeClr val="accent1"/>
+          </a:fillRef>
+          <a:effectRef idx="2">
+            <a:schemeClr val="accent1"/>
+          </a:effectRef>
+          <a:fontRef idx="minor">
+            <a:schemeClr val="lt1"/>
+          </a:fontRef>
+        </p:style>
+        <p:txBody>
+          <a:bodyPr rtlCol="0" anchor="ctr"/>
+          <a:lstStyle/>
+          <a:p>
+            <a:pPr algn="ctr"/>
+          </a:p>
+        </p:txBody>
+      </p:sp>
+      <p:sp>
+        <p:nvSpPr>
+          <p:cNvPr id="15" name="TextBox 14"/>
+          <p:cNvSpPr txBox="1"/>
+          <p:nvPr/>
+        </p:nvSpPr>
+        <p:spPr>
+          <a:xfrm>
+            <a:off x="6601968" y="1133856"/>
+            <a:ext cx="5297119" cy="164592"/>
+          </a:xfrm>
+          <a:prstGeom prst="rect">
+            <a:avLst/>
+          </a:prstGeom>
+          <a:noFill/>
+        </p:spPr>
+        <p:txBody>
+          <a:bodyPr wrap="square" anchor="t" lIns="19050" rIns="19050" tIns="6350" bIns="6350">
+            <a:spAutoFit/>
+          </a:bodyPr>
+          <a:lstStyle/>
+          <a:p>
+            <a:pPr algn="l">
+              <a:lnSpc>
+                <a:spcPct val="100000"/>
+              </a:lnSpc>
+              <a:spcAft>
+                <a:spcPts val="200"/>
+              </a:spcAft>
+            </a:pPr>
+            <a:r>
+              <a:rPr sz="800" b="0">
+                <a:solidFill>
+                  <a:srgbClr val="1F2937"/>
+                </a:solidFill>
+                <a:latin typeface="Segoe UI"/>
+              </a:rPr>
+              <a:t>EU default assigned to India (8.44 tCO₂/t incl. markup)</a:t>
+            </a:r>
+          </a:p>
+        </p:txBody>
+      </p:sp>
+      <p:sp>
+        <p:nvSpPr>
+          <p:cNvPr id="16" name="Rectangle 15"/>
+          <p:cNvSpPr/>
+          <p:nvPr/>
+        </p:nvSpPr>
+        <p:spPr>
+          <a:xfrm>
+            <a:off x="6601968" y="1289304"/>
+            <a:ext cx="3337560" cy="118872"/>
+          </a:xfrm>
+          <a:prstGeom prst="rect">
+            <a:avLst/>
+          </a:prstGeom>
+          <a:solidFill>
+            <a:srgbClr val="B3392F"/>
+          </a:solidFill>
+          <a:ln>
+            <a:noFill/>
+          </a:ln>
+          <a:effectLst/>
+        </p:spPr>
+        <p:style>
+          <a:lnRef idx="1">
+            <a:schemeClr val="accent1"/>
+          </a:lnRef>
+          <a:fillRef idx="3">
+            <a:schemeClr val="accent1"/>
+          </a:fillRef>
+          <a:effectRef idx="2">
+            <a:schemeClr val="accent1"/>
+          </a:effectRef>
+          <a:fontRef idx="minor">
+            <a:schemeClr val="lt1"/>
+          </a:fontRef>
+        </p:style>
+        <p:txBody>
+          <a:bodyPr rtlCol="0" anchor="ctr"/>
+          <a:lstStyle/>
+          <a:p>
+            <a:pPr algn="ctr"/>
+          </a:p>
+        </p:txBody>
+      </p:sp>
+      <p:sp>
+        <p:nvSpPr>
+          <p:cNvPr id="17" name="TextBox 16"/>
+          <p:cNvSpPr txBox="1"/>
+          <p:nvPr/>
+        </p:nvSpPr>
+        <p:spPr>
+          <a:xfrm>
+            <a:off x="9994392" y="1257300"/>
+            <a:ext cx="914400" cy="182880"/>
+          </a:xfrm>
+          <a:prstGeom prst="rect">
+            <a:avLst/>
+          </a:prstGeom>
+          <a:noFill/>
+        </p:spPr>
+        <p:txBody>
+          <a:bodyPr wrap="square" anchor="t" lIns="19050" rIns="19050" tIns="6350" bIns="6350">
+            <a:spAutoFit/>
+          </a:bodyPr>
+          <a:lstStyle/>
+          <a:p>
+            <a:pPr algn="l">
+              <a:lnSpc>
+                <a:spcPct val="100000"/>
+              </a:lnSpc>
+              <a:spcAft>
+                <a:spcPts val="200"/>
+              </a:spcAft>
+            </a:pPr>
+            <a:r>
+              <a:rPr sz="850" b="1">
+                <a:solidFill>
+                  <a:srgbClr val="B3392F"/>
+                </a:solidFill>
+                <a:latin typeface="Segoe UI"/>
+              </a:rPr>
+              <a:t>€446/t</a:t>
+            </a:r>
+          </a:p>
+        </p:txBody>
+      </p:sp>
+      <p:sp>
+        <p:nvSpPr>
+          <p:cNvPr id="18" name="TextBox 17"/>
+          <p:cNvSpPr txBox="1"/>
+          <p:nvPr/>
+        </p:nvSpPr>
+        <p:spPr>
+          <a:xfrm>
+            <a:off x="6601968" y="1504188"/>
+            <a:ext cx="5297119" cy="164592"/>
+          </a:xfrm>
+          <a:prstGeom prst="rect">
+            <a:avLst/>
+          </a:prstGeom>
+          <a:noFill/>
+        </p:spPr>
+        <p:txBody>
+          <a:bodyPr wrap="square" anchor="t" lIns="19050" rIns="19050" tIns="6350" bIns="6350">
+            <a:spAutoFit/>
+          </a:bodyPr>
+          <a:lstStyle/>
+          <a:p>
+            <a:pPr algn="l">
+              <a:lnSpc>
+                <a:spcPct val="100000"/>
+              </a:lnSpc>
+              <a:spcAft>
+                <a:spcPts val="200"/>
+              </a:spcAft>
+            </a:pPr>
+            <a:r>
+              <a:rPr sz="800" b="0">
+                <a:solidFill>
+                  <a:srgbClr val="1F2937"/>
+                </a:solidFill>
+                <a:latin typeface="Segoe UI"/>
+              </a:rPr>
+              <a:t>India BF-BOF average</a:t>
+            </a:r>
+          </a:p>
+        </p:txBody>
+      </p:sp>
+      <p:sp>
+        <p:nvSpPr>
+          <p:cNvPr id="19" name="Rectangle 18"/>
+          <p:cNvSpPr/>
+          <p:nvPr/>
+        </p:nvSpPr>
+        <p:spPr>
+          <a:xfrm>
+            <a:off x="6601968" y="1659636"/>
+            <a:ext cx="946178" cy="118872"/>
+          </a:xfrm>
+          <a:prstGeom prst="rect">
+            <a:avLst/>
+          </a:prstGeom>
+          <a:solidFill>
+            <a:srgbClr val="7B8794"/>
+          </a:solidFill>
+          <a:ln>
+            <a:noFill/>
+          </a:ln>
+          <a:effectLst/>
+        </p:spPr>
+        <p:style>
+          <a:lnRef idx="1">
+            <a:schemeClr val="accent1"/>
+          </a:lnRef>
+          <a:fillRef idx="3">
+            <a:schemeClr val="accent1"/>
+          </a:fillRef>
+          <a:effectRef idx="2">
+            <a:schemeClr val="accent1"/>
+          </a:effectRef>
+          <a:fontRef idx="minor">
+            <a:schemeClr val="lt1"/>
+          </a:fontRef>
+        </p:style>
+        <p:txBody>
+          <a:bodyPr rtlCol="0" anchor="ctr"/>
+          <a:lstStyle/>
+          <a:p>
+            <a:pPr algn="ctr"/>
+          </a:p>
+        </p:txBody>
+      </p:sp>
+      <p:sp>
+        <p:nvSpPr>
+          <p:cNvPr id="20" name="TextBox 19"/>
+          <p:cNvSpPr txBox="1"/>
+          <p:nvPr/>
+        </p:nvSpPr>
+        <p:spPr>
+          <a:xfrm>
+            <a:off x="7603010" y="1627632"/>
+            <a:ext cx="914400" cy="182880"/>
+          </a:xfrm>
+          <a:prstGeom prst="rect">
+            <a:avLst/>
+          </a:prstGeom>
+          <a:noFill/>
+        </p:spPr>
+        <p:txBody>
+          <a:bodyPr wrap="square" anchor="t" lIns="19050" rIns="19050" tIns="6350" bIns="6350">
+            <a:spAutoFit/>
+          </a:bodyPr>
+          <a:lstStyle/>
+          <a:p>
+            <a:pPr algn="l">
+              <a:lnSpc>
+                <a:spcPct val="100000"/>
+              </a:lnSpc>
+              <a:spcAft>
+                <a:spcPts val="200"/>
+              </a:spcAft>
+            </a:pPr>
+            <a:r>
+              <a:rPr sz="850" b="1">
+                <a:solidFill>
+                  <a:srgbClr val="7B8794"/>
+                </a:solidFill>
+                <a:latin typeface="Segoe UI"/>
+              </a:rPr>
+              <a:t>€107–122</a:t>
+            </a:r>
+          </a:p>
+        </p:txBody>
+      </p:sp>
+      <p:sp>
+        <p:nvSpPr>
+          <p:cNvPr id="21" name="TextBox 20"/>
+          <p:cNvSpPr txBox="1"/>
+          <p:nvPr/>
+        </p:nvSpPr>
+        <p:spPr>
+          <a:xfrm>
+            <a:off x="6601968" y="1874520"/>
+            <a:ext cx="5297119" cy="164592"/>
+          </a:xfrm>
+          <a:prstGeom prst="rect">
+            <a:avLst/>
+          </a:prstGeom>
+          <a:noFill/>
+        </p:spPr>
+        <p:txBody>
+          <a:bodyPr wrap="square" anchor="t" lIns="19050" rIns="19050" tIns="6350" bIns="6350">
+            <a:spAutoFit/>
+          </a:bodyPr>
+          <a:lstStyle/>
+          <a:p>
+            <a:pPr algn="l">
+              <a:lnSpc>
+                <a:spcPct val="100000"/>
+              </a:lnSpc>
+              <a:spcAft>
+                <a:spcPts val="200"/>
+              </a:spcAft>
+            </a:pPr>
+            <a:r>
+              <a:rPr sz="800" b="1">
+                <a:solidFill>
+                  <a:srgbClr val="1F2937"/>
+                </a:solidFill>
+                <a:latin typeface="Segoe UI"/>
+              </a:rPr>
+              <a:t>Jindal, verified — conservative basis (1.4 t)</a:t>
+            </a:r>
+          </a:p>
+        </p:txBody>
+      </p:sp>
+      <p:sp>
+        <p:nvSpPr>
+          <p:cNvPr id="22" name="Rectangle 21"/>
+          <p:cNvSpPr/>
+          <p:nvPr/>
+        </p:nvSpPr>
+        <p:spPr>
+          <a:xfrm>
+            <a:off x="6601968" y="2029968"/>
+            <a:ext cx="591899" cy="118872"/>
+          </a:xfrm>
+          <a:prstGeom prst="rect">
+            <a:avLst/>
+          </a:prstGeom>
+          <a:solidFill>
+            <a:srgbClr val="1B6DB0"/>
+          </a:solidFill>
+          <a:ln>
+            <a:noFill/>
+          </a:ln>
+          <a:effectLst/>
+        </p:spPr>
+        <p:style>
+          <a:lnRef idx="1">
+            <a:schemeClr val="accent1"/>
+          </a:lnRef>
+          <a:fillRef idx="3">
+            <a:schemeClr val="accent1"/>
+          </a:fillRef>
+          <a:effectRef idx="2">
+            <a:schemeClr val="accent1"/>
+          </a:effectRef>
+          <a:fontRef idx="minor">
+            <a:schemeClr val="lt1"/>
+          </a:fontRef>
+        </p:style>
+        <p:txBody>
+          <a:bodyPr rtlCol="0" anchor="ctr"/>
+          <a:lstStyle/>
+          <a:p>
+            <a:pPr algn="ctr"/>
+          </a:p>
+        </p:txBody>
+      </p:sp>
+      <p:sp>
+        <p:nvSpPr>
+          <p:cNvPr id="23" name="TextBox 22"/>
+          <p:cNvSpPr txBox="1"/>
+          <p:nvPr/>
+        </p:nvSpPr>
+        <p:spPr>
+          <a:xfrm>
+            <a:off x="7248731" y="1997964"/>
+            <a:ext cx="914400" cy="182880"/>
+          </a:xfrm>
+          <a:prstGeom prst="rect">
+            <a:avLst/>
+          </a:prstGeom>
+          <a:noFill/>
+        </p:spPr>
+        <p:txBody>
+          <a:bodyPr wrap="square" anchor="t" lIns="19050" rIns="19050" tIns="6350" bIns="6350">
+            <a:spAutoFit/>
+          </a:bodyPr>
+          <a:lstStyle/>
+          <a:p>
+            <a:pPr algn="l">
+              <a:lnSpc>
+                <a:spcPct val="100000"/>
+              </a:lnSpc>
+              <a:spcAft>
+                <a:spcPts val="200"/>
+              </a:spcAft>
+            </a:pPr>
+            <a:r>
+              <a:rPr sz="850" b="1">
+                <a:solidFill>
+                  <a:srgbClr val="1B6DB0"/>
+                </a:solidFill>
+                <a:latin typeface="Segoe UI"/>
+              </a:rPr>
+              <a:t>€74</a:t>
+            </a:r>
+          </a:p>
+        </p:txBody>
+      </p:sp>
+      <p:sp>
+        <p:nvSpPr>
+          <p:cNvPr id="24" name="TextBox 23"/>
+          <p:cNvSpPr txBox="1"/>
+          <p:nvPr/>
+        </p:nvSpPr>
+        <p:spPr>
+          <a:xfrm>
+            <a:off x="6601968" y="2244852"/>
+            <a:ext cx="5297119" cy="164592"/>
+          </a:xfrm>
+          <a:prstGeom prst="rect">
+            <a:avLst/>
+          </a:prstGeom>
+          <a:noFill/>
+        </p:spPr>
+        <p:txBody>
+          <a:bodyPr wrap="square" anchor="t" lIns="19050" rIns="19050" tIns="6350" bIns="6350">
+            <a:spAutoFit/>
+          </a:bodyPr>
+          <a:lstStyle/>
+          <a:p>
+            <a:pPr algn="l">
+              <a:lnSpc>
+                <a:spcPct val="100000"/>
+              </a:lnSpc>
+              <a:spcAft>
+                <a:spcPts val="200"/>
+              </a:spcAft>
+            </a:pPr>
+            <a:r>
+              <a:rPr sz="800" b="1">
+                <a:solidFill>
+                  <a:srgbClr val="1F2937"/>
+                </a:solidFill>
+                <a:latin typeface="Segoe UI"/>
+              </a:rPr>
+              <a:t>Jindal, verified — CBAM-direct basis (0.9 t)</a:t>
+            </a:r>
+          </a:p>
+        </p:txBody>
+      </p:sp>
+      <p:sp>
+        <p:nvSpPr>
+          <p:cNvPr id="25" name="Rectangle 24"/>
+          <p:cNvSpPr/>
+          <p:nvPr/>
+        </p:nvSpPr>
+        <p:spPr>
+          <a:xfrm>
+            <a:off x="6601968" y="2400300"/>
+            <a:ext cx="399998" cy="118872"/>
+          </a:xfrm>
+          <a:prstGeom prst="rect">
+            <a:avLst/>
+          </a:prstGeom>
+          <a:solidFill>
+            <a:srgbClr val="1D7A4F"/>
+          </a:solidFill>
+          <a:ln>
+            <a:noFill/>
+          </a:ln>
+          <a:effectLst/>
+        </p:spPr>
+        <p:style>
+          <a:lnRef idx="1">
+            <a:schemeClr val="accent1"/>
+          </a:lnRef>
+          <a:fillRef idx="3">
+            <a:schemeClr val="accent1"/>
+          </a:fillRef>
+          <a:effectRef idx="2">
+            <a:schemeClr val="accent1"/>
+          </a:effectRef>
+          <a:fontRef idx="minor">
+            <a:schemeClr val="lt1"/>
+          </a:fontRef>
+        </p:style>
+        <p:txBody>
+          <a:bodyPr rtlCol="0" anchor="ctr"/>
+          <a:lstStyle/>
+          <a:p>
+            <a:pPr algn="ctr"/>
+          </a:p>
+        </p:txBody>
+      </p:sp>
+      <p:sp>
+        <p:nvSpPr>
+          <p:cNvPr id="26" name="TextBox 25"/>
+          <p:cNvSpPr txBox="1"/>
+          <p:nvPr/>
+        </p:nvSpPr>
+        <p:spPr>
+          <a:xfrm>
+            <a:off x="7056830" y="2368296"/>
+            <a:ext cx="914400" cy="182880"/>
+          </a:xfrm>
+          <a:prstGeom prst="rect">
+            <a:avLst/>
+          </a:prstGeom>
+          <a:noFill/>
+        </p:spPr>
+        <p:txBody>
+          <a:bodyPr wrap="square" anchor="t" lIns="19050" rIns="19050" tIns="6350" bIns="6350">
+            <a:spAutoFit/>
+          </a:bodyPr>
+          <a:lstStyle/>
+          <a:p>
+            <a:pPr algn="l">
+              <a:lnSpc>
+                <a:spcPct val="100000"/>
+              </a:lnSpc>
+              <a:spcAft>
+                <a:spcPts val="200"/>
+              </a:spcAft>
+            </a:pPr>
+            <a:r>
+              <a:rPr sz="850" b="1">
+                <a:solidFill>
+                  <a:srgbClr val="1D7A4F"/>
+                </a:solidFill>
+                <a:latin typeface="Segoe UI"/>
+              </a:rPr>
+              <a:t>€48</a:t>
+            </a:r>
+          </a:p>
+        </p:txBody>
+      </p:sp>
+      <p:sp>
+        <p:nvSpPr>
+          <p:cNvPr id="27" name="TextBox 26"/>
+          <p:cNvSpPr txBox="1"/>
+          <p:nvPr/>
+        </p:nvSpPr>
+        <p:spPr>
+          <a:xfrm>
+            <a:off x="6601968" y="2615184"/>
+            <a:ext cx="5297119" cy="182880"/>
+          </a:xfrm>
+          <a:prstGeom prst="rect">
+            <a:avLst/>
+          </a:prstGeom>
+          <a:noFill/>
+        </p:spPr>
+        <p:txBody>
+          <a:bodyPr wrap="square" anchor="t" lIns="19050" rIns="19050" tIns="6350" bIns="6350">
+            <a:spAutoFit/>
+          </a:bodyPr>
+          <a:lstStyle/>
+          <a:p>
+            <a:pPr algn="l">
+              <a:lnSpc>
+                <a:spcPct val="100000"/>
+              </a:lnSpc>
+              <a:spcAft>
+                <a:spcPts val="200"/>
+              </a:spcAft>
+            </a:pPr>
+            <a:r>
+              <a:rPr sz="720" b="0" i="1">
+                <a:solidFill>
+                  <a:srgbClr val="8A94A0"/>
+                </a:solidFill>
+                <a:latin typeface="Segoe UI"/>
+              </a:rPr>
+              <a:t>Mechanics: default 6.49 base + 30% no-data markup; phase-in 2.5%→48.5%; ETS €80→€109 (EU Regs 2025/2620-21).</a:t>
+            </a:r>
+          </a:p>
+        </p:txBody>
+      </p:sp>
+      <p:sp>
+        <p:nvSpPr>
+          <p:cNvPr id="28" name="Rectangle 27"/>
+          <p:cNvSpPr/>
+          <p:nvPr/>
+        </p:nvSpPr>
+        <p:spPr>
+          <a:xfrm>
+            <a:off x="6601968" y="2852928"/>
+            <a:ext cx="5297119" cy="10160"/>
+          </a:xfrm>
+          <a:prstGeom prst="rect">
+            <a:avLst/>
+          </a:prstGeom>
+          <a:solidFill>
+            <a:srgbClr val="E2E8EF"/>
+          </a:solidFill>
+          <a:ln>
+            <a:noFill/>
+          </a:ln>
+          <a:effectLst/>
+        </p:spPr>
+        <p:style>
+          <a:lnRef idx="1">
+            <a:schemeClr val="accent1"/>
+          </a:lnRef>
+          <a:fillRef idx="3">
+            <a:schemeClr val="accent1"/>
+          </a:fillRef>
+          <a:effectRef idx="2">
+            <a:schemeClr val="accent1"/>
+          </a:effectRef>
+          <a:fontRef idx="minor">
+            <a:schemeClr val="lt1"/>
+          </a:fontRef>
+        </p:style>
+        <p:txBody>
+          <a:bodyPr rtlCol="0" anchor="ctr"/>
+          <a:lstStyle/>
+          <a:p>
+            <a:pPr algn="ctr"/>
+          </a:p>
+        </p:txBody>
+      </p:sp>
+      <p:sp>
+        <p:nvSpPr>
+          <p:cNvPr id="29" name="TextBox 28"/>
+          <p:cNvSpPr txBox="1"/>
+          <p:nvPr/>
+        </p:nvSpPr>
+        <p:spPr>
+          <a:xfrm>
+            <a:off x="6601968" y="2907792"/>
+            <a:ext cx="5297119" cy="384048"/>
+          </a:xfrm>
+          <a:prstGeom prst="rect">
+            <a:avLst/>
+          </a:prstGeom>
+          <a:noFill/>
+        </p:spPr>
+        <p:txBody>
+          <a:bodyPr wrap="square" anchor="t" lIns="19050" rIns="19050" tIns="6350" bIns="6350">
+            <a:spAutoFit/>
+          </a:bodyPr>
+          <a:lstStyle/>
+          <a:p>
+            <a:pPr algn="l">
+              <a:lnSpc>
+                <a:spcPct val="100000"/>
+              </a:lnSpc>
+              <a:spcAft>
+                <a:spcPts val="200"/>
+              </a:spcAft>
+            </a:pPr>
+            <a:r>
+              <a:rPr sz="2100" b="1">
+                <a:solidFill>
+                  <a:srgbClr val="123F63"/>
+                </a:solidFill>
+                <a:latin typeface="Segoe UI"/>
+              </a:rPr>
+              <a:t>₹200–290 crore / year </a:t>
+            </a:r>
+            <a:r>
+              <a:rPr sz="1100" b="1">
+                <a:solidFill>
+                  <a:srgbClr val="5B6570"/>
+                </a:solidFill>
+                <a:latin typeface="Segoe UI"/>
+              </a:rPr>
+              <a:t> (€22–32M)</a:t>
+            </a:r>
+          </a:p>
+        </p:txBody>
+      </p:sp>
+      <p:sp>
+        <p:nvSpPr>
+          <p:cNvPr id="30" name="TextBox 29"/>
+          <p:cNvSpPr txBox="1"/>
+          <p:nvPr/>
+        </p:nvSpPr>
+        <p:spPr>
+          <a:xfrm>
+            <a:off x="6601968" y="3310128"/>
+            <a:ext cx="5297119" cy="457200"/>
+          </a:xfrm>
+          <a:prstGeom prst="rect">
+            <a:avLst/>
+          </a:prstGeom>
+          <a:noFill/>
+        </p:spPr>
+        <p:txBody>
+          <a:bodyPr wrap="square" anchor="t" lIns="19050" rIns="19050" tIns="6350" bIns="6350">
+            <a:spAutoFit/>
+          </a:bodyPr>
+          <a:lstStyle/>
+          <a:p>
+            <a:pPr algn="l">
+              <a:lnSpc>
+                <a:spcPct val="105000"/>
+              </a:lnSpc>
+              <a:spcAft>
+                <a:spcPts val="200"/>
+              </a:spcAft>
+            </a:pPr>
+            <a:r>
+              <a:rPr sz="840" b="0">
+                <a:solidFill>
+                  <a:srgbClr val="5B6570"/>
+                </a:solidFill>
+                <a:latin typeface="Segoe UI"/>
+              </a:rPr>
+              <a:t>€372–398 saved per tonne × 60–80 kt/yr of EU exports, earned by filing verified plant data instead of accepting EU defaults. The calculator produces exactly this verified figure per tonne.</a:t>
+            </a:r>
+          </a:p>
+        </p:txBody>
+      </p:sp>
+      <p:sp>
+        <p:nvSpPr>
+          <p:cNvPr id="31" name="TextBox 30"/>
+          <p:cNvSpPr txBox="1"/>
+          <p:nvPr/>
+        </p:nvSpPr>
+        <p:spPr>
+          <a:xfrm>
+            <a:off x="292608" y="4572000"/>
+            <a:ext cx="5989320" cy="182880"/>
+          </a:xfrm>
+          <a:prstGeom prst="rect">
+            <a:avLst/>
+          </a:prstGeom>
+          <a:noFill/>
+        </p:spPr>
+        <p:txBody>
+          <a:bodyPr wrap="square" anchor="t" lIns="19050" rIns="19050" tIns="6350" bIns="6350">
+            <a:spAutoFit/>
+          </a:bodyPr>
+          <a:lstStyle/>
+          <a:p>
+            <a:pPr algn="l">
+              <a:lnSpc>
+                <a:spcPct val="100000"/>
+              </a:lnSpc>
+              <a:spcAft>
+                <a:spcPts val="0"/>
+              </a:spcAft>
+            </a:pPr>
+            <a:r>
+              <a:rPr sz="900" b="1">
+                <a:solidFill>
+                  <a:srgbClr val="1B6DB0"/>
+                </a:solidFill>
+                <a:latin typeface="Segoe UI"/>
+              </a:rPr>
+              <a:t>INITIAL RECOMMENDATIONS</a:t>
+            </a:r>
+          </a:p>
+        </p:txBody>
+      </p:sp>
+      <p:sp>
+        <p:nvSpPr>
+          <p:cNvPr id="32" name="Rectangle 31"/>
+          <p:cNvSpPr/>
+          <p:nvPr/>
+        </p:nvSpPr>
+        <p:spPr>
+          <a:xfrm>
+            <a:off x="292608" y="4764024"/>
+            <a:ext cx="5989320" cy="10160"/>
+          </a:xfrm>
+          <a:prstGeom prst="rect">
+            <a:avLst/>
+          </a:prstGeom>
+          <a:solidFill>
+            <a:srgbClr val="E2E8EF"/>
+          </a:solidFill>
+          <a:ln>
+            <a:noFill/>
+          </a:ln>
+          <a:effectLst/>
+        </p:spPr>
+        <p:style>
+          <a:lnRef idx="1">
+            <a:schemeClr val="accent1"/>
+          </a:lnRef>
+          <a:fillRef idx="3">
+            <a:schemeClr val="accent1"/>
+          </a:fillRef>
+          <a:effectRef idx="2">
+            <a:schemeClr val="accent1"/>
+          </a:effectRef>
+          <a:fontRef idx="minor">
+            <a:schemeClr val="lt1"/>
+          </a:fontRef>
+        </p:style>
+        <p:txBody>
+          <a:bodyPr rtlCol="0" anchor="ctr"/>
+          <a:lstStyle/>
+          <a:p>
+            <a:pPr algn="ctr"/>
+          </a:p>
+        </p:txBody>
+      </p:sp>
+      <p:sp>
+        <p:nvSpPr>
+          <p:cNvPr id="33" name="TextBox 32"/>
+          <p:cNvSpPr txBox="1"/>
+          <p:nvPr/>
+        </p:nvSpPr>
+        <p:spPr>
+          <a:xfrm>
+            <a:off x="292608" y="4846320"/>
+            <a:ext cx="5989320" cy="329184"/>
+          </a:xfrm>
+          <a:prstGeom prst="rect">
+            <a:avLst/>
+          </a:prstGeom>
+          <a:noFill/>
+        </p:spPr>
+        <p:txBody>
+          <a:bodyPr wrap="square" anchor="t" lIns="19050" rIns="19050" tIns="6350" bIns="6350">
+            <a:spAutoFit/>
+          </a:bodyPr>
+          <a:lstStyle/>
+          <a:p>
+            <a:pPr algn="l">
+              <a:lnSpc>
+                <a:spcPct val="100000"/>
+              </a:lnSpc>
+              <a:spcAft>
+                <a:spcPts val="200"/>
+              </a:spcAft>
+            </a:pPr>
+            <a:r>
+              <a:rPr sz="830" b="1">
+                <a:solidFill>
+                  <a:srgbClr val="1B6DB0"/>
+                </a:solidFill>
+                <a:latin typeface="Segoe UI"/>
+              </a:rPr>
+              <a:t>1.  </a:t>
+            </a:r>
+            <a:r>
+              <a:rPr sz="830" b="1">
+                <a:solidFill>
+                  <a:srgbClr val="123F63"/>
+                </a:solidFill>
+                <a:latin typeface="Segoe UI"/>
+              </a:rPr>
+              <a:t>Operations: </a:t>
+            </a:r>
+            <a:r>
+              <a:rPr sz="830" b="0">
+                <a:solidFill>
+                  <a:srgbClr val="5B6570"/>
+                </a:solidFill>
+                <a:latin typeface="Segoe UI"/>
+              </a:rPr>
+              <a:t>raise scrap 70→78% within the 80% tramp-element guardrail; deploy XRF/LIBS sensor sorting to secure clean feed.</a:t>
+            </a:r>
+          </a:p>
+        </p:txBody>
+      </p:sp>
+      <p:sp>
+        <p:nvSpPr>
+          <p:cNvPr id="34" name="TextBox 33"/>
+          <p:cNvSpPr txBox="1"/>
+          <p:nvPr/>
+        </p:nvSpPr>
+        <p:spPr>
+          <a:xfrm>
+            <a:off x="292608" y="5170932"/>
+            <a:ext cx="5989320" cy="329184"/>
+          </a:xfrm>
+          <a:prstGeom prst="rect">
+            <a:avLst/>
+          </a:prstGeom>
+          <a:noFill/>
+        </p:spPr>
+        <p:txBody>
+          <a:bodyPr wrap="square" anchor="t" lIns="19050" rIns="19050" tIns="6350" bIns="6350">
+            <a:spAutoFit/>
+          </a:bodyPr>
+          <a:lstStyle/>
+          <a:p>
+            <a:pPr algn="l">
+              <a:lnSpc>
+                <a:spcPct val="100000"/>
+              </a:lnSpc>
+              <a:spcAft>
+                <a:spcPts val="200"/>
+              </a:spcAft>
+            </a:pPr>
+            <a:r>
+              <a:rPr sz="830" b="1">
+                <a:solidFill>
+                  <a:srgbClr val="1B6DB0"/>
+                </a:solidFill>
+                <a:latin typeface="Segoe UI"/>
+              </a:rPr>
+              <a:t>2.  </a:t>
+            </a:r>
+            <a:r>
+              <a:rPr sz="830" b="1">
+                <a:solidFill>
+                  <a:srgbClr val="123F63"/>
+                </a:solidFill>
+                <a:latin typeface="Segoe UI"/>
+              </a:rPr>
+              <a:t>Operations: </a:t>
+            </a:r>
+            <a:r>
+              <a:rPr sz="830" b="0">
+                <a:solidFill>
+                  <a:srgbClr val="5B6570"/>
+                </a:solidFill>
+                <a:latin typeface="Segoe UI"/>
+              </a:rPr>
+              <a:t>lift renewables 47→65% via the 300 MW hybrid; captive coal at 1.045 t/MWh is the second-largest lever.</a:t>
+            </a:r>
+          </a:p>
+        </p:txBody>
+      </p:sp>
+      <p:sp>
+        <p:nvSpPr>
+          <p:cNvPr id="35" name="TextBox 34"/>
+          <p:cNvSpPr txBox="1"/>
+          <p:nvPr/>
+        </p:nvSpPr>
+        <p:spPr>
+          <a:xfrm>
+            <a:off x="292608" y="5495544"/>
+            <a:ext cx="5989320" cy="329184"/>
+          </a:xfrm>
+          <a:prstGeom prst="rect">
+            <a:avLst/>
+          </a:prstGeom>
+          <a:noFill/>
+        </p:spPr>
+        <p:txBody>
+          <a:bodyPr wrap="square" anchor="t" lIns="19050" rIns="19050" tIns="6350" bIns="6350">
+            <a:spAutoFit/>
+          </a:bodyPr>
+          <a:lstStyle/>
+          <a:p>
+            <a:pPr algn="l">
+              <a:lnSpc>
+                <a:spcPct val="100000"/>
+              </a:lnSpc>
+              <a:spcAft>
+                <a:spcPts val="200"/>
+              </a:spcAft>
+            </a:pPr>
+            <a:r>
+              <a:rPr sz="830" b="1">
+                <a:solidFill>
+                  <a:srgbClr val="1B6DB0"/>
+                </a:solidFill>
+                <a:latin typeface="Segoe UI"/>
+              </a:rPr>
+              <a:t>3.  </a:t>
+            </a:r>
+            <a:r>
+              <a:rPr sz="830" b="1">
+                <a:solidFill>
+                  <a:srgbClr val="123F63"/>
+                </a:solidFill>
+                <a:latin typeface="Segoe UI"/>
+              </a:rPr>
+              <a:t>Finance: </a:t>
+            </a:r>
+            <a:r>
+              <a:rPr sz="830" b="0">
+                <a:solidFill>
+                  <a:srgbClr val="5B6570"/>
+                </a:solidFill>
+                <a:latin typeface="Segoe UI"/>
+              </a:rPr>
+              <a:t>file verified MRV data with EU importers — a €372–398/t saving vs defaults; the tool generates the per-tonne statement.</a:t>
+            </a:r>
+          </a:p>
+        </p:txBody>
+      </p:sp>
+      <p:sp>
+        <p:nvSpPr>
+          <p:cNvPr id="36" name="TextBox 35"/>
+          <p:cNvSpPr txBox="1"/>
+          <p:nvPr/>
+        </p:nvSpPr>
+        <p:spPr>
+          <a:xfrm>
+            <a:off x="292608" y="5820156"/>
+            <a:ext cx="5989320" cy="329184"/>
+          </a:xfrm>
+          <a:prstGeom prst="rect">
+            <a:avLst/>
+          </a:prstGeom>
+          <a:noFill/>
+        </p:spPr>
+        <p:txBody>
+          <a:bodyPr wrap="square" anchor="t" lIns="19050" rIns="19050" tIns="6350" bIns="6350">
+            <a:spAutoFit/>
+          </a:bodyPr>
+          <a:lstStyle/>
+          <a:p>
+            <a:pPr algn="l">
+              <a:lnSpc>
+                <a:spcPct val="100000"/>
+              </a:lnSpc>
+              <a:spcAft>
+                <a:spcPts val="200"/>
+              </a:spcAft>
+            </a:pPr>
+            <a:r>
+              <a:rPr sz="830" b="1">
+                <a:solidFill>
+                  <a:srgbClr val="1B6DB0"/>
+                </a:solidFill>
+                <a:latin typeface="Segoe UI"/>
+              </a:rPr>
+              <a:t>4.  </a:t>
+            </a:r>
+            <a:r>
+              <a:rPr sz="830" b="1">
+                <a:solidFill>
+                  <a:srgbClr val="123F63"/>
+                </a:solidFill>
+                <a:latin typeface="Segoe UI"/>
+              </a:rPr>
+              <a:t>Sales: </a:t>
+            </a:r>
+            <a:r>
+              <a:rPr sz="830" b="0">
+                <a:solidFill>
+                  <a:srgbClr val="5B6570"/>
+                </a:solidFill>
+                <a:latin typeface="Segoe UI"/>
+              </a:rPr>
+              <a:t>attach a carbon statement to every EU order; CPR GWP declarations are mandatory since Jan 2026 and the Digital Product Passport follows ~2028.</a:t>
+            </a:r>
+          </a:p>
+        </p:txBody>
+      </p:sp>
+      <p:sp>
+        <p:nvSpPr>
+          <p:cNvPr id="37" name="TextBox 36"/>
+          <p:cNvSpPr txBox="1"/>
+          <p:nvPr/>
+        </p:nvSpPr>
+        <p:spPr>
+          <a:xfrm>
+            <a:off x="292608" y="6153912"/>
+            <a:ext cx="5989320" cy="219456"/>
+          </a:xfrm>
+          <a:prstGeom prst="rect">
+            <a:avLst/>
+          </a:prstGeom>
+          <a:noFill/>
+        </p:spPr>
+        <p:txBody>
+          <a:bodyPr wrap="square" anchor="t" lIns="19050" rIns="19050" tIns="6350" bIns="6350">
+            <a:spAutoFit/>
+          </a:bodyPr>
+          <a:lstStyle/>
+          <a:p>
+            <a:pPr algn="l">
+              <a:lnSpc>
+                <a:spcPct val="100000"/>
+              </a:lnSpc>
+              <a:spcAft>
+                <a:spcPts val="200"/>
+              </a:spcAft>
+            </a:pPr>
+            <a:r>
+              <a:rPr sz="840" b="1">
+                <a:solidFill>
+                  <a:srgbClr val="1D7A4F"/>
+                </a:solidFill>
+                <a:latin typeface="Segoe UI"/>
+              </a:rPr>
+              <a:t>Combined effect: Scope 1+2 falls to 1.35–1.45 by FY28-30 — on track for the FY35 −50% target.</a:t>
+            </a:r>
+          </a:p>
+        </p:txBody>
+      </p:sp>
+      <p:sp>
+        <p:nvSpPr>
+          <p:cNvPr id="38" name="TextBox 37"/>
+          <p:cNvSpPr txBox="1"/>
+          <p:nvPr/>
+        </p:nvSpPr>
+        <p:spPr>
+          <a:xfrm>
+            <a:off x="6601968" y="4572000"/>
+            <a:ext cx="5297119" cy="182880"/>
+          </a:xfrm>
+          <a:prstGeom prst="rect">
+            <a:avLst/>
+          </a:prstGeom>
+          <a:noFill/>
+        </p:spPr>
+        <p:txBody>
+          <a:bodyPr wrap="square" anchor="t" lIns="19050" rIns="19050" tIns="6350" bIns="6350">
+            <a:spAutoFit/>
+          </a:bodyPr>
+          <a:lstStyle/>
+          <a:p>
+            <a:pPr algn="l">
+              <a:lnSpc>
+                <a:spcPct val="100000"/>
+              </a:lnSpc>
+              <a:spcAft>
+                <a:spcPts val="0"/>
+              </a:spcAft>
+            </a:pPr>
+            <a:r>
+              <a:rPr sz="900" b="1">
+                <a:solidFill>
+                  <a:srgbClr val="1B6DB0"/>
+                </a:solidFill>
+                <a:latin typeface="Segoe UI"/>
+              </a:rPr>
+              <a:t>DEPLOYMENT ROADMAP</a:t>
+            </a:r>
+          </a:p>
+        </p:txBody>
+      </p:sp>
+      <p:sp>
+        <p:nvSpPr>
+          <p:cNvPr id="39" name="Rectangle 38"/>
+          <p:cNvSpPr/>
+          <p:nvPr/>
+        </p:nvSpPr>
+        <p:spPr>
+          <a:xfrm>
+            <a:off x="6601968" y="4764024"/>
+            <a:ext cx="5297119" cy="10160"/>
+          </a:xfrm>
+          <a:prstGeom prst="rect">
+            <a:avLst/>
+          </a:prstGeom>
+          <a:solidFill>
+            <a:srgbClr val="E2E8EF"/>
+          </a:solidFill>
+          <a:ln>
+            <a:noFill/>
+          </a:ln>
+          <a:effectLst/>
+        </p:spPr>
+        <p:style>
+          <a:lnRef idx="1">
+            <a:schemeClr val="accent1"/>
+          </a:lnRef>
+          <a:fillRef idx="3">
+            <a:schemeClr val="accent1"/>
+          </a:fillRef>
+          <a:effectRef idx="2">
+            <a:schemeClr val="accent1"/>
+          </a:effectRef>
+          <a:fontRef idx="minor">
+            <a:schemeClr val="lt1"/>
+          </a:fontRef>
+        </p:style>
+        <p:txBody>
+          <a:bodyPr rtlCol="0" anchor="ctr"/>
+          <a:lstStyle/>
+          <a:p>
+            <a:pPr algn="ctr"/>
+          </a:p>
+        </p:txBody>
+      </p:sp>
+      <p:graphicFrame>
+        <p:nvGraphicFramePr>
+          <p:cNvPr id="40" name="Table 39"/>
+          <p:cNvGraphicFramePr>
+            <a:graphicFrameLocks noGrp="1"/>
+          </p:cNvGraphicFramePr>
+          <p:nvPr/>
+        </p:nvGraphicFramePr>
+        <p:xfrm>
+          <a:off x="6601968" y="4846320"/>
+          <a:ext cx="5297115" cy="1005840"/>
+        </p:xfrm>
+        <a:graphic>
+          <a:graphicData uri="http://schemas.openxmlformats.org/drawingml/2006/table">
+            <a:tbl>
+              <a:tblPr firstRow="1" bandRow="1">
+                <a:tableStyleId>{5C22544A-7EE6-4342-B048-85BDC9FD1C3A}</a:tableStyleId>
+              </a:tblPr>
+              <a:tblGrid>
+                <a:gridCol w="2331720"/>
+                <a:gridCol w="593079"/>
+                <a:gridCol w="593079"/>
+                <a:gridCol w="593079"/>
+                <a:gridCol w="593079"/>
+                <a:gridCol w="593079"/>
+              </a:tblGrid>
+              <a:tr h="201168">
+                <a:tc>
+                  <a:txBody>
+                    <a:bodyPr wrap="square" lIns="50800" rIns="50800" tIns="12700" bIns="12700" anchor="ctr"/>
+                    <a:lstStyle/>
+                    <a:p>
+                      <a:pPr algn="l"/>
+                      <a:r>
+                        <a:rPr sz="740" b="1">
+                          <a:solidFill>
+                            <a:srgbClr val="5B6570"/>
+                          </a:solidFill>
+                          <a:latin typeface="Segoe UI"/>
+                        </a:rPr>
+                        <a:t>Initiative</a:t>
+                      </a:r>
+                    </a:p>
+                  </a:txBody>
+                  <a:tcPr>
+                    <a:solidFill>
+                      <a:srgbClr val="EEF2F6"/>
+                    </a:solidFill>
+                  </a:tcPr>
+                </a:tc>
+                <a:tc>
+                  <a:txBody>
+                    <a:bodyPr wrap="square" lIns="50800" rIns="50800" tIns="12700" bIns="12700" anchor="ctr"/>
+                    <a:lstStyle/>
+                    <a:p>
+                      <a:pPr algn="ctr"/>
+                      <a:r>
+                        <a:rPr sz="740" b="1">
+                          <a:solidFill>
+                            <a:srgbClr val="5B6570"/>
+                          </a:solidFill>
+                          <a:latin typeface="Segoe UI"/>
+                        </a:rPr>
+                        <a:t>FY26</a:t>
+                      </a:r>
+                    </a:p>
+                  </a:txBody>
+                  <a:tcPr>
+                    <a:solidFill>
+                      <a:srgbClr val="EEF2F6"/>
+                    </a:solidFill>
+                  </a:tcPr>
+                </a:tc>
+                <a:tc>
+                  <a:txBody>
+                    <a:bodyPr wrap="square" lIns="50800" rIns="50800" tIns="12700" bIns="12700" anchor="ctr"/>
+                    <a:lstStyle/>
+                    <a:p>
+                      <a:pPr algn="ctr"/>
+                      <a:r>
+                        <a:rPr sz="740" b="1">
+                          <a:solidFill>
+                            <a:srgbClr val="5B6570"/>
+                          </a:solidFill>
+                          <a:latin typeface="Segoe UI"/>
+                        </a:rPr>
+                        <a:t>FY27</a:t>
+                      </a:r>
+                    </a:p>
+                  </a:txBody>
+                  <a:tcPr>
+                    <a:solidFill>
+                      <a:srgbClr val="EEF2F6"/>
+                    </a:solidFill>
+                  </a:tcPr>
+                </a:tc>
+                <a:tc>
+                  <a:txBody>
+                    <a:bodyPr wrap="square" lIns="50800" rIns="50800" tIns="12700" bIns="12700" anchor="ctr"/>
+                    <a:lstStyle/>
+                    <a:p>
+                      <a:pPr algn="ctr"/>
+                      <a:r>
+                        <a:rPr sz="740" b="1">
+                          <a:solidFill>
+                            <a:srgbClr val="5B6570"/>
+                          </a:solidFill>
+                          <a:latin typeface="Segoe UI"/>
+                        </a:rPr>
+                        <a:t>FY28</a:t>
+                      </a:r>
+                    </a:p>
+                  </a:txBody>
+                  <a:tcPr>
+                    <a:solidFill>
+                      <a:srgbClr val="EEF2F6"/>
+                    </a:solidFill>
+                  </a:tcPr>
+                </a:tc>
+                <a:tc>
+                  <a:txBody>
+                    <a:bodyPr wrap="square" lIns="50800" rIns="50800" tIns="12700" bIns="12700" anchor="ctr"/>
+                    <a:lstStyle/>
+                    <a:p>
+                      <a:pPr algn="ctr"/>
+                      <a:r>
+                        <a:rPr sz="740" b="1">
+                          <a:solidFill>
+                            <a:srgbClr val="5B6570"/>
+                          </a:solidFill>
+                          <a:latin typeface="Segoe UI"/>
+                        </a:rPr>
+                        <a:t>FY29</a:t>
+                      </a:r>
+                    </a:p>
+                  </a:txBody>
+                  <a:tcPr>
+                    <a:solidFill>
+                      <a:srgbClr val="EEF2F6"/>
+                    </a:solidFill>
+                  </a:tcPr>
+                </a:tc>
+                <a:tc>
+                  <a:txBody>
+                    <a:bodyPr wrap="square" lIns="50800" rIns="50800" tIns="12700" bIns="12700" anchor="ctr"/>
+                    <a:lstStyle/>
+                    <a:p>
+                      <a:pPr algn="ctr"/>
+                      <a:r>
+                        <a:rPr sz="740" b="1">
+                          <a:solidFill>
+                            <a:srgbClr val="5B6570"/>
+                          </a:solidFill>
+                          <a:latin typeface="Segoe UI"/>
+                        </a:rPr>
+                        <a:t>FY30</a:t>
+                      </a:r>
+                    </a:p>
+                  </a:txBody>
+                  <a:tcPr>
+                    <a:solidFill>
+                      <a:srgbClr val="EEF2F6"/>
+                    </a:solidFill>
+                  </a:tcPr>
+                </a:tc>
+              </a:tr>
+              <a:tr h="201168">
+                <a:tc>
+                  <a:txBody>
+                    <a:bodyPr wrap="square" lIns="50800" rIns="50800" tIns="12700" bIns="12700" anchor="ctr"/>
+                    <a:lstStyle/>
+                    <a:p>
+                      <a:pPr algn="l"/>
+                      <a:r>
+                        <a:rPr sz="760" b="0">
+                          <a:solidFill>
+                            <a:srgbClr val="1F2937"/>
+                          </a:solidFill>
+                          <a:latin typeface="Segoe UI"/>
+                        </a:rPr>
+                        <a:t>Calculator live; verified CBAM filing</a:t>
+                      </a:r>
+                    </a:p>
+                  </a:txBody>
+                  <a:tcPr>
+                    <a:solidFill>
+                      <a:srgbClr val="FFFFFF"/>
+                    </a:solidFill>
+                  </a:tcPr>
+                </a:tc>
+                <a:tc>
+                  <a:txBody>
+                    <a:bodyPr wrap="square" lIns="50800" rIns="50800" tIns="12700" bIns="12700" anchor="ctr"/>
+                    <a:lstStyle/>
+                    <a:p>
+                      <a:pPr algn="l"/>
+                      <a:r>
+                        <a:rPr sz="400" b="0">
+                          <a:solidFill>
+                            <a:srgbClr val="1F2937"/>
+                          </a:solidFill>
+                          <a:latin typeface="Segoe UI"/>
+                        </a:rPr>
+                        <a:t> </a:t>
+                      </a:r>
+                    </a:p>
+                  </a:txBody>
+                  <a:tcPr>
+                    <a:solidFill>
+                      <a:srgbClr val="1D7A4F"/>
+                    </a:solidFill>
+                  </a:tcPr>
+                </a:tc>
+                <a:tc>
+                  <a:txBody>
+                    <a:bodyPr wrap="square" lIns="50800" rIns="50800" tIns="12700" bIns="12700" anchor="ctr"/>
+                    <a:lstStyle/>
+                    <a:p>
+                      <a:pPr algn="l"/>
+                      <a:r>
+                        <a:rPr sz="400" b="0">
+                          <a:solidFill>
+                            <a:srgbClr val="1F2937"/>
+                          </a:solidFill>
+                          <a:latin typeface="Segoe UI"/>
+                        </a:rPr>
+                        <a:t> </a:t>
+                      </a:r>
+                    </a:p>
+                  </a:txBody>
+                  <a:tcPr>
+                    <a:solidFill>
+                      <a:srgbClr val="1D7A4F"/>
+                    </a:solidFill>
+                  </a:tcPr>
+                </a:tc>
+                <a:tc>
+                  <a:txBody>
+                    <a:bodyPr wrap="square" lIns="50800" rIns="50800" tIns="12700" bIns="12700" anchor="ctr"/>
+                    <a:lstStyle/>
+                    <a:p>
+                      <a:pPr algn="l"/>
+                      <a:r>
+                        <a:rPr sz="400" b="0">
+                          <a:solidFill>
+                            <a:srgbClr val="1F2937"/>
+                          </a:solidFill>
+                          <a:latin typeface="Segoe UI"/>
+                        </a:rPr>
+                        <a:t> </a:t>
+                      </a:r>
+                    </a:p>
+                  </a:txBody>
+                  <a:tcPr>
+                    <a:solidFill>
+                      <a:srgbClr val="FFFFFF"/>
+                    </a:solidFill>
+                  </a:tcPr>
+                </a:tc>
+                <a:tc>
+                  <a:txBody>
+                    <a:bodyPr wrap="square" lIns="50800" rIns="50800" tIns="12700" bIns="12700" anchor="ctr"/>
+                    <a:lstStyle/>
+                    <a:p>
+                      <a:pPr algn="l"/>
+                      <a:r>
+                        <a:rPr sz="400" b="0">
+                          <a:solidFill>
+                            <a:srgbClr val="1F2937"/>
+                          </a:solidFill>
+                          <a:latin typeface="Segoe UI"/>
+                        </a:rPr>
+                        <a:t> </a:t>
+                      </a:r>
+                    </a:p>
+                  </a:txBody>
+                  <a:tcPr>
+                    <a:solidFill>
+                      <a:srgbClr val="FFFFFF"/>
+                    </a:solidFill>
+                  </a:tcPr>
+                </a:tc>
+                <a:tc>
+                  <a:txBody>
+                    <a:bodyPr wrap="square" lIns="50800" rIns="50800" tIns="12700" bIns="12700" anchor="ctr"/>
+                    <a:lstStyle/>
+                    <a:p>
+                      <a:pPr algn="l"/>
+                      <a:r>
+                        <a:rPr sz="400" b="0">
+                          <a:solidFill>
+                            <a:srgbClr val="1F2937"/>
+                          </a:solidFill>
+                          <a:latin typeface="Segoe UI"/>
+                        </a:rPr>
+                        <a:t> </a:t>
+                      </a:r>
+                    </a:p>
+                  </a:txBody>
+                  <a:tcPr>
+                    <a:solidFill>
+                      <a:srgbClr val="FFFFFF"/>
+                    </a:solidFill>
+                  </a:tcPr>
+                </a:tc>
+              </a:tr>
+              <a:tr h="201168">
+                <a:tc>
+                  <a:txBody>
+                    <a:bodyPr wrap="square" lIns="50800" rIns="50800" tIns="12700" bIns="12700" anchor="ctr"/>
+                    <a:lstStyle/>
+                    <a:p>
+                      <a:pPr algn="l"/>
+                      <a:r>
+                        <a:rPr sz="760" b="0">
+                          <a:solidFill>
+                            <a:srgbClr val="1F2937"/>
+                          </a:solidFill>
+                          <a:latin typeface="Segoe UI"/>
+                        </a:rPr>
+                        <a:t>AI scrap sorting (raise the 80% ceiling)</a:t>
+                      </a:r>
+                    </a:p>
+                  </a:txBody>
+                  <a:tcPr>
+                    <a:solidFill>
+                      <a:srgbClr val="FFFFFF"/>
+                    </a:solidFill>
+                  </a:tcPr>
+                </a:tc>
+                <a:tc>
+                  <a:txBody>
+                    <a:bodyPr wrap="square" lIns="50800" rIns="50800" tIns="12700" bIns="12700" anchor="ctr"/>
+                    <a:lstStyle/>
+                    <a:p>
+                      <a:pPr algn="l"/>
+                      <a:r>
+                        <a:rPr sz="400" b="0">
+                          <a:solidFill>
+                            <a:srgbClr val="1F2937"/>
+                          </a:solidFill>
+                          <a:latin typeface="Segoe UI"/>
+                        </a:rPr>
+                        <a:t> </a:t>
+                      </a:r>
+                    </a:p>
+                  </a:txBody>
+                  <a:tcPr>
+                    <a:solidFill>
+                      <a:srgbClr val="FFFFFF"/>
+                    </a:solidFill>
+                  </a:tcPr>
+                </a:tc>
+                <a:tc>
+                  <a:txBody>
+                    <a:bodyPr wrap="square" lIns="50800" rIns="50800" tIns="12700" bIns="12700" anchor="ctr"/>
+                    <a:lstStyle/>
+                    <a:p>
+                      <a:pPr algn="l"/>
+                      <a:r>
+                        <a:rPr sz="400" b="0">
+                          <a:solidFill>
+                            <a:srgbClr val="1F2937"/>
+                          </a:solidFill>
+                          <a:latin typeface="Segoe UI"/>
+                        </a:rPr>
+                        <a:t> </a:t>
+                      </a:r>
+                    </a:p>
+                  </a:txBody>
+                  <a:tcPr>
+                    <a:solidFill>
+                      <a:srgbClr val="1B6DB0"/>
+                    </a:solidFill>
+                  </a:tcPr>
+                </a:tc>
+                <a:tc>
+                  <a:txBody>
+                    <a:bodyPr wrap="square" lIns="50800" rIns="50800" tIns="12700" bIns="12700" anchor="ctr"/>
+                    <a:lstStyle/>
+                    <a:p>
+                      <a:pPr algn="l"/>
+                      <a:r>
+                        <a:rPr sz="400" b="0">
+                          <a:solidFill>
+                            <a:srgbClr val="1F2937"/>
+                          </a:solidFill>
+                          <a:latin typeface="Segoe UI"/>
+                        </a:rPr>
+                        <a:t> </a:t>
+                      </a:r>
+                    </a:p>
+                  </a:txBody>
+                  <a:tcPr>
+                    <a:solidFill>
+                      <a:srgbClr val="1B6DB0"/>
+                    </a:solidFill>
+                  </a:tcPr>
+                </a:tc>
+                <a:tc>
+                  <a:txBody>
+                    <a:bodyPr wrap="square" lIns="50800" rIns="50800" tIns="12700" bIns="12700" anchor="ctr"/>
+                    <a:lstStyle/>
+                    <a:p>
+                      <a:pPr algn="l"/>
+                      <a:r>
+                        <a:rPr sz="400" b="0">
+                          <a:solidFill>
+                            <a:srgbClr val="1F2937"/>
+                          </a:solidFill>
+                          <a:latin typeface="Segoe UI"/>
+                        </a:rPr>
+                        <a:t> </a:t>
+                      </a:r>
+                    </a:p>
+                  </a:txBody>
+                  <a:tcPr>
+                    <a:solidFill>
+                      <a:srgbClr val="FFFFFF"/>
+                    </a:solidFill>
+                  </a:tcPr>
+                </a:tc>
+                <a:tc>
+                  <a:txBody>
+                    <a:bodyPr wrap="square" lIns="50800" rIns="50800" tIns="12700" bIns="12700" anchor="ctr"/>
+                    <a:lstStyle/>
+                    <a:p>
+                      <a:pPr algn="l"/>
+                      <a:r>
+                        <a:rPr sz="400" b="0">
+                          <a:solidFill>
+                            <a:srgbClr val="1F2937"/>
+                          </a:solidFill>
+                          <a:latin typeface="Segoe UI"/>
+                        </a:rPr>
+                        <a:t> </a:t>
+                      </a:r>
+                    </a:p>
+                  </a:txBody>
+                  <a:tcPr>
+                    <a:solidFill>
+                      <a:srgbClr val="FFFFFF"/>
+                    </a:solidFill>
+                  </a:tcPr>
+                </a:tc>
+              </a:tr>
+              <a:tr h="201168">
+                <a:tc>
+                  <a:txBody>
+                    <a:bodyPr wrap="square" lIns="50800" rIns="50800" tIns="12700" bIns="12700" anchor="ctr"/>
+                    <a:lstStyle/>
+                    <a:p>
+                      <a:pPr algn="l"/>
+                      <a:r>
+                        <a:rPr sz="760" b="0">
+                          <a:solidFill>
+                            <a:srgbClr val="1F2937"/>
+                          </a:solidFill>
+                          <a:latin typeface="Segoe UI"/>
+                        </a:rPr>
+                        <a:t>Biochar in ferrochrome; slag to cement</a:t>
+                      </a:r>
+                    </a:p>
+                  </a:txBody>
+                  <a:tcPr>
+                    <a:solidFill>
+                      <a:srgbClr val="FFFFFF"/>
+                    </a:solidFill>
+                  </a:tcPr>
+                </a:tc>
+                <a:tc>
+                  <a:txBody>
+                    <a:bodyPr wrap="square" lIns="50800" rIns="50800" tIns="12700" bIns="12700" anchor="ctr"/>
+                    <a:lstStyle/>
+                    <a:p>
+                      <a:pPr algn="l"/>
+                      <a:r>
+                        <a:rPr sz="400" b="0">
+                          <a:solidFill>
+                            <a:srgbClr val="1F2937"/>
+                          </a:solidFill>
+                          <a:latin typeface="Segoe UI"/>
+                        </a:rPr>
+                        <a:t> </a:t>
+                      </a:r>
+                    </a:p>
+                  </a:txBody>
+                  <a:tcPr>
+                    <a:solidFill>
+                      <a:srgbClr val="FFFFFF"/>
+                    </a:solidFill>
+                  </a:tcPr>
+                </a:tc>
+                <a:tc>
+                  <a:txBody>
+                    <a:bodyPr wrap="square" lIns="50800" rIns="50800" tIns="12700" bIns="12700" anchor="ctr"/>
+                    <a:lstStyle/>
+                    <a:p>
+                      <a:pPr algn="l"/>
+                      <a:r>
+                        <a:rPr sz="400" b="0">
+                          <a:solidFill>
+                            <a:srgbClr val="1F2937"/>
+                          </a:solidFill>
+                          <a:latin typeface="Segoe UI"/>
+                        </a:rPr>
+                        <a:t> </a:t>
+                      </a:r>
+                    </a:p>
+                  </a:txBody>
+                  <a:tcPr>
+                    <a:solidFill>
+                      <a:srgbClr val="FFFFFF"/>
+                    </a:solidFill>
+                  </a:tcPr>
+                </a:tc>
+                <a:tc>
+                  <a:txBody>
+                    <a:bodyPr wrap="square" lIns="50800" rIns="50800" tIns="12700" bIns="12700" anchor="ctr"/>
+                    <a:lstStyle/>
+                    <a:p>
+                      <a:pPr algn="l"/>
+                      <a:r>
+                        <a:rPr sz="400" b="0">
+                          <a:solidFill>
+                            <a:srgbClr val="1F2937"/>
+                          </a:solidFill>
+                          <a:latin typeface="Segoe UI"/>
+                        </a:rPr>
+                        <a:t> </a:t>
+                      </a:r>
+                    </a:p>
+                  </a:txBody>
+                  <a:tcPr>
+                    <a:solidFill>
+                      <a:srgbClr val="A8720E"/>
+                    </a:solidFill>
+                  </a:tcPr>
+                </a:tc>
+                <a:tc>
+                  <a:txBody>
+                    <a:bodyPr wrap="square" lIns="50800" rIns="50800" tIns="12700" bIns="12700" anchor="ctr"/>
+                    <a:lstStyle/>
+                    <a:p>
+                      <a:pPr algn="l"/>
+                      <a:r>
+                        <a:rPr sz="400" b="0">
+                          <a:solidFill>
+                            <a:srgbClr val="1F2937"/>
+                          </a:solidFill>
+                          <a:latin typeface="Segoe UI"/>
+                        </a:rPr>
+                        <a:t> </a:t>
+                      </a:r>
+                    </a:p>
+                  </a:txBody>
+                  <a:tcPr>
+                    <a:solidFill>
+                      <a:srgbClr val="A8720E"/>
+                    </a:solidFill>
+                  </a:tcPr>
+                </a:tc>
+                <a:tc>
+                  <a:txBody>
+                    <a:bodyPr wrap="square" lIns="50800" rIns="50800" tIns="12700" bIns="12700" anchor="ctr"/>
+                    <a:lstStyle/>
+                    <a:p>
+                      <a:pPr algn="l"/>
+                      <a:r>
+                        <a:rPr sz="400" b="0">
+                          <a:solidFill>
+                            <a:srgbClr val="1F2937"/>
+                          </a:solidFill>
+                          <a:latin typeface="Segoe UI"/>
+                        </a:rPr>
+                        <a:t> </a:t>
+                      </a:r>
+                    </a:p>
+                  </a:txBody>
+                  <a:tcPr>
+                    <a:solidFill>
+                      <a:srgbClr val="FFFFFF"/>
+                    </a:solidFill>
+                  </a:tcPr>
+                </a:tc>
+              </a:tr>
+              <a:tr h="201168">
+                <a:tc>
+                  <a:txBody>
+                    <a:bodyPr wrap="square" lIns="50800" rIns="50800" tIns="12700" bIns="12700" anchor="ctr"/>
+                    <a:lstStyle/>
+                    <a:p>
+                      <a:pPr algn="l"/>
+                      <a:r>
+                        <a:rPr sz="760" b="0">
+                          <a:solidFill>
+                            <a:srgbClr val="1F2937"/>
+                          </a:solidFill>
+                          <a:latin typeface="Segoe UI"/>
+                        </a:rPr>
+                        <a:t>Product passport per heat (EU DPP)</a:t>
+                      </a:r>
+                    </a:p>
+                  </a:txBody>
+                  <a:tcPr>
+                    <a:solidFill>
+                      <a:srgbClr val="FFFFFF"/>
+                    </a:solidFill>
+                  </a:tcPr>
+                </a:tc>
+                <a:tc>
+                  <a:txBody>
+                    <a:bodyPr wrap="square" lIns="50800" rIns="50800" tIns="12700" bIns="12700" anchor="ctr"/>
+                    <a:lstStyle/>
+                    <a:p>
+                      <a:pPr algn="l"/>
+                      <a:r>
+                        <a:rPr sz="400" b="0">
+                          <a:solidFill>
+                            <a:srgbClr val="1F2937"/>
+                          </a:solidFill>
+                          <a:latin typeface="Segoe UI"/>
+                        </a:rPr>
+                        <a:t> </a:t>
+                      </a:r>
+                    </a:p>
+                  </a:txBody>
+                  <a:tcPr>
+                    <a:solidFill>
+                      <a:srgbClr val="FFFFFF"/>
+                    </a:solidFill>
+                  </a:tcPr>
+                </a:tc>
+                <a:tc>
+                  <a:txBody>
+                    <a:bodyPr wrap="square" lIns="50800" rIns="50800" tIns="12700" bIns="12700" anchor="ctr"/>
+                    <a:lstStyle/>
+                    <a:p>
+                      <a:pPr algn="l"/>
+                      <a:r>
+                        <a:rPr sz="400" b="0">
+                          <a:solidFill>
+                            <a:srgbClr val="1F2937"/>
+                          </a:solidFill>
+                          <a:latin typeface="Segoe UI"/>
+                        </a:rPr>
+                        <a:t> </a:t>
+                      </a:r>
+                    </a:p>
+                  </a:txBody>
+                  <a:tcPr>
+                    <a:solidFill>
+                      <a:srgbClr val="FFFFFF"/>
+                    </a:solidFill>
+                  </a:tcPr>
+                </a:tc>
+                <a:tc>
+                  <a:txBody>
+                    <a:bodyPr wrap="square" lIns="50800" rIns="50800" tIns="12700" bIns="12700" anchor="ctr"/>
+                    <a:lstStyle/>
+                    <a:p>
+                      <a:pPr algn="l"/>
+                      <a:r>
+                        <a:rPr sz="400" b="0">
+                          <a:solidFill>
+                            <a:srgbClr val="1F2937"/>
+                          </a:solidFill>
+                          <a:latin typeface="Segoe UI"/>
+                        </a:rPr>
+                        <a:t> </a:t>
+                      </a:r>
+                    </a:p>
+                  </a:txBody>
+                  <a:tcPr>
+                    <a:solidFill>
+                      <a:srgbClr val="FFFFFF"/>
+                    </a:solidFill>
+                  </a:tcPr>
+                </a:tc>
+                <a:tc>
+                  <a:txBody>
+                    <a:bodyPr wrap="square" lIns="50800" rIns="50800" tIns="12700" bIns="12700" anchor="ctr"/>
+                    <a:lstStyle/>
+                    <a:p>
+                      <a:pPr algn="l"/>
+                      <a:r>
+                        <a:rPr sz="400" b="0">
+                          <a:solidFill>
+                            <a:srgbClr val="1F2937"/>
+                          </a:solidFill>
+                          <a:latin typeface="Segoe UI"/>
+                        </a:rPr>
+                        <a:t> </a:t>
+                      </a:r>
+                    </a:p>
+                  </a:txBody>
+                  <a:tcPr>
+                    <a:solidFill>
+                      <a:srgbClr val="1B6DB0"/>
+                    </a:solidFill>
+                  </a:tcPr>
+                </a:tc>
+                <a:tc>
+                  <a:txBody>
+                    <a:bodyPr wrap="square" lIns="50800" rIns="50800" tIns="12700" bIns="12700" anchor="ctr"/>
+                    <a:lstStyle/>
+                    <a:p>
+                      <a:pPr algn="l"/>
+                      <a:r>
+                        <a:rPr sz="400" b="0">
+                          <a:solidFill>
+                            <a:srgbClr val="1F2937"/>
+                          </a:solidFill>
+                          <a:latin typeface="Segoe UI"/>
+                        </a:rPr>
+                        <a:t> </a:t>
+                      </a:r>
+                    </a:p>
+                  </a:txBody>
+                  <a:tcPr>
+                    <a:solidFill>
+                      <a:srgbClr val="1B6DB0"/>
+                    </a:solidFill>
+                  </a:tcPr>
+                </a:tc>
+              </a:tr>
+            </a:tbl>
+          </a:graphicData>
+        </a:graphic>
+      </p:graphicFrame>
+      <p:sp>
+        <p:nvSpPr>
+          <p:cNvPr id="41" name="TextBox 40"/>
+          <p:cNvSpPr txBox="1"/>
+          <p:nvPr/>
+        </p:nvSpPr>
+        <p:spPr>
+          <a:xfrm>
+            <a:off x="6601968" y="5925312"/>
+            <a:ext cx="5297119" cy="182880"/>
+          </a:xfrm>
+          <a:prstGeom prst="rect">
+            <a:avLst/>
+          </a:prstGeom>
+          <a:noFill/>
+        </p:spPr>
+        <p:txBody>
+          <a:bodyPr wrap="square" anchor="t" lIns="19050" rIns="19050" tIns="6350" bIns="6350">
+            <a:spAutoFit/>
+          </a:bodyPr>
+          <a:lstStyle/>
+          <a:p>
+            <a:pPr algn="l">
+              <a:lnSpc>
+                <a:spcPct val="100000"/>
+              </a:lnSpc>
+              <a:spcAft>
+                <a:spcPts val="0"/>
+              </a:spcAft>
+            </a:pPr>
+            <a:r>
+              <a:rPr sz="900" b="1">
+                <a:solidFill>
+                  <a:srgbClr val="1B6DB0"/>
+                </a:solidFill>
+                <a:latin typeface="Segoe UI"/>
+              </a:rPr>
+              <a:t>ASSUMPTIONS &amp; LIMITATIONS</a:t>
+            </a:r>
+          </a:p>
+        </p:txBody>
+      </p:sp>
+      <p:sp>
+        <p:nvSpPr>
+          <p:cNvPr id="42" name="Rectangle 41"/>
+          <p:cNvSpPr/>
+          <p:nvPr/>
+        </p:nvSpPr>
+        <p:spPr>
+          <a:xfrm>
+            <a:off x="6601968" y="6117336"/>
+            <a:ext cx="5297119" cy="10160"/>
+          </a:xfrm>
+          <a:prstGeom prst="rect">
+            <a:avLst/>
+          </a:prstGeom>
+          <a:solidFill>
+            <a:srgbClr val="E2E8EF"/>
+          </a:solidFill>
+          <a:ln>
+            <a:noFill/>
+          </a:ln>
+          <a:effectLst/>
+        </p:spPr>
+        <p:style>
+          <a:lnRef idx="1">
+            <a:schemeClr val="accent1"/>
+          </a:lnRef>
+          <a:fillRef idx="3">
+            <a:schemeClr val="accent1"/>
+          </a:fillRef>
+          <a:effectRef idx="2">
+            <a:schemeClr val="accent1"/>
+          </a:effectRef>
+          <a:fontRef idx="minor">
+            <a:schemeClr val="lt1"/>
+          </a:fontRef>
+        </p:style>
+        <p:txBody>
+          <a:bodyPr rtlCol="0" anchor="ctr"/>
+          <a:lstStyle/>
+          <a:p>
+            <a:pPr algn="ctr"/>
+          </a:p>
+        </p:txBody>
+      </p:sp>
+      <p:sp>
+        <p:nvSpPr>
+          <p:cNvPr id="43" name="TextBox 42"/>
+          <p:cNvSpPr txBox="1"/>
+          <p:nvPr/>
+        </p:nvSpPr>
+        <p:spPr>
+          <a:xfrm>
+            <a:off x="6601968" y="6172200"/>
+            <a:ext cx="5297119" cy="365760"/>
+          </a:xfrm>
+          <a:prstGeom prst="rect">
+            <a:avLst/>
+          </a:prstGeom>
+          <a:noFill/>
+        </p:spPr>
+        <p:txBody>
+          <a:bodyPr wrap="square" anchor="t" lIns="19050" rIns="19050" tIns="6350" bIns="6350">
+            <a:spAutoFit/>
+          </a:bodyPr>
+          <a:lstStyle/>
+          <a:p>
+            <a:pPr algn="l">
+              <a:lnSpc>
+                <a:spcPct val="105000"/>
+              </a:lnSpc>
+              <a:spcAft>
+                <a:spcPts val="200"/>
+              </a:spcAft>
+            </a:pPr>
+            <a:r>
+              <a:rPr sz="740" b="0">
+                <a:solidFill>
+                  <a:srgbClr val="5B6570"/>
+                </a:solidFill>
+                <a:latin typeface="Segoe UI"/>
+              </a:rPr>
+              <a:t>Per tonne of crude steel; Scope 2 market-based; CBAM prices direct emissions only (conservative). FeMo ±30%; NPI 60–85 t/t; ETS path (€80→€109) is analyst consensus — savings scale with realised price.</a:t>
+            </a:r>
+          </a:p>
+        </p:txBody>
+      </p:sp>
+      <p:sp>
+        <p:nvSpPr>
+          <p:cNvPr id="44" name="Rectangle 43"/>
+          <p:cNvSpPr/>
+          <p:nvPr/>
+        </p:nvSpPr>
+        <p:spPr>
+          <a:xfrm>
+            <a:off x="292608" y="6382512"/>
+            <a:ext cx="11606479" cy="10160"/>
+          </a:xfrm>
+          <a:prstGeom prst="rect">
+            <a:avLst/>
+          </a:prstGeom>
+          <a:solidFill>
+            <a:srgbClr val="E2E8EF"/>
+          </a:solidFill>
+          <a:ln>
+            <a:noFill/>
+          </a:ln>
+          <a:effectLst/>
+        </p:spPr>
+        <p:style>
+          <a:lnRef idx="1">
+            <a:schemeClr val="accent1"/>
+          </a:lnRef>
+          <a:fillRef idx="3">
+            <a:schemeClr val="accent1"/>
+          </a:fillRef>
+          <a:effectRef idx="2">
+            <a:schemeClr val="accent1"/>
+          </a:effectRef>
+          <a:fontRef idx="minor">
+            <a:schemeClr val="lt1"/>
+          </a:fontRef>
+        </p:style>
+        <p:txBody>
+          <a:bodyPr rtlCol="0" anchor="ctr"/>
+          <a:lstStyle/>
+          <a:p>
+            <a:pPr algn="ctr"/>
+          </a:p>
+        </p:txBody>
+      </p:sp>
+      <p:sp>
+        <p:nvSpPr>
+          <p:cNvPr id="45" name="TextBox 44"/>
+          <p:cNvSpPr txBox="1"/>
+          <p:nvPr/>
+        </p:nvSpPr>
+        <p:spPr>
+          <a:xfrm>
+            <a:off x="292608" y="6437376"/>
+            <a:ext cx="11155680" cy="384048"/>
+          </a:xfrm>
+          <a:prstGeom prst="rect">
+            <a:avLst/>
+          </a:prstGeom>
+          <a:noFill/>
+        </p:spPr>
+        <p:txBody>
+          <a:bodyPr wrap="square" anchor="t" lIns="19050" rIns="19050" tIns="6350" bIns="6350">
+            <a:spAutoFit/>
+          </a:bodyPr>
+          <a:lstStyle/>
+          <a:p>
+            <a:pPr algn="l">
+              <a:lnSpc>
+                <a:spcPct val="115000"/>
+              </a:lnSpc>
+              <a:spcAft>
+                <a:spcPts val="200"/>
+              </a:spcAft>
+            </a:pPr>
+            <a:r>
+              <a:rPr sz="700" b="0">
+                <a:solidFill>
+                  <a:srgbClr val="8A94A0"/>
+                </a:solidFill>
+                <a:latin typeface="Segoe UI"/>
+              </a:rPr>
+              <a:t>Source: JSL ESG Factsheets, BRSR, CDP FY22–26; EU Regulations 2023/956, 2025/2620-21, 2026/1740; CEA v21.0; worldstainless/ISSF; ICDA; Goldman Sachs, ICRA, CRISIL analyst reports; team analysis.  </a:t>
+            </a:r>
+            <a:r>
+              <a:rPr sz="700" b="1">
+                <a:solidFill>
+                  <a:srgbClr val="5B6570"/>
+                </a:solidFill>
+                <a:latin typeface="Segoe UI"/>
+              </a:rPr>
+              <a:t>Live prototype: </a:t>
+            </a:r>
+            <a:r>
+              <a:rPr sz="700" b="0">
+                <a:solidFill>
+                  <a:srgbClr val="1B6DB0"/>
+                </a:solidFill>
+                <a:latin typeface="Segoe UI"/>
+                <a:hlinkClick r:id="rId2"/>
+              </a:rPr>
+              <a:t>ritehrks.github.io/jindal-steel-case-study/website</a:t>
+            </a:r>
+            <a:r>
+              <a:rPr sz="700" b="0">
+                <a:solidFill>
+                  <a:srgbClr val="8A94A0"/>
+                </a:solidFill>
+                <a:latin typeface="Segoe UI"/>
+              </a:rPr>
+              <a:t>   ·   </a:t>
+            </a:r>
+            <a:r>
+              <a:rPr sz="700" b="1">
+                <a:solidFill>
+                  <a:srgbClr val="5B6570"/>
+                </a:solidFill>
+                <a:latin typeface="Segoe UI"/>
+              </a:rPr>
+              <a:t>Research appendix: </a:t>
+            </a:r>
+            <a:r>
+              <a:rPr sz="700" b="0">
+                <a:solidFill>
+                  <a:srgbClr val="1B6DB0"/>
+                </a:solidFill>
+                <a:latin typeface="Segoe UI"/>
+                <a:hlinkClick r:id="rId3"/>
+              </a:rPr>
+              <a:t>ritehrks.github.io/jindal-steel-case-study/appendix.pdf</a:t>
+            </a:r>
+          </a:p>
+        </p:txBody>
+      </p:sp>
+      <p:sp>
+        <p:nvSpPr>
+          <p:cNvPr id="46" name="TextBox 45"/>
+          <p:cNvSpPr txBox="1"/>
+          <p:nvPr/>
+        </p:nvSpPr>
+        <p:spPr>
+          <a:xfrm>
+            <a:off x="11750040" y="6437376"/>
+            <a:ext cx="320040" cy="201168"/>
+          </a:xfrm>
+          <a:prstGeom prst="rect">
+            <a:avLst/>
+          </a:prstGeom>
+          <a:noFill/>
+        </p:spPr>
+        <p:txBody>
+          <a:bodyPr wrap="square" anchor="t" lIns="19050" rIns="19050" tIns="6350" bIns="6350">
+            <a:spAutoFit/>
+          </a:bodyPr>
+          <a:lstStyle/>
+          <a:p>
+            <a:pPr algn="r">
+              <a:lnSpc>
+                <a:spcPct val="100000"/>
+              </a:lnSpc>
+              <a:spcAft>
+                <a:spcPts val="200"/>
+              </a:spcAft>
+            </a:pPr>
+            <a:r>
+              <a:rPr sz="800" b="0">
+                <a:solidFill>
+                  <a:srgbClr val="5B6570"/>
+                </a:solidFill>
+                <a:latin typeface="Segoe UI"/>
+              </a:rPr>
+              <a:t>2</a:t>
+            </a:r>
           </a:p>
         </p:txBody>
       </p:sp>
